--- a/nvc-pitch-deck.pptx
+++ b/nvc-pitch-deck.pptx
@@ -3089,6 +3089,14 @@
 <file path=ppt/slides/slide1.xml><?xml version="1.0" encoding="utf-8"?>
 <p:sld xmlns:a="http://schemas.openxmlformats.org/drawingml/2006/main" xmlns:p="http://schemas.openxmlformats.org/presentationml/2006/main" xmlns:r="http://schemas.openxmlformats.org/officeDocument/2006/relationships">
   <p:cSld>
+    <p:bg>
+      <p:bgPr>
+        <a:solidFill>
+          <a:srgbClr val="FAF8F4"/>
+        </a:solidFill>
+        <a:effectLst/>
+      </p:bgPr>
+    </p:bg>
     <p:spTree>
       <p:nvGrpSpPr>
         <p:cNvPr id="1" name=""/>
@@ -3096,30 +3104,363 @@
         <p:nvPr/>
       </p:nvGrpSpPr>
       <p:grpSpPr/>
-      <p:pic>
-        <p:nvPicPr>
-          <p:cNvPr id="2" name="Picture 1" descr="slide_01.png"/>
-          <p:cNvPicPr>
-            <a:picLocks noChangeAspect="1"/>
-          </p:cNvPicPr>
-          <p:nvPr/>
-        </p:nvPicPr>
-        <p:blipFill>
-          <a:blip r:embed="rId2"/>
-          <a:stretch>
-            <a:fillRect/>
-          </a:stretch>
-        </p:blipFill>
+      <p:sp>
+        <p:nvSpPr>
+          <p:cNvPr id="2" name="Rectangle 1"/>
+          <p:cNvSpPr/>
+          <p:nvPr/>
+        </p:nvSpPr>
         <p:spPr>
           <a:xfrm>
             <a:off x="0" y="0"/>
-            <a:ext cx="12191695" cy="6858000"/>
-          </a:xfrm>
-          <a:prstGeom prst="rect">
-            <a:avLst/>
-          </a:prstGeom>
-        </p:spPr>
-      </p:pic>
+            <a:ext cx="12191695" cy="54864"/>
+          </a:xfrm>
+          <a:prstGeom prst="rect">
+            <a:avLst/>
+          </a:prstGeom>
+          <a:solidFill>
+            <a:srgbClr val="4A7C59"/>
+          </a:solidFill>
+          <a:ln>
+            <a:noFill/>
+          </a:ln>
+        </p:spPr>
+        <p:style>
+          <a:lnRef idx="1">
+            <a:schemeClr val="accent1"/>
+          </a:lnRef>
+          <a:fillRef idx="3">
+            <a:schemeClr val="accent1"/>
+          </a:fillRef>
+          <a:effectRef idx="2">
+            <a:schemeClr val="accent1"/>
+          </a:effectRef>
+          <a:fontRef idx="minor">
+            <a:schemeClr val="lt1"/>
+          </a:fontRef>
+        </p:style>
+        <p:txBody>
+          <a:bodyPr rtlCol="0" anchor="ctr"/>
+          <a:lstStyle/>
+          <a:p>
+            <a:pPr algn="ctr"/>
+          </a:p>
+        </p:txBody>
+      </p:sp>
+      <p:sp>
+        <p:nvSpPr>
+          <p:cNvPr id="3" name="TextBox 2"/>
+          <p:cNvSpPr txBox="1"/>
+          <p:nvPr/>
+        </p:nvSpPr>
+        <p:spPr>
+          <a:xfrm>
+            <a:off x="1097280" y="6400800"/>
+            <a:ext cx="3657600" cy="274320"/>
+          </a:xfrm>
+          <a:prstGeom prst="rect">
+            <a:avLst/>
+          </a:prstGeom>
+          <a:noFill/>
+        </p:spPr>
+        <p:txBody>
+          <a:bodyPr wrap="none">
+            <a:spAutoFit/>
+          </a:bodyPr>
+          <a:lstStyle/>
+          <a:p>
+            <a:pPr>
+              <a:defRPr sz="900">
+                <a:solidFill>
+                  <a:srgbClr val="9A9690"/>
+                </a:solidFill>
+                <a:latin typeface="Calibri"/>
+              </a:defRPr>
+            </a:pPr>
+            <a:r>
+              <a:t>parachute.computer</a:t>
+            </a:r>
+          </a:p>
+        </p:txBody>
+      </p:sp>
+      <p:sp>
+        <p:nvSpPr>
+          <p:cNvPr id="4" name="TextBox 3"/>
+          <p:cNvSpPr txBox="1"/>
+          <p:nvPr/>
+        </p:nvSpPr>
+        <p:spPr>
+          <a:xfrm>
+            <a:off x="1097280" y="1097280"/>
+            <a:ext cx="3657600" cy="365760"/>
+          </a:xfrm>
+          <a:prstGeom prst="rect">
+            <a:avLst/>
+          </a:prstGeom>
+          <a:noFill/>
+        </p:spPr>
+        <p:txBody>
+          <a:bodyPr wrap="square">
+            <a:spAutoFit/>
+          </a:bodyPr>
+          <a:lstStyle/>
+          <a:p>
+            <a:pPr algn="l">
+              <a:lnSpc>
+                <a:spcPct val="120000"/>
+              </a:lnSpc>
+              <a:spcBef>
+                <a:spcPts val="0"/>
+              </a:spcBef>
+              <a:spcAft>
+                <a:spcPts val="0"/>
+              </a:spcAft>
+              <a:defRPr sz="1100" b="1">
+                <a:solidFill>
+                  <a:srgbClr val="4A7C59"/>
+                </a:solidFill>
+                <a:latin typeface="Calibri"/>
+              </a:defRPr>
+            </a:pPr>
+            <a:r>
+              <a:t>THE LANDSCAPE</a:t>
+            </a:r>
+          </a:p>
+        </p:txBody>
+      </p:sp>
+      <p:sp>
+        <p:nvSpPr>
+          <p:cNvPr id="5" name="TextBox 4"/>
+          <p:cNvSpPr txBox="1"/>
+          <p:nvPr/>
+        </p:nvSpPr>
+        <p:spPr>
+          <a:xfrm>
+            <a:off x="1097280" y="1554480"/>
+            <a:ext cx="9144000" cy="1371600"/>
+          </a:xfrm>
+          <a:prstGeom prst="rect">
+            <a:avLst/>
+          </a:prstGeom>
+          <a:noFill/>
+        </p:spPr>
+        <p:txBody>
+          <a:bodyPr wrap="square">
+            <a:spAutoFit/>
+          </a:bodyPr>
+          <a:lstStyle/>
+          <a:p>
+            <a:pPr algn="l">
+              <a:lnSpc>
+                <a:spcPct val="105000"/>
+              </a:lnSpc>
+              <a:spcBef>
+                <a:spcPts val="0"/>
+              </a:spcBef>
+              <a:spcAft>
+                <a:spcPts val="0"/>
+              </a:spcAft>
+              <a:defRPr sz="4000" b="0">
+                <a:solidFill>
+                  <a:srgbClr val="2C2A26"/>
+                </a:solidFill>
+                <a:latin typeface="Georgia"/>
+              </a:defRPr>
+            </a:pPr>
+            <a:r>
+              <a:t>Everyone is racing to build</a:t>
+            </a:r>
+            <a:br/>
+            <a:r>
+              <a:t>your AI agent.</a:t>
+            </a:r>
+          </a:p>
+        </p:txBody>
+      </p:sp>
+      <p:sp>
+        <p:nvSpPr>
+          <p:cNvPr id="6" name="TextBox 5"/>
+          <p:cNvSpPr txBox="1"/>
+          <p:nvPr/>
+        </p:nvSpPr>
+        <p:spPr>
+          <a:xfrm>
+            <a:off x="1097280" y="3200400"/>
+            <a:ext cx="9144000" cy="914400"/>
+          </a:xfrm>
+          <a:prstGeom prst="rect">
+            <a:avLst/>
+          </a:prstGeom>
+          <a:noFill/>
+        </p:spPr>
+        <p:txBody>
+          <a:bodyPr wrap="square">
+            <a:spAutoFit/>
+          </a:bodyPr>
+          <a:lstStyle/>
+          <a:p>
+            <a:pPr algn="l">
+              <a:lnSpc>
+                <a:spcPct val="150000"/>
+              </a:lnSpc>
+              <a:spcBef>
+                <a:spcPts val="0"/>
+              </a:spcBef>
+              <a:spcAft>
+                <a:spcPts val="0"/>
+              </a:spcAft>
+              <a:defRPr sz="1800" b="0">
+                <a:solidFill>
+                  <a:srgbClr val="6B6860"/>
+                </a:solidFill>
+                <a:latin typeface="Calibri"/>
+              </a:defRPr>
+            </a:pPr>
+            <a:r>
+              <a:t>OpenClaw. Claude Cowork. ZoComputer. Perplexity Computer. Manus.</a:t>
+            </a:r>
+            <a:br/>
+            <a:r>
+              <a:t>Over 100 million people already pay $20+/month for AI.</a:t>
+            </a:r>
+          </a:p>
+        </p:txBody>
+      </p:sp>
+      <p:sp>
+        <p:nvSpPr>
+          <p:cNvPr id="7" name="TextBox 6"/>
+          <p:cNvSpPr txBox="1"/>
+          <p:nvPr/>
+        </p:nvSpPr>
+        <p:spPr>
+          <a:xfrm>
+            <a:off x="1097280" y="4572000"/>
+            <a:ext cx="2743200" cy="1097280"/>
+          </a:xfrm>
+          <a:prstGeom prst="rect">
+            <a:avLst/>
+          </a:prstGeom>
+          <a:noFill/>
+        </p:spPr>
+        <p:txBody>
+          <a:bodyPr wrap="square">
+            <a:spAutoFit/>
+          </a:bodyPr>
+          <a:lstStyle/>
+          <a:p>
+            <a:pPr algn="l">
+              <a:lnSpc>
+                <a:spcPct val="120000"/>
+              </a:lnSpc>
+              <a:spcBef>
+                <a:spcPts val="0"/>
+              </a:spcBef>
+              <a:spcAft>
+                <a:spcPts val="0"/>
+              </a:spcAft>
+              <a:defRPr sz="6400" b="0">
+                <a:solidFill>
+                  <a:srgbClr val="4A7C59"/>
+                </a:solidFill>
+                <a:latin typeface="Georgia"/>
+              </a:defRPr>
+            </a:pPr>
+            <a:r>
+              <a:t>$50B+</a:t>
+            </a:r>
+          </a:p>
+        </p:txBody>
+      </p:sp>
+      <p:sp>
+        <p:nvSpPr>
+          <p:cNvPr id="8" name="TextBox 7"/>
+          <p:cNvSpPr txBox="1"/>
+          <p:nvPr/>
+        </p:nvSpPr>
+        <p:spPr>
+          <a:xfrm>
+            <a:off x="4114800" y="4800600"/>
+            <a:ext cx="4572000" cy="731520"/>
+          </a:xfrm>
+          <a:prstGeom prst="rect">
+            <a:avLst/>
+          </a:prstGeom>
+          <a:noFill/>
+        </p:spPr>
+        <p:txBody>
+          <a:bodyPr wrap="square">
+            <a:spAutoFit/>
+          </a:bodyPr>
+          <a:lstStyle/>
+          <a:p>
+            <a:pPr algn="l">
+              <a:lnSpc>
+                <a:spcPct val="140000"/>
+              </a:lnSpc>
+              <a:spcBef>
+                <a:spcPts val="0"/>
+              </a:spcBef>
+              <a:spcAft>
+                <a:spcPts val="0"/>
+              </a:spcAft>
+              <a:defRPr sz="1600" b="0">
+                <a:solidFill>
+                  <a:srgbClr val="6B6860"/>
+                </a:solidFill>
+                <a:latin typeface="Calibri"/>
+              </a:defRPr>
+            </a:pPr>
+            <a:r>
+              <a:t>agentic AI market by 2030 · 44% CAGR</a:t>
+            </a:r>
+          </a:p>
+        </p:txBody>
+      </p:sp>
+      <p:sp>
+        <p:nvSpPr>
+          <p:cNvPr id="9" name="TextBox 8"/>
+          <p:cNvSpPr txBox="1"/>
+          <p:nvPr/>
+        </p:nvSpPr>
+        <p:spPr>
+          <a:xfrm>
+            <a:off x="1097280" y="5760720"/>
+            <a:ext cx="9144000" cy="548640"/>
+          </a:xfrm>
+          <a:prstGeom prst="rect">
+            <a:avLst/>
+          </a:prstGeom>
+          <a:noFill/>
+        </p:spPr>
+        <p:txBody>
+          <a:bodyPr wrap="square">
+            <a:spAutoFit/>
+          </a:bodyPr>
+          <a:lstStyle/>
+          <a:p>
+            <a:pPr algn="l">
+              <a:lnSpc>
+                <a:spcPct val="120000"/>
+              </a:lnSpc>
+              <a:spcBef>
+                <a:spcPts val="0"/>
+              </a:spcBef>
+              <a:spcAft>
+                <a:spcPts val="0"/>
+              </a:spcAft>
+              <a:defRPr sz="2200" b="0">
+                <a:solidFill>
+                  <a:srgbClr val="2C2A26"/>
+                </a:solidFill>
+                <a:latin typeface="Georgia"/>
+              </a:defRPr>
+            </a:pPr>
+            <a:r>
+              <a:t>Features get cloned in weeks. It’s a race to the bottom. So we stopped trying to win it.</a:t>
+            </a:r>
+          </a:p>
+        </p:txBody>
+      </p:sp>
     </p:spTree>
   </p:cSld>
   <p:clrMapOvr>
@@ -3131,6 +3472,14 @@
 <file path=ppt/slides/slide2.xml><?xml version="1.0" encoding="utf-8"?>
 <p:sld xmlns:a="http://schemas.openxmlformats.org/drawingml/2006/main" xmlns:p="http://schemas.openxmlformats.org/presentationml/2006/main" xmlns:r="http://schemas.openxmlformats.org/officeDocument/2006/relationships">
   <p:cSld>
+    <p:bg>
+      <p:bgPr>
+        <a:solidFill>
+          <a:srgbClr val="FAF8F4"/>
+        </a:solidFill>
+        <a:effectLst/>
+      </p:bgPr>
+    </p:bg>
     <p:spTree>
       <p:nvGrpSpPr>
         <p:cNvPr id="1" name=""/>
@@ -3138,30 +3487,334 @@
         <p:nvPr/>
       </p:nvGrpSpPr>
       <p:grpSpPr/>
-      <p:pic>
-        <p:nvPicPr>
-          <p:cNvPr id="2" name="Picture 1" descr="slide_02.png"/>
-          <p:cNvPicPr>
-            <a:picLocks noChangeAspect="1"/>
-          </p:cNvPicPr>
-          <p:nvPr/>
-        </p:nvPicPr>
-        <p:blipFill>
-          <a:blip r:embed="rId2"/>
-          <a:stretch>
-            <a:fillRect/>
-          </a:stretch>
-        </p:blipFill>
+      <p:sp>
+        <p:nvSpPr>
+          <p:cNvPr id="2" name="Rectangle 1"/>
+          <p:cNvSpPr/>
+          <p:nvPr/>
+        </p:nvSpPr>
         <p:spPr>
           <a:xfrm>
             <a:off x="0" y="0"/>
-            <a:ext cx="12191695" cy="6858000"/>
-          </a:xfrm>
-          <a:prstGeom prst="rect">
-            <a:avLst/>
-          </a:prstGeom>
-        </p:spPr>
-      </p:pic>
+            <a:ext cx="12191695" cy="54864"/>
+          </a:xfrm>
+          <a:prstGeom prst="rect">
+            <a:avLst/>
+          </a:prstGeom>
+          <a:solidFill>
+            <a:srgbClr val="4A7C59"/>
+          </a:solidFill>
+          <a:ln>
+            <a:noFill/>
+          </a:ln>
+        </p:spPr>
+        <p:style>
+          <a:lnRef idx="1">
+            <a:schemeClr val="accent1"/>
+          </a:lnRef>
+          <a:fillRef idx="3">
+            <a:schemeClr val="accent1"/>
+          </a:fillRef>
+          <a:effectRef idx="2">
+            <a:schemeClr val="accent1"/>
+          </a:effectRef>
+          <a:fontRef idx="minor">
+            <a:schemeClr val="lt1"/>
+          </a:fontRef>
+        </p:style>
+        <p:txBody>
+          <a:bodyPr rtlCol="0" anchor="ctr"/>
+          <a:lstStyle/>
+          <a:p>
+            <a:pPr algn="ctr"/>
+          </a:p>
+        </p:txBody>
+      </p:sp>
+      <p:sp>
+        <p:nvSpPr>
+          <p:cNvPr id="3" name="TextBox 2"/>
+          <p:cNvSpPr txBox="1"/>
+          <p:nvPr/>
+        </p:nvSpPr>
+        <p:spPr>
+          <a:xfrm>
+            <a:off x="1097280" y="6400800"/>
+            <a:ext cx="3657600" cy="274320"/>
+          </a:xfrm>
+          <a:prstGeom prst="rect">
+            <a:avLst/>
+          </a:prstGeom>
+          <a:noFill/>
+        </p:spPr>
+        <p:txBody>
+          <a:bodyPr wrap="none">
+            <a:spAutoFit/>
+          </a:bodyPr>
+          <a:lstStyle/>
+          <a:p>
+            <a:pPr>
+              <a:defRPr sz="900">
+                <a:solidFill>
+                  <a:srgbClr val="9A9690"/>
+                </a:solidFill>
+                <a:latin typeface="Calibri"/>
+              </a:defRPr>
+            </a:pPr>
+            <a:r>
+              <a:t>parachute.computer</a:t>
+            </a:r>
+          </a:p>
+        </p:txBody>
+      </p:sp>
+      <p:sp>
+        <p:nvSpPr>
+          <p:cNvPr id="4" name="TextBox 3"/>
+          <p:cNvSpPr txBox="1"/>
+          <p:nvPr/>
+        </p:nvSpPr>
+        <p:spPr>
+          <a:xfrm>
+            <a:off x="1097280" y="1097280"/>
+            <a:ext cx="3657600" cy="365760"/>
+          </a:xfrm>
+          <a:prstGeom prst="rect">
+            <a:avLst/>
+          </a:prstGeom>
+          <a:noFill/>
+        </p:spPr>
+        <p:txBody>
+          <a:bodyPr wrap="square">
+            <a:spAutoFit/>
+          </a:bodyPr>
+          <a:lstStyle/>
+          <a:p>
+            <a:pPr algn="l">
+              <a:lnSpc>
+                <a:spcPct val="120000"/>
+              </a:lnSpc>
+              <a:spcBef>
+                <a:spcPts val="0"/>
+              </a:spcBef>
+              <a:spcAft>
+                <a:spcPts val="0"/>
+              </a:spcAft>
+              <a:defRPr sz="1100" b="1">
+                <a:solidFill>
+                  <a:srgbClr val="4A7C59"/>
+                </a:solidFill>
+                <a:latin typeface="Calibri"/>
+              </a:defRPr>
+            </a:pPr>
+            <a:r>
+              <a:t>THE PROBLEM</a:t>
+            </a:r>
+          </a:p>
+        </p:txBody>
+      </p:sp>
+      <p:sp>
+        <p:nvSpPr>
+          <p:cNvPr id="5" name="TextBox 4"/>
+          <p:cNvSpPr txBox="1"/>
+          <p:nvPr/>
+        </p:nvSpPr>
+        <p:spPr>
+          <a:xfrm>
+            <a:off x="1097280" y="1554480"/>
+            <a:ext cx="9144000" cy="1371600"/>
+          </a:xfrm>
+          <a:prstGeom prst="rect">
+            <a:avLst/>
+          </a:prstGeom>
+          <a:noFill/>
+        </p:spPr>
+        <p:txBody>
+          <a:bodyPr wrap="square">
+            <a:spAutoFit/>
+          </a:bodyPr>
+          <a:lstStyle/>
+          <a:p>
+            <a:pPr algn="l">
+              <a:lnSpc>
+                <a:spcPct val="105000"/>
+              </a:lnSpc>
+              <a:spcBef>
+                <a:spcPts val="0"/>
+              </a:spcBef>
+              <a:spcAft>
+                <a:spcPts val="0"/>
+              </a:spcAft>
+              <a:defRPr sz="4000" b="0">
+                <a:solidFill>
+                  <a:srgbClr val="2C2A26"/>
+                </a:solidFill>
+                <a:latin typeface="Georgia"/>
+              </a:defRPr>
+            </a:pPr>
+            <a:r>
+              <a:t>There’s no knowledge layer.</a:t>
+            </a:r>
+          </a:p>
+        </p:txBody>
+      </p:sp>
+      <p:sp>
+        <p:nvSpPr>
+          <p:cNvPr id="6" name="TextBox 5"/>
+          <p:cNvSpPr txBox="1"/>
+          <p:nvPr/>
+        </p:nvSpPr>
+        <p:spPr>
+          <a:xfrm>
+            <a:off x="1097280" y="3200400"/>
+            <a:ext cx="9144000" cy="1371600"/>
+          </a:xfrm>
+          <a:prstGeom prst="rect">
+            <a:avLst/>
+          </a:prstGeom>
+          <a:noFill/>
+        </p:spPr>
+        <p:txBody>
+          <a:bodyPr wrap="square">
+            <a:spAutoFit/>
+          </a:bodyPr>
+          <a:lstStyle/>
+          <a:p>
+            <a:pPr algn="l">
+              <a:lnSpc>
+                <a:spcPct val="150000"/>
+              </a:lnSpc>
+              <a:spcBef>
+                <a:spcPts val="0"/>
+              </a:spcBef>
+              <a:spcAft>
+                <a:spcPts val="0"/>
+              </a:spcAft>
+              <a:defRPr sz="2000" b="0">
+                <a:solidFill>
+                  <a:srgbClr val="6B6860"/>
+                </a:solidFill>
+                <a:latin typeface="Calibri"/>
+              </a:defRPr>
+            </a:pPr>
+            <a:r>
+              <a:t>Every AI platform stores personal context the same way:</a:t>
+            </a:r>
+            <a:br/>
+            <a:r>
+              <a:t>one flat text file. No structure. No knowledge about your</a:t>
+            </a:r>
+            <a:br/>
+            <a:r>
+              <a:t>projects, people, or patterns over time.</a:t>
+            </a:r>
+            <a:br/>
+            <a:r>
+              <a:t>There’s no portable, structured knowledge layer that works across tools.</a:t>
+            </a:r>
+          </a:p>
+        </p:txBody>
+      </p:sp>
+      <p:sp>
+        <p:nvSpPr>
+          <p:cNvPr id="7" name="TextBox 6"/>
+          <p:cNvSpPr txBox="1"/>
+          <p:nvPr/>
+        </p:nvSpPr>
+        <p:spPr>
+          <a:xfrm>
+            <a:off x="1097280" y="4572000"/>
+            <a:ext cx="9144000" cy="1097280"/>
+          </a:xfrm>
+          <a:prstGeom prst="rect">
+            <a:avLst/>
+          </a:prstGeom>
+          <a:noFill/>
+        </p:spPr>
+        <p:txBody>
+          <a:bodyPr wrap="square">
+            <a:spAutoFit/>
+          </a:bodyPr>
+          <a:lstStyle/>
+          <a:p>
+            <a:pPr algn="l">
+              <a:lnSpc>
+                <a:spcPct val="150000"/>
+              </a:lnSpc>
+              <a:spcBef>
+                <a:spcPts val="0"/>
+              </a:spcBef>
+              <a:spcAft>
+                <a:spcPts val="0"/>
+              </a:spcAft>
+              <a:defRPr sz="1800" b="0">
+                <a:solidFill>
+                  <a:srgbClr val="6B6860"/>
+                </a:solidFill>
+                <a:latin typeface="Calibri"/>
+              </a:defRPr>
+            </a:pPr>
+            <a:r>
+              <a:t>And there’s a deeper problem: how your thinking gets into</a:t>
+            </a:r>
+            <a:br/>
+            <a:r>
+              <a:t>the system. You can talk to your AI, but that’s a conversation —</a:t>
+            </a:r>
+            <a:br/>
+            <a:r>
+              <a:t>the AI is always in the middle.</a:t>
+            </a:r>
+          </a:p>
+        </p:txBody>
+      </p:sp>
+      <p:sp>
+        <p:nvSpPr>
+          <p:cNvPr id="8" name="TextBox 7"/>
+          <p:cNvSpPr txBox="1"/>
+          <p:nvPr/>
+        </p:nvSpPr>
+        <p:spPr>
+          <a:xfrm>
+            <a:off x="1097280" y="5760720"/>
+            <a:ext cx="9144000" cy="548640"/>
+          </a:xfrm>
+          <a:prstGeom prst="rect">
+            <a:avLst/>
+          </a:prstGeom>
+          <a:noFill/>
+        </p:spPr>
+        <p:txBody>
+          <a:bodyPr wrap="square">
+            <a:spAutoFit/>
+          </a:bodyPr>
+          <a:lstStyle/>
+          <a:p>
+            <a:pPr algn="l">
+              <a:lnSpc>
+                <a:spcPct val="130000"/>
+              </a:lnSpc>
+              <a:spcBef>
+                <a:spcPts val="0"/>
+              </a:spcBef>
+              <a:spcAft>
+                <a:spcPts val="0"/>
+              </a:spcAft>
+              <a:defRPr sz="2000" b="0">
+                <a:solidFill>
+                  <a:srgbClr val="2C2A26"/>
+                </a:solidFill>
+                <a:latin typeface="Georgia"/>
+              </a:defRPr>
+            </a:pPr>
+            <a:r>
+              <a:t>Tools that help us think for ourselves — not just think with AI —</a:t>
+            </a:r>
+            <a:br/>
+            <a:r>
+              <a:t>produce the quality of thinking that makes AI most useful.</a:t>
+            </a:r>
+          </a:p>
+        </p:txBody>
+      </p:sp>
     </p:spTree>
   </p:cSld>
   <p:clrMapOvr>
@@ -3173,6 +3826,14 @@
 <file path=ppt/slides/slide3.xml><?xml version="1.0" encoding="utf-8"?>
 <p:sld xmlns:a="http://schemas.openxmlformats.org/drawingml/2006/main" xmlns:p="http://schemas.openxmlformats.org/presentationml/2006/main" xmlns:r="http://schemas.openxmlformats.org/officeDocument/2006/relationships">
   <p:cSld>
+    <p:bg>
+      <p:bgPr>
+        <a:solidFill>
+          <a:srgbClr val="FAF8F4"/>
+        </a:solidFill>
+        <a:effectLst/>
+      </p:bgPr>
+    </p:bg>
     <p:spTree>
       <p:nvGrpSpPr>
         <p:cNvPr id="1" name=""/>
@@ -3180,30 +3841,395 @@
         <p:nvPr/>
       </p:nvGrpSpPr>
       <p:grpSpPr/>
-      <p:pic>
-        <p:nvPicPr>
-          <p:cNvPr id="2" name="Picture 1" descr="slide_03.png"/>
-          <p:cNvPicPr>
-            <a:picLocks noChangeAspect="1"/>
-          </p:cNvPicPr>
-          <p:nvPr/>
-        </p:nvPicPr>
-        <p:blipFill>
-          <a:blip r:embed="rId2"/>
-          <a:stretch>
-            <a:fillRect/>
-          </a:stretch>
-        </p:blipFill>
+      <p:sp>
+        <p:nvSpPr>
+          <p:cNvPr id="2" name="Rectangle 1"/>
+          <p:cNvSpPr/>
+          <p:nvPr/>
+        </p:nvSpPr>
         <p:spPr>
           <a:xfrm>
             <a:off x="0" y="0"/>
-            <a:ext cx="12191695" cy="6858000"/>
-          </a:xfrm>
-          <a:prstGeom prst="rect">
-            <a:avLst/>
-          </a:prstGeom>
-        </p:spPr>
-      </p:pic>
+            <a:ext cx="12191695" cy="54864"/>
+          </a:xfrm>
+          <a:prstGeom prst="rect">
+            <a:avLst/>
+          </a:prstGeom>
+          <a:solidFill>
+            <a:srgbClr val="4A7C59"/>
+          </a:solidFill>
+          <a:ln>
+            <a:noFill/>
+          </a:ln>
+        </p:spPr>
+        <p:style>
+          <a:lnRef idx="1">
+            <a:schemeClr val="accent1"/>
+          </a:lnRef>
+          <a:fillRef idx="3">
+            <a:schemeClr val="accent1"/>
+          </a:fillRef>
+          <a:effectRef idx="2">
+            <a:schemeClr val="accent1"/>
+          </a:effectRef>
+          <a:fontRef idx="minor">
+            <a:schemeClr val="lt1"/>
+          </a:fontRef>
+        </p:style>
+        <p:txBody>
+          <a:bodyPr rtlCol="0" anchor="ctr"/>
+          <a:lstStyle/>
+          <a:p>
+            <a:pPr algn="ctr"/>
+          </a:p>
+        </p:txBody>
+      </p:sp>
+      <p:sp>
+        <p:nvSpPr>
+          <p:cNvPr id="3" name="TextBox 2"/>
+          <p:cNvSpPr txBox="1"/>
+          <p:nvPr/>
+        </p:nvSpPr>
+        <p:spPr>
+          <a:xfrm>
+            <a:off x="1097280" y="6400800"/>
+            <a:ext cx="3657600" cy="274320"/>
+          </a:xfrm>
+          <a:prstGeom prst="rect">
+            <a:avLst/>
+          </a:prstGeom>
+          <a:noFill/>
+        </p:spPr>
+        <p:txBody>
+          <a:bodyPr wrap="none">
+            <a:spAutoFit/>
+          </a:bodyPr>
+          <a:lstStyle/>
+          <a:p>
+            <a:pPr>
+              <a:defRPr sz="900">
+                <a:solidFill>
+                  <a:srgbClr val="9A9690"/>
+                </a:solidFill>
+                <a:latin typeface="Calibri"/>
+              </a:defRPr>
+            </a:pPr>
+            <a:r>
+              <a:t>parachute.computer</a:t>
+            </a:r>
+          </a:p>
+        </p:txBody>
+      </p:sp>
+      <p:sp>
+        <p:nvSpPr>
+          <p:cNvPr id="4" name="TextBox 3"/>
+          <p:cNvSpPr txBox="1"/>
+          <p:nvPr/>
+        </p:nvSpPr>
+        <p:spPr>
+          <a:xfrm>
+            <a:off x="1097280" y="1097280"/>
+            <a:ext cx="3657600" cy="365760"/>
+          </a:xfrm>
+          <a:prstGeom prst="rect">
+            <a:avLst/>
+          </a:prstGeom>
+          <a:noFill/>
+        </p:spPr>
+        <p:txBody>
+          <a:bodyPr wrap="square">
+            <a:spAutoFit/>
+          </a:bodyPr>
+          <a:lstStyle/>
+          <a:p>
+            <a:pPr algn="l">
+              <a:lnSpc>
+                <a:spcPct val="120000"/>
+              </a:lnSpc>
+              <a:spcBef>
+                <a:spcPts val="0"/>
+              </a:spcBef>
+              <a:spcAft>
+                <a:spcPts val="0"/>
+              </a:spcAft>
+              <a:defRPr sz="1100" b="1">
+                <a:solidFill>
+                  <a:srgbClr val="4A7C59"/>
+                </a:solidFill>
+                <a:latin typeface="Calibri"/>
+              </a:defRPr>
+            </a:pPr>
+            <a:r>
+              <a:t>OUR ANSWER</a:t>
+            </a:r>
+          </a:p>
+        </p:txBody>
+      </p:sp>
+      <p:sp>
+        <p:nvSpPr>
+          <p:cNvPr id="5" name="TextBox 4"/>
+          <p:cNvSpPr txBox="1"/>
+          <p:nvPr/>
+        </p:nvSpPr>
+        <p:spPr>
+          <a:xfrm>
+            <a:off x="1097280" y="1554480"/>
+            <a:ext cx="9144000" cy="1371600"/>
+          </a:xfrm>
+          <a:prstGeom prst="rect">
+            <a:avLst/>
+          </a:prstGeom>
+          <a:noFill/>
+        </p:spPr>
+        <p:txBody>
+          <a:bodyPr wrap="square">
+            <a:spAutoFit/>
+          </a:bodyPr>
+          <a:lstStyle/>
+          <a:p>
+            <a:pPr algn="l">
+              <a:lnSpc>
+                <a:spcPct val="105000"/>
+              </a:lnSpc>
+              <a:spcBef>
+                <a:spcPts val="0"/>
+              </a:spcBef>
+              <a:spcAft>
+                <a:spcPts val="0"/>
+              </a:spcAft>
+              <a:defRPr sz="4000" b="0">
+                <a:solidFill>
+                  <a:srgbClr val="2C2A26"/>
+                </a:solidFill>
+                <a:latin typeface="Georgia"/>
+              </a:defRPr>
+            </a:pPr>
+            <a:r>
+              <a:t>Parachute Daily.</a:t>
+            </a:r>
+            <a:br/>
+            <a:r>
+              <a:t>Just talk.</a:t>
+            </a:r>
+          </a:p>
+        </p:txBody>
+      </p:sp>
+      <p:sp>
+        <p:nvSpPr>
+          <p:cNvPr id="6" name="TextBox 5"/>
+          <p:cNvSpPr txBox="1"/>
+          <p:nvPr/>
+        </p:nvSpPr>
+        <p:spPr>
+          <a:xfrm>
+            <a:off x="1097280" y="3200400"/>
+            <a:ext cx="5029200" cy="2560320"/>
+          </a:xfrm>
+          <a:prstGeom prst="rect">
+            <a:avLst/>
+          </a:prstGeom>
+          <a:noFill/>
+        </p:spPr>
+        <p:txBody>
+          <a:bodyPr wrap="square">
+            <a:spAutoFit/>
+          </a:bodyPr>
+          <a:lstStyle/>
+          <a:p>
+            <a:pPr algn="l">
+              <a:lnSpc>
+                <a:spcPct val="150000"/>
+              </a:lnSpc>
+              <a:spcBef>
+                <a:spcPts val="0"/>
+              </a:spcBef>
+              <a:spcAft>
+                <a:spcPts val="0"/>
+              </a:spcAft>
+              <a:defRPr sz="1800" b="0">
+                <a:solidFill>
+                  <a:srgbClr val="6B6860"/>
+                </a:solidFill>
+                <a:latin typeface="Calibri"/>
+              </a:defRPr>
+            </a:pPr>
+            <a:r>
+              <a:t>A voice-first journal.</a:t>
+            </a:r>
+            <a:br/>
+            <a:br/>
+            <a:r>
+              <a:t>Speak into a wearable pendant or your phone —</a:t>
+            </a:r>
+            <a:br/>
+            <a:r>
+              <a:t>on a walk, in the car, wherever thinking happens.</a:t>
+            </a:r>
+            <a:br/>
+            <a:br/>
+            <a:r>
+              <a:t>Simple for humans. Native for AI.</a:t>
+            </a:r>
+            <a:br/>
+            <a:r>
+              <a:t>No learning curve. Just talk.</a:t>
+            </a:r>
+          </a:p>
+        </p:txBody>
+      </p:sp>
+      <p:sp>
+        <p:nvSpPr>
+          <p:cNvPr id="7" name="Rounded Rectangle 6"/>
+          <p:cNvSpPr/>
+          <p:nvPr/>
+        </p:nvSpPr>
+        <p:spPr>
+          <a:xfrm>
+            <a:off x="7132320" y="3200400"/>
+            <a:ext cx="4114800" cy="2743200"/>
+          </a:xfrm>
+          <a:prstGeom prst="roundRect">
+            <a:avLst/>
+          </a:prstGeom>
+          <a:solidFill>
+            <a:srgbClr val="F3F0EA"/>
+          </a:solidFill>
+          <a:ln w="12700">
+            <a:solidFill>
+              <a:srgbClr val="E4E0D8"/>
+            </a:solidFill>
+          </a:ln>
+        </p:spPr>
+        <p:style>
+          <a:lnRef idx="1">
+            <a:schemeClr val="accent1"/>
+          </a:lnRef>
+          <a:fillRef idx="3">
+            <a:schemeClr val="accent1"/>
+          </a:fillRef>
+          <a:effectRef idx="2">
+            <a:schemeClr val="accent1"/>
+          </a:effectRef>
+          <a:fontRef idx="minor">
+            <a:schemeClr val="lt1"/>
+          </a:fontRef>
+        </p:style>
+        <p:txBody>
+          <a:bodyPr rtlCol="0" anchor="ctr"/>
+          <a:lstStyle/>
+          <a:p>
+            <a:pPr algn="ctr"/>
+          </a:p>
+        </p:txBody>
+      </p:sp>
+      <p:sp>
+        <p:nvSpPr>
+          <p:cNvPr id="8" name="TextBox 7"/>
+          <p:cNvSpPr txBox="1"/>
+          <p:nvPr/>
+        </p:nvSpPr>
+        <p:spPr>
+          <a:xfrm>
+            <a:off x="7498079" y="3474720"/>
+            <a:ext cx="3383280" cy="365760"/>
+          </a:xfrm>
+          <a:prstGeom prst="rect">
+            <a:avLst/>
+          </a:prstGeom>
+          <a:noFill/>
+        </p:spPr>
+        <p:txBody>
+          <a:bodyPr wrap="square">
+            <a:spAutoFit/>
+          </a:bodyPr>
+          <a:lstStyle/>
+          <a:p>
+            <a:pPr algn="l">
+              <a:lnSpc>
+                <a:spcPct val="120000"/>
+              </a:lnSpc>
+              <a:spcBef>
+                <a:spcPts val="0"/>
+              </a:spcBef>
+              <a:spcAft>
+                <a:spcPts val="0"/>
+              </a:spcAft>
+              <a:defRPr sz="1100" b="1">
+                <a:solidFill>
+                  <a:srgbClr val="4A7C59"/>
+                </a:solidFill>
+                <a:latin typeface="Calibri"/>
+              </a:defRPr>
+            </a:pPr>
+            <a:r>
+              <a:t>THE PENDANT</a:t>
+            </a:r>
+          </a:p>
+        </p:txBody>
+      </p:sp>
+      <p:sp>
+        <p:nvSpPr>
+          <p:cNvPr id="9" name="TextBox 8"/>
+          <p:cNvSpPr txBox="1"/>
+          <p:nvPr/>
+        </p:nvSpPr>
+        <p:spPr>
+          <a:xfrm>
+            <a:off x="7498079" y="3931920"/>
+            <a:ext cx="3383280" cy="1828800"/>
+          </a:xfrm>
+          <a:prstGeom prst="rect">
+            <a:avLst/>
+          </a:prstGeom>
+          <a:noFill/>
+        </p:spPr>
+        <p:txBody>
+          <a:bodyPr wrap="square">
+            <a:spAutoFit/>
+          </a:bodyPr>
+          <a:lstStyle/>
+          <a:p>
+            <a:pPr algn="l">
+              <a:lnSpc>
+                <a:spcPct val="145000"/>
+              </a:lnSpc>
+              <a:spcBef>
+                <a:spcPts val="0"/>
+              </a:spcBef>
+              <a:spcAft>
+                <a:spcPts val="0"/>
+              </a:spcAft>
+              <a:defRPr sz="1600" b="0">
+                <a:solidFill>
+                  <a:srgbClr val="6B6860"/>
+                </a:solidFill>
+                <a:latin typeface="Calibri"/>
+              </a:defRPr>
+            </a:pPr>
+            <a:r>
+              <a:t>Wearable voice capture device.</a:t>
+            </a:r>
+            <a:br/>
+            <a:br/>
+            <a:r>
+              <a:t>Press a button. Talk.</a:t>
+            </a:r>
+            <a:br/>
+            <a:r>
+              <a:t>Your thoughts are transcribed and</a:t>
+            </a:r>
+            <a:br/>
+            <a:r>
+              <a:t>structured by the time you’re home.</a:t>
+            </a:r>
+            <a:br/>
+            <a:br/>
+            <a:r>
+              <a:t>Working prototype on stage today.</a:t>
+            </a:r>
+          </a:p>
+        </p:txBody>
+      </p:sp>
     </p:spTree>
   </p:cSld>
   <p:clrMapOvr>
@@ -3215,6 +4241,14 @@
 <file path=ppt/slides/slide4.xml><?xml version="1.0" encoding="utf-8"?>
 <p:sld xmlns:a="http://schemas.openxmlformats.org/drawingml/2006/main" xmlns:p="http://schemas.openxmlformats.org/presentationml/2006/main" xmlns:r="http://schemas.openxmlformats.org/officeDocument/2006/relationships">
   <p:cSld>
+    <p:bg>
+      <p:bgPr>
+        <a:solidFill>
+          <a:srgbClr val="FAF8F4"/>
+        </a:solidFill>
+        <a:effectLst/>
+      </p:bgPr>
+    </p:bg>
     <p:spTree>
       <p:nvGrpSpPr>
         <p:cNvPr id="1" name=""/>
@@ -3222,30 +4256,784 @@
         <p:nvPr/>
       </p:nvGrpSpPr>
       <p:grpSpPr/>
-      <p:pic>
-        <p:nvPicPr>
-          <p:cNvPr id="2" name="Picture 1" descr="slide_04.png"/>
-          <p:cNvPicPr>
-            <a:picLocks noChangeAspect="1"/>
-          </p:cNvPicPr>
-          <p:nvPr/>
-        </p:nvPicPr>
-        <p:blipFill>
-          <a:blip r:embed="rId2"/>
-          <a:stretch>
-            <a:fillRect/>
-          </a:stretch>
-        </p:blipFill>
+      <p:sp>
+        <p:nvSpPr>
+          <p:cNvPr id="2" name="Rectangle 1"/>
+          <p:cNvSpPr/>
+          <p:nvPr/>
+        </p:nvSpPr>
         <p:spPr>
           <a:xfrm>
             <a:off x="0" y="0"/>
-            <a:ext cx="12191695" cy="6858000"/>
-          </a:xfrm>
-          <a:prstGeom prst="rect">
-            <a:avLst/>
-          </a:prstGeom>
-        </p:spPr>
-      </p:pic>
+            <a:ext cx="12191695" cy="54864"/>
+          </a:xfrm>
+          <a:prstGeom prst="rect">
+            <a:avLst/>
+          </a:prstGeom>
+          <a:solidFill>
+            <a:srgbClr val="4A7C59"/>
+          </a:solidFill>
+          <a:ln>
+            <a:noFill/>
+          </a:ln>
+        </p:spPr>
+        <p:style>
+          <a:lnRef idx="1">
+            <a:schemeClr val="accent1"/>
+          </a:lnRef>
+          <a:fillRef idx="3">
+            <a:schemeClr val="accent1"/>
+          </a:fillRef>
+          <a:effectRef idx="2">
+            <a:schemeClr val="accent1"/>
+          </a:effectRef>
+          <a:fontRef idx="minor">
+            <a:schemeClr val="lt1"/>
+          </a:fontRef>
+        </p:style>
+        <p:txBody>
+          <a:bodyPr rtlCol="0" anchor="ctr"/>
+          <a:lstStyle/>
+          <a:p>
+            <a:pPr algn="ctr"/>
+          </a:p>
+        </p:txBody>
+      </p:sp>
+      <p:sp>
+        <p:nvSpPr>
+          <p:cNvPr id="3" name="TextBox 2"/>
+          <p:cNvSpPr txBox="1"/>
+          <p:nvPr/>
+        </p:nvSpPr>
+        <p:spPr>
+          <a:xfrm>
+            <a:off x="1097280" y="6400800"/>
+            <a:ext cx="3657600" cy="274320"/>
+          </a:xfrm>
+          <a:prstGeom prst="rect">
+            <a:avLst/>
+          </a:prstGeom>
+          <a:noFill/>
+        </p:spPr>
+        <p:txBody>
+          <a:bodyPr wrap="none">
+            <a:spAutoFit/>
+          </a:bodyPr>
+          <a:lstStyle/>
+          <a:p>
+            <a:pPr>
+              <a:defRPr sz="900">
+                <a:solidFill>
+                  <a:srgbClr val="9A9690"/>
+                </a:solidFill>
+                <a:latin typeface="Calibri"/>
+              </a:defRPr>
+            </a:pPr>
+            <a:r>
+              <a:t>parachute.computer</a:t>
+            </a:r>
+          </a:p>
+        </p:txBody>
+      </p:sp>
+      <p:sp>
+        <p:nvSpPr>
+          <p:cNvPr id="4" name="TextBox 3"/>
+          <p:cNvSpPr txBox="1"/>
+          <p:nvPr/>
+        </p:nvSpPr>
+        <p:spPr>
+          <a:xfrm>
+            <a:off x="1097280" y="1097280"/>
+            <a:ext cx="3657600" cy="365760"/>
+          </a:xfrm>
+          <a:prstGeom prst="rect">
+            <a:avLst/>
+          </a:prstGeom>
+          <a:noFill/>
+        </p:spPr>
+        <p:txBody>
+          <a:bodyPr wrap="square">
+            <a:spAutoFit/>
+          </a:bodyPr>
+          <a:lstStyle/>
+          <a:p>
+            <a:pPr algn="l">
+              <a:lnSpc>
+                <a:spcPct val="120000"/>
+              </a:lnSpc>
+              <a:spcBef>
+                <a:spcPts val="0"/>
+              </a:spcBef>
+              <a:spcAft>
+                <a:spcPts val="0"/>
+              </a:spcAft>
+              <a:defRPr sz="1100" b="1">
+                <a:solidFill>
+                  <a:srgbClr val="4A7C59"/>
+                </a:solidFill>
+                <a:latin typeface="Calibri"/>
+              </a:defRPr>
+            </a:pPr>
+            <a:r>
+              <a:t>AGENT-NATIVE</a:t>
+            </a:r>
+          </a:p>
+        </p:txBody>
+      </p:sp>
+      <p:sp>
+        <p:nvSpPr>
+          <p:cNvPr id="5" name="TextBox 4"/>
+          <p:cNvSpPr txBox="1"/>
+          <p:nvPr/>
+        </p:nvSpPr>
+        <p:spPr>
+          <a:xfrm>
+            <a:off x="1097280" y="1554480"/>
+            <a:ext cx="9144000" cy="1371600"/>
+          </a:xfrm>
+          <a:prstGeom prst="rect">
+            <a:avLst/>
+          </a:prstGeom>
+          <a:noFill/>
+        </p:spPr>
+        <p:txBody>
+          <a:bodyPr wrap="square">
+            <a:spAutoFit/>
+          </a:bodyPr>
+          <a:lstStyle/>
+          <a:p>
+            <a:pPr algn="l">
+              <a:lnSpc>
+                <a:spcPct val="105000"/>
+              </a:lnSpc>
+              <a:spcBef>
+                <a:spcPts val="0"/>
+              </a:spcBef>
+              <a:spcAft>
+                <a:spcPts val="0"/>
+              </a:spcAft>
+              <a:defRPr sz="4000" b="0">
+                <a:solidFill>
+                  <a:srgbClr val="2C2A26"/>
+                </a:solidFill>
+                <a:latin typeface="Georgia"/>
+              </a:defRPr>
+            </a:pPr>
+            <a:r>
+              <a:t>Don’t compete with agents.</a:t>
+            </a:r>
+            <a:br/>
+            <a:r>
+              <a:t>Build the tool layer they all need.</a:t>
+            </a:r>
+          </a:p>
+        </p:txBody>
+      </p:sp>
+      <p:sp>
+        <p:nvSpPr>
+          <p:cNvPr id="6" name="TextBox 5"/>
+          <p:cNvSpPr txBox="1"/>
+          <p:nvPr/>
+        </p:nvSpPr>
+        <p:spPr>
+          <a:xfrm>
+            <a:off x="1097280" y="3200400"/>
+            <a:ext cx="4754880" cy="1097280"/>
+          </a:xfrm>
+          <a:prstGeom prst="rect">
+            <a:avLst/>
+          </a:prstGeom>
+          <a:noFill/>
+        </p:spPr>
+        <p:txBody>
+          <a:bodyPr wrap="square">
+            <a:spAutoFit/>
+          </a:bodyPr>
+          <a:lstStyle/>
+          <a:p>
+            <a:pPr algn="l">
+              <a:lnSpc>
+                <a:spcPct val="145000"/>
+              </a:lnSpc>
+              <a:spcBef>
+                <a:spcPts val="0"/>
+              </a:spcBef>
+              <a:spcAft>
+                <a:spcPts val="0"/>
+              </a:spcAft>
+              <a:defRPr sz="1600" b="0">
+                <a:solidFill>
+                  <a:srgbClr val="6B6860"/>
+                </a:solidFill>
+                <a:latin typeface="Calibri"/>
+              </a:defRPr>
+            </a:pPr>
+            <a:r>
+              <a:t>Spin up a knowledge vault in seconds.</a:t>
+            </a:r>
+            <a:br/>
+            <a:r>
+              <a:t>Give any AI an MCP link. That’s it.</a:t>
+            </a:r>
+            <a:br/>
+            <a:r>
+              <a:t>Your data lives in a graph database:</a:t>
+            </a:r>
+            <a:br/>
+            <a:r>
+              <a:t>Things, Tags, and Tools.</a:t>
+            </a:r>
+          </a:p>
+        </p:txBody>
+      </p:sp>
+      <p:sp>
+        <p:nvSpPr>
+          <p:cNvPr id="7" name="TextBox 6"/>
+          <p:cNvSpPr txBox="1"/>
+          <p:nvPr/>
+        </p:nvSpPr>
+        <p:spPr>
+          <a:xfrm>
+            <a:off x="1097280" y="4480560"/>
+            <a:ext cx="4754880" cy="822960"/>
+          </a:xfrm>
+          <a:prstGeom prst="rect">
+            <a:avLst/>
+          </a:prstGeom>
+          <a:noFill/>
+        </p:spPr>
+        <p:txBody>
+          <a:bodyPr wrap="square">
+            <a:spAutoFit/>
+          </a:bodyPr>
+          <a:lstStyle/>
+          <a:p>
+            <a:pPr algn="l">
+              <a:lnSpc>
+                <a:spcPct val="145000"/>
+              </a:lnSpc>
+              <a:spcBef>
+                <a:spcPts val="0"/>
+              </a:spcBef>
+              <a:spcAft>
+                <a:spcPts val="0"/>
+              </a:spcAft>
+              <a:defRPr sz="1500" b="0">
+                <a:solidFill>
+                  <a:srgbClr val="6B6860"/>
+                </a:solidFill>
+                <a:latin typeface="Calibri"/>
+              </a:defRPr>
+            </a:pPr>
+            <a:r>
+              <a:t>Built on MCP — the open standard for</a:t>
+            </a:r>
+            <a:br/>
+            <a:r>
+              <a:t>connecting AI to tools. Whatever AI you</a:t>
+            </a:r>
+            <a:br/>
+            <a:r>
+              <a:t>already use, Parachute makes it better.</a:t>
+            </a:r>
+          </a:p>
+        </p:txBody>
+      </p:sp>
+      <p:sp>
+        <p:nvSpPr>
+          <p:cNvPr id="8" name="Rounded Rectangle 7"/>
+          <p:cNvSpPr/>
+          <p:nvPr/>
+        </p:nvSpPr>
+        <p:spPr>
+          <a:xfrm>
+            <a:off x="6400800" y="2743200"/>
+            <a:ext cx="5029200" cy="3474720"/>
+          </a:xfrm>
+          <a:prstGeom prst="roundRect">
+            <a:avLst/>
+          </a:prstGeom>
+          <a:solidFill>
+            <a:srgbClr val="FFFFFF"/>
+          </a:solidFill>
+          <a:ln w="12700">
+            <a:solidFill>
+              <a:srgbClr val="E4E0D8"/>
+            </a:solidFill>
+          </a:ln>
+        </p:spPr>
+        <p:style>
+          <a:lnRef idx="1">
+            <a:schemeClr val="accent1"/>
+          </a:lnRef>
+          <a:fillRef idx="3">
+            <a:schemeClr val="accent1"/>
+          </a:fillRef>
+          <a:effectRef idx="2">
+            <a:schemeClr val="accent1"/>
+          </a:effectRef>
+          <a:fontRef idx="minor">
+            <a:schemeClr val="lt1"/>
+          </a:fontRef>
+        </p:style>
+        <p:txBody>
+          <a:bodyPr rtlCol="0" anchor="ctr"/>
+          <a:lstStyle/>
+          <a:p>
+            <a:pPr algn="ctr"/>
+          </a:p>
+        </p:txBody>
+      </p:sp>
+      <p:sp>
+        <p:nvSpPr>
+          <p:cNvPr id="9" name="TextBox 8"/>
+          <p:cNvSpPr txBox="1"/>
+          <p:nvPr/>
+        </p:nvSpPr>
+        <p:spPr>
+          <a:xfrm>
+            <a:off x="6766560" y="2926080"/>
+            <a:ext cx="4114800" cy="274320"/>
+          </a:xfrm>
+          <a:prstGeom prst="rect">
+            <a:avLst/>
+          </a:prstGeom>
+          <a:noFill/>
+        </p:spPr>
+        <p:txBody>
+          <a:bodyPr wrap="square">
+            <a:spAutoFit/>
+          </a:bodyPr>
+          <a:lstStyle/>
+          <a:p>
+            <a:pPr algn="l">
+              <a:lnSpc>
+                <a:spcPct val="120000"/>
+              </a:lnSpc>
+              <a:spcBef>
+                <a:spcPts val="0"/>
+              </a:spcBef>
+              <a:spcAft>
+                <a:spcPts val="0"/>
+              </a:spcAft>
+              <a:defRPr sz="1000" b="1">
+                <a:solidFill>
+                  <a:srgbClr val="9A9690"/>
+                </a:solidFill>
+                <a:latin typeface="Courier New"/>
+              </a:defRPr>
+            </a:pPr>
+            <a:r>
+              <a:t>YOU</a:t>
+            </a:r>
+          </a:p>
+        </p:txBody>
+      </p:sp>
+      <p:sp>
+        <p:nvSpPr>
+          <p:cNvPr id="10" name="TextBox 9"/>
+          <p:cNvSpPr txBox="1"/>
+          <p:nvPr/>
+        </p:nvSpPr>
+        <p:spPr>
+          <a:xfrm>
+            <a:off x="6766560" y="3200400"/>
+            <a:ext cx="4114800" cy="365760"/>
+          </a:xfrm>
+          <a:prstGeom prst="rect">
+            <a:avLst/>
+          </a:prstGeom>
+          <a:noFill/>
+        </p:spPr>
+        <p:txBody>
+          <a:bodyPr wrap="square">
+            <a:spAutoFit/>
+          </a:bodyPr>
+          <a:lstStyle/>
+          <a:p>
+            <a:pPr algn="l">
+              <a:lnSpc>
+                <a:spcPct val="120000"/>
+              </a:lnSpc>
+              <a:spcBef>
+                <a:spcPts val="0"/>
+              </a:spcBef>
+              <a:spcAft>
+                <a:spcPts val="0"/>
+              </a:spcAft>
+              <a:defRPr sz="1400" b="0">
+                <a:solidFill>
+                  <a:srgbClr val="2C2A26"/>
+                </a:solidFill>
+                <a:latin typeface="Calibri"/>
+              </a:defRPr>
+            </a:pPr>
+            <a:r>
+              <a:t>Parachute Daily  ·  Pendant  ·  Phone</a:t>
+            </a:r>
+          </a:p>
+        </p:txBody>
+      </p:sp>
+      <p:sp>
+        <p:nvSpPr>
+          <p:cNvPr id="11" name="TextBox 10"/>
+          <p:cNvSpPr txBox="1"/>
+          <p:nvPr/>
+        </p:nvSpPr>
+        <p:spPr>
+          <a:xfrm>
+            <a:off x="8412480" y="3566160"/>
+            <a:ext cx="914400" cy="274320"/>
+          </a:xfrm>
+          <a:prstGeom prst="rect">
+            <a:avLst/>
+          </a:prstGeom>
+          <a:noFill/>
+        </p:spPr>
+        <p:txBody>
+          <a:bodyPr wrap="square">
+            <a:spAutoFit/>
+          </a:bodyPr>
+          <a:lstStyle/>
+          <a:p>
+            <a:pPr algn="ctr">
+              <a:lnSpc>
+                <a:spcPct val="120000"/>
+              </a:lnSpc>
+              <a:spcBef>
+                <a:spcPts val="0"/>
+              </a:spcBef>
+              <a:spcAft>
+                <a:spcPts val="0"/>
+              </a:spcAft>
+              <a:defRPr sz="1400" b="0">
+                <a:solidFill>
+                  <a:srgbClr val="9A9690"/>
+                </a:solidFill>
+                <a:latin typeface="Courier New"/>
+              </a:defRPr>
+            </a:pPr>
+            <a:r>
+              <a:t>↓</a:t>
+            </a:r>
+          </a:p>
+        </p:txBody>
+      </p:sp>
+      <p:sp>
+        <p:nvSpPr>
+          <p:cNvPr id="12" name="TextBox 11"/>
+          <p:cNvSpPr txBox="1"/>
+          <p:nvPr/>
+        </p:nvSpPr>
+        <p:spPr>
+          <a:xfrm>
+            <a:off x="6766560" y="3840480"/>
+            <a:ext cx="4114800" cy="274320"/>
+          </a:xfrm>
+          <a:prstGeom prst="rect">
+            <a:avLst/>
+          </a:prstGeom>
+          <a:noFill/>
+        </p:spPr>
+        <p:txBody>
+          <a:bodyPr wrap="square">
+            <a:spAutoFit/>
+          </a:bodyPr>
+          <a:lstStyle/>
+          <a:p>
+            <a:pPr algn="l">
+              <a:lnSpc>
+                <a:spcPct val="120000"/>
+              </a:lnSpc>
+              <a:spcBef>
+                <a:spcPts val="0"/>
+              </a:spcBef>
+              <a:spcAft>
+                <a:spcPts val="0"/>
+              </a:spcAft>
+              <a:defRPr sz="1000" b="1">
+                <a:solidFill>
+                  <a:srgbClr val="4A7C59"/>
+                </a:solidFill>
+                <a:latin typeface="Courier New"/>
+              </a:defRPr>
+            </a:pPr>
+            <a:r>
+              <a:t>DATA</a:t>
+            </a:r>
+          </a:p>
+        </p:txBody>
+      </p:sp>
+      <p:sp>
+        <p:nvSpPr>
+          <p:cNvPr id="13" name="Rounded Rectangle 12"/>
+          <p:cNvSpPr/>
+          <p:nvPr/>
+        </p:nvSpPr>
+        <p:spPr>
+          <a:xfrm>
+            <a:off x="6675120" y="4069080"/>
+            <a:ext cx="4389120" cy="457200"/>
+          </a:xfrm>
+          <a:prstGeom prst="roundRect">
+            <a:avLst/>
+          </a:prstGeom>
+          <a:solidFill>
+            <a:srgbClr val="E8F5EC"/>
+          </a:solidFill>
+          <a:ln w="12700">
+            <a:solidFill>
+              <a:srgbClr val="4A7C59"/>
+            </a:solidFill>
+          </a:ln>
+        </p:spPr>
+        <p:style>
+          <a:lnRef idx="1">
+            <a:schemeClr val="accent1"/>
+          </a:lnRef>
+          <a:fillRef idx="3">
+            <a:schemeClr val="accent1"/>
+          </a:fillRef>
+          <a:effectRef idx="2">
+            <a:schemeClr val="accent1"/>
+          </a:effectRef>
+          <a:fontRef idx="minor">
+            <a:schemeClr val="lt1"/>
+          </a:fontRef>
+        </p:style>
+        <p:txBody>
+          <a:bodyPr rtlCol="0" anchor="ctr"/>
+          <a:lstStyle/>
+          <a:p>
+            <a:pPr algn="ctr"/>
+          </a:p>
+        </p:txBody>
+      </p:sp>
+      <p:sp>
+        <p:nvSpPr>
+          <p:cNvPr id="14" name="TextBox 13"/>
+          <p:cNvSpPr txBox="1"/>
+          <p:nvPr/>
+        </p:nvSpPr>
+        <p:spPr>
+          <a:xfrm>
+            <a:off x="6858000" y="4114800"/>
+            <a:ext cx="4114800" cy="365760"/>
+          </a:xfrm>
+          <a:prstGeom prst="rect">
+            <a:avLst/>
+          </a:prstGeom>
+          <a:noFill/>
+        </p:spPr>
+        <p:txBody>
+          <a:bodyPr wrap="square">
+            <a:spAutoFit/>
+          </a:bodyPr>
+          <a:lstStyle/>
+          <a:p>
+            <a:pPr algn="l">
+              <a:lnSpc>
+                <a:spcPct val="120000"/>
+              </a:lnSpc>
+              <a:spcBef>
+                <a:spcPts val="0"/>
+              </a:spcBef>
+              <a:spcAft>
+                <a:spcPts val="0"/>
+              </a:spcAft>
+              <a:defRPr sz="1300" b="1">
+                <a:solidFill>
+                  <a:srgbClr val="4A7C59"/>
+                </a:solidFill>
+                <a:latin typeface="Calibri"/>
+              </a:defRPr>
+            </a:pPr>
+            <a:r>
+              <a:t>Parachute Server — Things · Tags · Tools</a:t>
+            </a:r>
+          </a:p>
+        </p:txBody>
+      </p:sp>
+      <p:sp>
+        <p:nvSpPr>
+          <p:cNvPr id="15" name="TextBox 14"/>
+          <p:cNvSpPr txBox="1"/>
+          <p:nvPr/>
+        </p:nvSpPr>
+        <p:spPr>
+          <a:xfrm>
+            <a:off x="8229600" y="4572000"/>
+            <a:ext cx="1371600" cy="274320"/>
+          </a:xfrm>
+          <a:prstGeom prst="rect">
+            <a:avLst/>
+          </a:prstGeom>
+          <a:noFill/>
+        </p:spPr>
+        <p:txBody>
+          <a:bodyPr wrap="square">
+            <a:spAutoFit/>
+          </a:bodyPr>
+          <a:lstStyle/>
+          <a:p>
+            <a:pPr algn="ctr">
+              <a:lnSpc>
+                <a:spcPct val="120000"/>
+              </a:lnSpc>
+              <a:spcBef>
+                <a:spcPts val="0"/>
+              </a:spcBef>
+              <a:spcAft>
+                <a:spcPts val="0"/>
+              </a:spcAft>
+              <a:defRPr sz="1000" b="0">
+                <a:solidFill>
+                  <a:srgbClr val="9A9690"/>
+                </a:solidFill>
+                <a:latin typeface="Courier New"/>
+              </a:defRPr>
+            </a:pPr>
+            <a:r>
+              <a:t>↓ MCP</a:t>
+            </a:r>
+          </a:p>
+        </p:txBody>
+      </p:sp>
+      <p:sp>
+        <p:nvSpPr>
+          <p:cNvPr id="16" name="TextBox 15"/>
+          <p:cNvSpPr txBox="1"/>
+          <p:nvPr/>
+        </p:nvSpPr>
+        <p:spPr>
+          <a:xfrm>
+            <a:off x="6766560" y="4846320"/>
+            <a:ext cx="4114800" cy="274320"/>
+          </a:xfrm>
+          <a:prstGeom prst="rect">
+            <a:avLst/>
+          </a:prstGeom>
+          <a:noFill/>
+        </p:spPr>
+        <p:txBody>
+          <a:bodyPr wrap="square">
+            <a:spAutoFit/>
+          </a:bodyPr>
+          <a:lstStyle/>
+          <a:p>
+            <a:pPr algn="l">
+              <a:lnSpc>
+                <a:spcPct val="120000"/>
+              </a:lnSpc>
+              <a:spcBef>
+                <a:spcPts val="0"/>
+              </a:spcBef>
+              <a:spcAft>
+                <a:spcPts val="0"/>
+              </a:spcAft>
+              <a:defRPr sz="1000" b="1">
+                <a:solidFill>
+                  <a:srgbClr val="9A9690"/>
+                </a:solidFill>
+                <a:latin typeface="Courier New"/>
+              </a:defRPr>
+            </a:pPr>
+            <a:r>
+              <a:t>AGENTS</a:t>
+            </a:r>
+          </a:p>
+        </p:txBody>
+      </p:sp>
+      <p:sp>
+        <p:nvSpPr>
+          <p:cNvPr id="17" name="TextBox 16"/>
+          <p:cNvSpPr txBox="1"/>
+          <p:nvPr/>
+        </p:nvSpPr>
+        <p:spPr>
+          <a:xfrm>
+            <a:off x="6766560" y="5120640"/>
+            <a:ext cx="4114800" cy="365760"/>
+          </a:xfrm>
+          <a:prstGeom prst="rect">
+            <a:avLst/>
+          </a:prstGeom>
+          <a:noFill/>
+        </p:spPr>
+        <p:txBody>
+          <a:bodyPr wrap="square">
+            <a:spAutoFit/>
+          </a:bodyPr>
+          <a:lstStyle/>
+          <a:p>
+            <a:pPr algn="l">
+              <a:lnSpc>
+                <a:spcPct val="120000"/>
+              </a:lnSpc>
+              <a:spcBef>
+                <a:spcPts val="0"/>
+              </a:spcBef>
+              <a:spcAft>
+                <a:spcPts val="0"/>
+              </a:spcAft>
+              <a:defRPr sz="1400" b="0">
+                <a:solidFill>
+                  <a:srgbClr val="2C2A26"/>
+                </a:solidFill>
+                <a:latin typeface="Calibri"/>
+              </a:defRPr>
+            </a:pPr>
+            <a:r>
+              <a:t>Claude  ·  ChatGPT  ·  OpenClaw  ·  Any AI</a:t>
+            </a:r>
+          </a:p>
+        </p:txBody>
+      </p:sp>
+      <p:sp>
+        <p:nvSpPr>
+          <p:cNvPr id="18" name="TextBox 17"/>
+          <p:cNvSpPr txBox="1"/>
+          <p:nvPr/>
+        </p:nvSpPr>
+        <p:spPr>
+          <a:xfrm>
+            <a:off x="1097280" y="5760720"/>
+            <a:ext cx="10058400" cy="548640"/>
+          </a:xfrm>
+          <a:prstGeom prst="rect">
+            <a:avLst/>
+          </a:prstGeom>
+          <a:noFill/>
+        </p:spPr>
+        <p:txBody>
+          <a:bodyPr wrap="square">
+            <a:spAutoFit/>
+          </a:bodyPr>
+          <a:lstStyle/>
+          <a:p>
+            <a:pPr algn="l">
+              <a:lnSpc>
+                <a:spcPct val="120000"/>
+              </a:lnSpc>
+              <a:spcBef>
+                <a:spcPts val="0"/>
+              </a:spcBef>
+              <a:spcAft>
+                <a:spcPts val="0"/>
+              </a:spcAft>
+              <a:defRPr sz="1800" b="0">
+                <a:solidFill>
+                  <a:srgbClr val="2C2A26"/>
+                </a:solidFill>
+                <a:latin typeface="Georgia"/>
+              </a:defRPr>
+            </a:pPr>
+            <a:r>
+              <a:t>We’re not trying to build the most intelligent tool. We’re building the most important tool for intelligent systems to use.</a:t>
+            </a:r>
+          </a:p>
+        </p:txBody>
+      </p:sp>
     </p:spTree>
   </p:cSld>
   <p:clrMapOvr>
@@ -3257,6 +5045,14 @@
 <file path=ppt/slides/slide5.xml><?xml version="1.0" encoding="utf-8"?>
 <p:sld xmlns:a="http://schemas.openxmlformats.org/drawingml/2006/main" xmlns:p="http://schemas.openxmlformats.org/presentationml/2006/main" xmlns:r="http://schemas.openxmlformats.org/officeDocument/2006/relationships">
   <p:cSld>
+    <p:bg>
+      <p:bgPr>
+        <a:solidFill>
+          <a:srgbClr val="FAF8F4"/>
+        </a:solidFill>
+        <a:effectLst/>
+      </p:bgPr>
+    </p:bg>
     <p:spTree>
       <p:nvGrpSpPr>
         <p:cNvPr id="1" name=""/>
@@ -3264,30 +5060,736 @@
         <p:nvPr/>
       </p:nvGrpSpPr>
       <p:grpSpPr/>
-      <p:pic>
-        <p:nvPicPr>
-          <p:cNvPr id="2" name="Picture 1" descr="slide_05.png"/>
-          <p:cNvPicPr>
-            <a:picLocks noChangeAspect="1"/>
-          </p:cNvPicPr>
-          <p:nvPr/>
-        </p:nvPicPr>
-        <p:blipFill>
-          <a:blip r:embed="rId2"/>
-          <a:stretch>
-            <a:fillRect/>
-          </a:stretch>
-        </p:blipFill>
+      <p:sp>
+        <p:nvSpPr>
+          <p:cNvPr id="2" name="Rectangle 1"/>
+          <p:cNvSpPr/>
+          <p:nvPr/>
+        </p:nvSpPr>
         <p:spPr>
           <a:xfrm>
             <a:off x="0" y="0"/>
-            <a:ext cx="12191695" cy="6858000"/>
-          </a:xfrm>
-          <a:prstGeom prst="rect">
-            <a:avLst/>
-          </a:prstGeom>
-        </p:spPr>
-      </p:pic>
+            <a:ext cx="12191695" cy="54864"/>
+          </a:xfrm>
+          <a:prstGeom prst="rect">
+            <a:avLst/>
+          </a:prstGeom>
+          <a:solidFill>
+            <a:srgbClr val="4A7C59"/>
+          </a:solidFill>
+          <a:ln>
+            <a:noFill/>
+          </a:ln>
+        </p:spPr>
+        <p:style>
+          <a:lnRef idx="1">
+            <a:schemeClr val="accent1"/>
+          </a:lnRef>
+          <a:fillRef idx="3">
+            <a:schemeClr val="accent1"/>
+          </a:fillRef>
+          <a:effectRef idx="2">
+            <a:schemeClr val="accent1"/>
+          </a:effectRef>
+          <a:fontRef idx="minor">
+            <a:schemeClr val="lt1"/>
+          </a:fontRef>
+        </p:style>
+        <p:txBody>
+          <a:bodyPr rtlCol="0" anchor="ctr"/>
+          <a:lstStyle/>
+          <a:p>
+            <a:pPr algn="ctr"/>
+          </a:p>
+        </p:txBody>
+      </p:sp>
+      <p:sp>
+        <p:nvSpPr>
+          <p:cNvPr id="3" name="TextBox 2"/>
+          <p:cNvSpPr txBox="1"/>
+          <p:nvPr/>
+        </p:nvSpPr>
+        <p:spPr>
+          <a:xfrm>
+            <a:off x="1097280" y="6400800"/>
+            <a:ext cx="3657600" cy="274320"/>
+          </a:xfrm>
+          <a:prstGeom prst="rect">
+            <a:avLst/>
+          </a:prstGeom>
+          <a:noFill/>
+        </p:spPr>
+        <p:txBody>
+          <a:bodyPr wrap="none">
+            <a:spAutoFit/>
+          </a:bodyPr>
+          <a:lstStyle/>
+          <a:p>
+            <a:pPr>
+              <a:defRPr sz="900">
+                <a:solidFill>
+                  <a:srgbClr val="9A9690"/>
+                </a:solidFill>
+                <a:latin typeface="Calibri"/>
+              </a:defRPr>
+            </a:pPr>
+            <a:r>
+              <a:t>parachute.computer</a:t>
+            </a:r>
+          </a:p>
+        </p:txBody>
+      </p:sp>
+      <p:sp>
+        <p:nvSpPr>
+          <p:cNvPr id="4" name="TextBox 3"/>
+          <p:cNvSpPr txBox="1"/>
+          <p:nvPr/>
+        </p:nvSpPr>
+        <p:spPr>
+          <a:xfrm>
+            <a:off x="1097280" y="1097280"/>
+            <a:ext cx="3657600" cy="365760"/>
+          </a:xfrm>
+          <a:prstGeom prst="rect">
+            <a:avLst/>
+          </a:prstGeom>
+          <a:noFill/>
+        </p:spPr>
+        <p:txBody>
+          <a:bodyPr wrap="square">
+            <a:spAutoFit/>
+          </a:bodyPr>
+          <a:lstStyle/>
+          <a:p>
+            <a:pPr algn="l">
+              <a:lnSpc>
+                <a:spcPct val="120000"/>
+              </a:lnSpc>
+              <a:spcBef>
+                <a:spcPts val="0"/>
+              </a:spcBef>
+              <a:spcAft>
+                <a:spcPts val="0"/>
+              </a:spcAft>
+              <a:defRPr sz="1100" b="1">
+                <a:solidFill>
+                  <a:srgbClr val="4A7C59"/>
+                </a:solidFill>
+                <a:latin typeface="Calibri"/>
+              </a:defRPr>
+            </a:pPr>
+            <a:r>
+              <a:t>THE INSIGHT</a:t>
+            </a:r>
+          </a:p>
+        </p:txBody>
+      </p:sp>
+      <p:sp>
+        <p:nvSpPr>
+          <p:cNvPr id="5" name="TextBox 4"/>
+          <p:cNvSpPr txBox="1"/>
+          <p:nvPr/>
+        </p:nvSpPr>
+        <p:spPr>
+          <a:xfrm>
+            <a:off x="1097280" y="1554480"/>
+            <a:ext cx="9144000" cy="1371600"/>
+          </a:xfrm>
+          <a:prstGeom prst="rect">
+            <a:avLst/>
+          </a:prstGeom>
+          <a:noFill/>
+        </p:spPr>
+        <p:txBody>
+          <a:bodyPr wrap="square">
+            <a:spAutoFit/>
+          </a:bodyPr>
+          <a:lstStyle/>
+          <a:p>
+            <a:pPr algn="l">
+              <a:lnSpc>
+                <a:spcPct val="105000"/>
+              </a:lnSpc>
+              <a:spcBef>
+                <a:spcPts val="0"/>
+              </a:spcBef>
+              <a:spcAft>
+                <a:spcPts val="0"/>
+              </a:spcAft>
+              <a:defRPr sz="4000" b="0">
+                <a:solidFill>
+                  <a:srgbClr val="2C2A26"/>
+                </a:solidFill>
+                <a:latin typeface="Georgia"/>
+              </a:defRPr>
+            </a:pPr>
+            <a:r>
+              <a:t>Context compounds.</a:t>
+            </a:r>
+          </a:p>
+        </p:txBody>
+      </p:sp>
+      <p:sp>
+        <p:nvSpPr>
+          <p:cNvPr id="6" name="TextBox 5"/>
+          <p:cNvSpPr txBox="1"/>
+          <p:nvPr/>
+        </p:nvSpPr>
+        <p:spPr>
+          <a:xfrm>
+            <a:off x="1097280" y="3017520"/>
+            <a:ext cx="9144000" cy="731520"/>
+          </a:xfrm>
+          <a:prstGeom prst="rect">
+            <a:avLst/>
+          </a:prstGeom>
+          <a:noFill/>
+        </p:spPr>
+        <p:txBody>
+          <a:bodyPr wrap="square">
+            <a:spAutoFit/>
+          </a:bodyPr>
+          <a:lstStyle/>
+          <a:p>
+            <a:pPr algn="l">
+              <a:lnSpc>
+                <a:spcPct val="150000"/>
+              </a:lnSpc>
+              <a:spcBef>
+                <a:spcPts val="0"/>
+              </a:spcBef>
+              <a:spcAft>
+                <a:spcPts val="0"/>
+              </a:spcAft>
+              <a:defRPr sz="2000" b="0">
+                <a:solidFill>
+                  <a:srgbClr val="6B6860"/>
+                </a:solidFill>
+                <a:latin typeface="Calibri"/>
+              </a:defRPr>
+            </a:pPr>
+            <a:r>
+              <a:t>Every note, every voice entry builds a richer personal data layer —</a:t>
+            </a:r>
+            <a:br/>
+            <a:r>
+              <a:t>not a flat text file, but a real graph that can be queried across months and years.</a:t>
+            </a:r>
+          </a:p>
+        </p:txBody>
+      </p:sp>
+      <p:sp>
+        <p:nvSpPr>
+          <p:cNvPr id="7" name="TextBox 6"/>
+          <p:cNvSpPr txBox="1"/>
+          <p:nvPr/>
+        </p:nvSpPr>
+        <p:spPr>
+          <a:xfrm>
+            <a:off x="1371600" y="4206240"/>
+            <a:ext cx="548640" cy="411480"/>
+          </a:xfrm>
+          <a:prstGeom prst="rect">
+            <a:avLst/>
+          </a:prstGeom>
+          <a:noFill/>
+        </p:spPr>
+        <p:txBody>
+          <a:bodyPr wrap="square">
+            <a:spAutoFit/>
+          </a:bodyPr>
+          <a:lstStyle/>
+          <a:p>
+            <a:pPr algn="l">
+              <a:lnSpc>
+                <a:spcPct val="120000"/>
+              </a:lnSpc>
+              <a:spcBef>
+                <a:spcPts val="0"/>
+              </a:spcBef>
+              <a:spcAft>
+                <a:spcPts val="0"/>
+              </a:spcAft>
+              <a:defRPr sz="1400" b="0">
+                <a:solidFill>
+                  <a:srgbClr val="9A9690"/>
+                </a:solidFill>
+                <a:latin typeface="Courier New"/>
+              </a:defRPr>
+            </a:pPr>
+            <a:r>
+              <a:t>01</a:t>
+            </a:r>
+          </a:p>
+        </p:txBody>
+      </p:sp>
+      <p:sp>
+        <p:nvSpPr>
+          <p:cNvPr id="8" name="TextBox 7"/>
+          <p:cNvSpPr txBox="1"/>
+          <p:nvPr/>
+        </p:nvSpPr>
+        <p:spPr>
+          <a:xfrm>
+            <a:off x="2011680" y="4206240"/>
+            <a:ext cx="5486400" cy="411480"/>
+          </a:xfrm>
+          <a:prstGeom prst="rect">
+            <a:avLst/>
+          </a:prstGeom>
+          <a:noFill/>
+        </p:spPr>
+        <p:txBody>
+          <a:bodyPr wrap="square">
+            <a:spAutoFit/>
+          </a:bodyPr>
+          <a:lstStyle/>
+          <a:p>
+            <a:pPr algn="l">
+              <a:lnSpc>
+                <a:spcPct val="120000"/>
+              </a:lnSpc>
+              <a:spcBef>
+                <a:spcPts val="0"/>
+              </a:spcBef>
+              <a:spcAft>
+                <a:spcPts val="0"/>
+              </a:spcAft>
+              <a:defRPr sz="2000" b="0">
+                <a:solidFill>
+                  <a:srgbClr val="2C2A26"/>
+                </a:solidFill>
+                <a:latin typeface="Georgia"/>
+              </a:defRPr>
+            </a:pPr>
+            <a:r>
+              <a:t>Capture thoughts in Daily</a:t>
+            </a:r>
+          </a:p>
+        </p:txBody>
+      </p:sp>
+      <p:sp>
+        <p:nvSpPr>
+          <p:cNvPr id="9" name="TextBox 8"/>
+          <p:cNvSpPr txBox="1"/>
+          <p:nvPr/>
+        </p:nvSpPr>
+        <p:spPr>
+          <a:xfrm>
+            <a:off x="1371600" y="4663440"/>
+            <a:ext cx="548640" cy="411480"/>
+          </a:xfrm>
+          <a:prstGeom prst="rect">
+            <a:avLst/>
+          </a:prstGeom>
+          <a:noFill/>
+        </p:spPr>
+        <p:txBody>
+          <a:bodyPr wrap="square">
+            <a:spAutoFit/>
+          </a:bodyPr>
+          <a:lstStyle/>
+          <a:p>
+            <a:pPr algn="l">
+              <a:lnSpc>
+                <a:spcPct val="120000"/>
+              </a:lnSpc>
+              <a:spcBef>
+                <a:spcPts val="0"/>
+              </a:spcBef>
+              <a:spcAft>
+                <a:spcPts val="0"/>
+              </a:spcAft>
+              <a:defRPr sz="1400" b="0">
+                <a:solidFill>
+                  <a:srgbClr val="9A9690"/>
+                </a:solidFill>
+                <a:latin typeface="Courier New"/>
+              </a:defRPr>
+            </a:pPr>
+            <a:r>
+              <a:t>02</a:t>
+            </a:r>
+          </a:p>
+        </p:txBody>
+      </p:sp>
+      <p:sp>
+        <p:nvSpPr>
+          <p:cNvPr id="10" name="TextBox 9"/>
+          <p:cNvSpPr txBox="1"/>
+          <p:nvPr/>
+        </p:nvSpPr>
+        <p:spPr>
+          <a:xfrm>
+            <a:off x="2011680" y="4663440"/>
+            <a:ext cx="5486400" cy="411480"/>
+          </a:xfrm>
+          <a:prstGeom prst="rect">
+            <a:avLst/>
+          </a:prstGeom>
+          <a:noFill/>
+        </p:spPr>
+        <p:txBody>
+          <a:bodyPr wrap="square">
+            <a:spAutoFit/>
+          </a:bodyPr>
+          <a:lstStyle/>
+          <a:p>
+            <a:pPr algn="l">
+              <a:lnSpc>
+                <a:spcPct val="120000"/>
+              </a:lnSpc>
+              <a:spcBef>
+                <a:spcPts val="0"/>
+              </a:spcBef>
+              <a:spcAft>
+                <a:spcPts val="0"/>
+              </a:spcAft>
+              <a:defRPr sz="2000" b="0">
+                <a:solidFill>
+                  <a:srgbClr val="2C2A26"/>
+                </a:solidFill>
+                <a:latin typeface="Georgia"/>
+              </a:defRPr>
+            </a:pPr>
+            <a:r>
+              <a:t>Build months of personal context</a:t>
+            </a:r>
+          </a:p>
+        </p:txBody>
+      </p:sp>
+      <p:sp>
+        <p:nvSpPr>
+          <p:cNvPr id="11" name="TextBox 10"/>
+          <p:cNvSpPr txBox="1"/>
+          <p:nvPr/>
+        </p:nvSpPr>
+        <p:spPr>
+          <a:xfrm>
+            <a:off x="1371600" y="5120640"/>
+            <a:ext cx="548640" cy="411480"/>
+          </a:xfrm>
+          <a:prstGeom prst="rect">
+            <a:avLst/>
+          </a:prstGeom>
+          <a:noFill/>
+        </p:spPr>
+        <p:txBody>
+          <a:bodyPr wrap="square">
+            <a:spAutoFit/>
+          </a:bodyPr>
+          <a:lstStyle/>
+          <a:p>
+            <a:pPr algn="l">
+              <a:lnSpc>
+                <a:spcPct val="120000"/>
+              </a:lnSpc>
+              <a:spcBef>
+                <a:spcPts val="0"/>
+              </a:spcBef>
+              <a:spcAft>
+                <a:spcPts val="0"/>
+              </a:spcAft>
+              <a:defRPr sz="1400" b="0">
+                <a:solidFill>
+                  <a:srgbClr val="9A9690"/>
+                </a:solidFill>
+                <a:latin typeface="Courier New"/>
+              </a:defRPr>
+            </a:pPr>
+            <a:r>
+              <a:t>03</a:t>
+            </a:r>
+          </a:p>
+        </p:txBody>
+      </p:sp>
+      <p:sp>
+        <p:nvSpPr>
+          <p:cNvPr id="12" name="TextBox 11"/>
+          <p:cNvSpPr txBox="1"/>
+          <p:nvPr/>
+        </p:nvSpPr>
+        <p:spPr>
+          <a:xfrm>
+            <a:off x="2011680" y="5120640"/>
+            <a:ext cx="5486400" cy="411480"/>
+          </a:xfrm>
+          <a:prstGeom prst="rect">
+            <a:avLst/>
+          </a:prstGeom>
+          <a:noFill/>
+        </p:spPr>
+        <p:txBody>
+          <a:bodyPr wrap="square">
+            <a:spAutoFit/>
+          </a:bodyPr>
+          <a:lstStyle/>
+          <a:p>
+            <a:pPr algn="l">
+              <a:lnSpc>
+                <a:spcPct val="120000"/>
+              </a:lnSpc>
+              <a:spcBef>
+                <a:spcPts val="0"/>
+              </a:spcBef>
+              <a:spcAft>
+                <a:spcPts val="0"/>
+              </a:spcAft>
+              <a:defRPr sz="2000" b="0">
+                <a:solidFill>
+                  <a:srgbClr val="2C2A26"/>
+                </a:solidFill>
+                <a:latin typeface="Georgia"/>
+              </a:defRPr>
+            </a:pPr>
+            <a:r>
+              <a:t>Connect any AI via MCP</a:t>
+            </a:r>
+          </a:p>
+        </p:txBody>
+      </p:sp>
+      <p:sp>
+        <p:nvSpPr>
+          <p:cNvPr id="13" name="TextBox 12"/>
+          <p:cNvSpPr txBox="1"/>
+          <p:nvPr/>
+        </p:nvSpPr>
+        <p:spPr>
+          <a:xfrm>
+            <a:off x="1371600" y="5577840"/>
+            <a:ext cx="548640" cy="411480"/>
+          </a:xfrm>
+          <a:prstGeom prst="rect">
+            <a:avLst/>
+          </a:prstGeom>
+          <a:noFill/>
+        </p:spPr>
+        <p:txBody>
+          <a:bodyPr wrap="square">
+            <a:spAutoFit/>
+          </a:bodyPr>
+          <a:lstStyle/>
+          <a:p>
+            <a:pPr algn="l">
+              <a:lnSpc>
+                <a:spcPct val="120000"/>
+              </a:lnSpc>
+              <a:spcBef>
+                <a:spcPts val="0"/>
+              </a:spcBef>
+              <a:spcAft>
+                <a:spcPts val="0"/>
+              </a:spcAft>
+              <a:defRPr sz="1400" b="0">
+                <a:solidFill>
+                  <a:srgbClr val="9A9690"/>
+                </a:solidFill>
+                <a:latin typeface="Courier New"/>
+              </a:defRPr>
+            </a:pPr>
+            <a:r>
+              <a:t>04</a:t>
+            </a:r>
+          </a:p>
+        </p:txBody>
+      </p:sp>
+      <p:sp>
+        <p:nvSpPr>
+          <p:cNvPr id="14" name="TextBox 13"/>
+          <p:cNvSpPr txBox="1"/>
+          <p:nvPr/>
+        </p:nvSpPr>
+        <p:spPr>
+          <a:xfrm>
+            <a:off x="2011680" y="5577840"/>
+            <a:ext cx="5486400" cy="411480"/>
+          </a:xfrm>
+          <a:prstGeom prst="rect">
+            <a:avLst/>
+          </a:prstGeom>
+          <a:noFill/>
+        </p:spPr>
+        <p:txBody>
+          <a:bodyPr wrap="square">
+            <a:spAutoFit/>
+          </a:bodyPr>
+          <a:lstStyle/>
+          <a:p>
+            <a:pPr algn="l">
+              <a:lnSpc>
+                <a:spcPct val="120000"/>
+              </a:lnSpc>
+              <a:spcBef>
+                <a:spcPts val="0"/>
+              </a:spcBef>
+              <a:spcAft>
+                <a:spcPts val="0"/>
+              </a:spcAft>
+              <a:defRPr sz="2000" b="0">
+                <a:solidFill>
+                  <a:srgbClr val="2C2A26"/>
+                </a:solidFill>
+                <a:latin typeface="Georgia"/>
+              </a:defRPr>
+            </a:pPr>
+            <a:r>
+              <a:t>AI already knows you</a:t>
+            </a:r>
+          </a:p>
+        </p:txBody>
+      </p:sp>
+      <p:sp>
+        <p:nvSpPr>
+          <p:cNvPr id="15" name="TextBox 14"/>
+          <p:cNvSpPr txBox="1"/>
+          <p:nvPr/>
+        </p:nvSpPr>
+        <p:spPr>
+          <a:xfrm>
+            <a:off x="1371600" y="6035040"/>
+            <a:ext cx="548640" cy="411480"/>
+          </a:xfrm>
+          <a:prstGeom prst="rect">
+            <a:avLst/>
+          </a:prstGeom>
+          <a:noFill/>
+        </p:spPr>
+        <p:txBody>
+          <a:bodyPr wrap="square">
+            <a:spAutoFit/>
+          </a:bodyPr>
+          <a:lstStyle/>
+          <a:p>
+            <a:pPr algn="l">
+              <a:lnSpc>
+                <a:spcPct val="120000"/>
+              </a:lnSpc>
+              <a:spcBef>
+                <a:spcPts val="0"/>
+              </a:spcBef>
+              <a:spcAft>
+                <a:spcPts val="0"/>
+              </a:spcAft>
+              <a:defRPr sz="1400" b="0">
+                <a:solidFill>
+                  <a:srgbClr val="4A7C59"/>
+                </a:solidFill>
+                <a:latin typeface="Courier New"/>
+              </a:defRPr>
+            </a:pPr>
+            <a:r>
+              <a:t>→</a:t>
+            </a:r>
+          </a:p>
+        </p:txBody>
+      </p:sp>
+      <p:sp>
+        <p:nvSpPr>
+          <p:cNvPr id="16" name="TextBox 15"/>
+          <p:cNvSpPr txBox="1"/>
+          <p:nvPr/>
+        </p:nvSpPr>
+        <p:spPr>
+          <a:xfrm>
+            <a:off x="2011680" y="6035040"/>
+            <a:ext cx="5486400" cy="411480"/>
+          </a:xfrm>
+          <a:prstGeom prst="rect">
+            <a:avLst/>
+          </a:prstGeom>
+          <a:noFill/>
+        </p:spPr>
+        <p:txBody>
+          <a:bodyPr wrap="square">
+            <a:spAutoFit/>
+          </a:bodyPr>
+          <a:lstStyle/>
+          <a:p>
+            <a:pPr algn="l">
+              <a:lnSpc>
+                <a:spcPct val="120000"/>
+              </a:lnSpc>
+              <a:spcBef>
+                <a:spcPts val="0"/>
+              </a:spcBef>
+              <a:spcAft>
+                <a:spcPts val="0"/>
+              </a:spcAft>
+              <a:defRPr sz="2000" b="1">
+                <a:solidFill>
+                  <a:srgbClr val="4A7C59"/>
+                </a:solidFill>
+                <a:latin typeface="Georgia"/>
+              </a:defRPr>
+            </a:pPr>
+            <a:r>
+              <a:t>Switching cost through genuine value</a:t>
+            </a:r>
+          </a:p>
+        </p:txBody>
+      </p:sp>
+      <p:sp>
+        <p:nvSpPr>
+          <p:cNvPr id="17" name="TextBox 16"/>
+          <p:cNvSpPr txBox="1"/>
+          <p:nvPr/>
+        </p:nvSpPr>
+        <p:spPr>
+          <a:xfrm>
+            <a:off x="6858000" y="4206240"/>
+            <a:ext cx="4572000" cy="1828800"/>
+          </a:xfrm>
+          <a:prstGeom prst="rect">
+            <a:avLst/>
+          </a:prstGeom>
+          <a:noFill/>
+        </p:spPr>
+        <p:txBody>
+          <a:bodyPr wrap="square">
+            <a:spAutoFit/>
+          </a:bodyPr>
+          <a:lstStyle/>
+          <a:p>
+            <a:pPr algn="l">
+              <a:lnSpc>
+                <a:spcPct val="150000"/>
+              </a:lnSpc>
+              <a:spcBef>
+                <a:spcPts val="0"/>
+              </a:spcBef>
+              <a:spcAft>
+                <a:spcPts val="0"/>
+              </a:spcAft>
+              <a:defRPr sz="1600" b="0">
+                <a:solidFill>
+                  <a:srgbClr val="6B6860"/>
+                </a:solidFill>
+                <a:latin typeface="Calibri"/>
+              </a:defRPr>
+            </a:pPr>
+            <a:r>
+              <a:t>Open source (AGPL-3.0)</a:t>
+            </a:r>
+            <a:br/>
+            <a:r>
+              <a:t>Local-first</a:t>
+            </a:r>
+            <a:br/>
+            <a:r>
+              <a:t>Public Benefit Corporation</a:t>
+            </a:r>
+            <a:br/>
+            <a:br/>
+            <a:r>
+              <a:t>Your data is yours —</a:t>
+            </a:r>
+            <a:br/>
+            <a:r>
+              <a:t>portable, exportable, self-hostable.</a:t>
+            </a:r>
+          </a:p>
+        </p:txBody>
+      </p:sp>
     </p:spTree>
   </p:cSld>
   <p:clrMapOvr>
@@ -3299,6 +5801,14 @@
 <file path=ppt/slides/slide6.xml><?xml version="1.0" encoding="utf-8"?>
 <p:sld xmlns:a="http://schemas.openxmlformats.org/drawingml/2006/main" xmlns:p="http://schemas.openxmlformats.org/presentationml/2006/main" xmlns:r="http://schemas.openxmlformats.org/officeDocument/2006/relationships">
   <p:cSld>
+    <p:bg>
+      <p:bgPr>
+        <a:solidFill>
+          <a:srgbClr val="FAF8F4"/>
+        </a:solidFill>
+        <a:effectLst/>
+      </p:bgPr>
+    </p:bg>
     <p:spTree>
       <p:nvGrpSpPr>
         <p:cNvPr id="1" name=""/>
@@ -3306,30 +5816,631 @@
         <p:nvPr/>
       </p:nvGrpSpPr>
       <p:grpSpPr/>
-      <p:pic>
-        <p:nvPicPr>
-          <p:cNvPr id="2" name="Picture 1" descr="slide_06.png"/>
-          <p:cNvPicPr>
-            <a:picLocks noChangeAspect="1"/>
-          </p:cNvPicPr>
-          <p:nvPr/>
-        </p:nvPicPr>
-        <p:blipFill>
-          <a:blip r:embed="rId2"/>
-          <a:stretch>
-            <a:fillRect/>
-          </a:stretch>
-        </p:blipFill>
+      <p:sp>
+        <p:nvSpPr>
+          <p:cNvPr id="2" name="Rectangle 1"/>
+          <p:cNvSpPr/>
+          <p:nvPr/>
+        </p:nvSpPr>
         <p:spPr>
           <a:xfrm>
             <a:off x="0" y="0"/>
-            <a:ext cx="12191695" cy="6858000"/>
-          </a:xfrm>
-          <a:prstGeom prst="rect">
-            <a:avLst/>
-          </a:prstGeom>
-        </p:spPr>
-      </p:pic>
+            <a:ext cx="12191695" cy="54864"/>
+          </a:xfrm>
+          <a:prstGeom prst="rect">
+            <a:avLst/>
+          </a:prstGeom>
+          <a:solidFill>
+            <a:srgbClr val="4A7C59"/>
+          </a:solidFill>
+          <a:ln>
+            <a:noFill/>
+          </a:ln>
+        </p:spPr>
+        <p:style>
+          <a:lnRef idx="1">
+            <a:schemeClr val="accent1"/>
+          </a:lnRef>
+          <a:fillRef idx="3">
+            <a:schemeClr val="accent1"/>
+          </a:fillRef>
+          <a:effectRef idx="2">
+            <a:schemeClr val="accent1"/>
+          </a:effectRef>
+          <a:fontRef idx="minor">
+            <a:schemeClr val="lt1"/>
+          </a:fontRef>
+        </p:style>
+        <p:txBody>
+          <a:bodyPr rtlCol="0" anchor="ctr"/>
+          <a:lstStyle/>
+          <a:p>
+            <a:pPr algn="ctr"/>
+          </a:p>
+        </p:txBody>
+      </p:sp>
+      <p:sp>
+        <p:nvSpPr>
+          <p:cNvPr id="3" name="TextBox 2"/>
+          <p:cNvSpPr txBox="1"/>
+          <p:nvPr/>
+        </p:nvSpPr>
+        <p:spPr>
+          <a:xfrm>
+            <a:off x="1097280" y="6400800"/>
+            <a:ext cx="3657600" cy="274320"/>
+          </a:xfrm>
+          <a:prstGeom prst="rect">
+            <a:avLst/>
+          </a:prstGeom>
+          <a:noFill/>
+        </p:spPr>
+        <p:txBody>
+          <a:bodyPr wrap="none">
+            <a:spAutoFit/>
+          </a:bodyPr>
+          <a:lstStyle/>
+          <a:p>
+            <a:pPr>
+              <a:defRPr sz="900">
+                <a:solidFill>
+                  <a:srgbClr val="9A9690"/>
+                </a:solidFill>
+                <a:latin typeface="Calibri"/>
+              </a:defRPr>
+            </a:pPr>
+            <a:r>
+              <a:t>parachute.computer</a:t>
+            </a:r>
+          </a:p>
+        </p:txBody>
+      </p:sp>
+      <p:sp>
+        <p:nvSpPr>
+          <p:cNvPr id="4" name="TextBox 3"/>
+          <p:cNvSpPr txBox="1"/>
+          <p:nvPr/>
+        </p:nvSpPr>
+        <p:spPr>
+          <a:xfrm>
+            <a:off x="1097280" y="1097280"/>
+            <a:ext cx="3657600" cy="365760"/>
+          </a:xfrm>
+          <a:prstGeom prst="rect">
+            <a:avLst/>
+          </a:prstGeom>
+          <a:noFill/>
+        </p:spPr>
+        <p:txBody>
+          <a:bodyPr wrap="square">
+            <a:spAutoFit/>
+          </a:bodyPr>
+          <a:lstStyle/>
+          <a:p>
+            <a:pPr algn="l">
+              <a:lnSpc>
+                <a:spcPct val="120000"/>
+              </a:lnSpc>
+              <a:spcBef>
+                <a:spcPts val="0"/>
+              </a:spcBef>
+              <a:spcAft>
+                <a:spcPts val="0"/>
+              </a:spcAft>
+              <a:defRPr sz="1100" b="1">
+                <a:solidFill>
+                  <a:srgbClr val="4A7C59"/>
+                </a:solidFill>
+                <a:latin typeface="Calibri"/>
+              </a:defRPr>
+            </a:pPr>
+            <a:r>
+              <a:t>BUSINESS MODEL</a:t>
+            </a:r>
+          </a:p>
+        </p:txBody>
+      </p:sp>
+      <p:sp>
+        <p:nvSpPr>
+          <p:cNvPr id="5" name="TextBox 4"/>
+          <p:cNvSpPr txBox="1"/>
+          <p:nvPr/>
+        </p:nvSpPr>
+        <p:spPr>
+          <a:xfrm>
+            <a:off x="1097280" y="1554480"/>
+            <a:ext cx="9144000" cy="1371600"/>
+          </a:xfrm>
+          <a:prstGeom prst="rect">
+            <a:avLst/>
+          </a:prstGeom>
+          <a:noFill/>
+        </p:spPr>
+        <p:txBody>
+          <a:bodyPr wrap="square">
+            <a:spAutoFit/>
+          </a:bodyPr>
+          <a:lstStyle/>
+          <a:p>
+            <a:pPr algn="l">
+              <a:lnSpc>
+                <a:spcPct val="105000"/>
+              </a:lnSpc>
+              <a:spcBef>
+                <a:spcPts val="0"/>
+              </a:spcBef>
+              <a:spcAft>
+                <a:spcPts val="0"/>
+              </a:spcAft>
+              <a:defRPr sz="4000" b="0">
+                <a:solidFill>
+                  <a:srgbClr val="2C2A26"/>
+                </a:solidFill>
+                <a:latin typeface="Georgia"/>
+              </a:defRPr>
+            </a:pPr>
+            <a:r>
+              <a:t>Start free.</a:t>
+            </a:r>
+            <a:br/>
+            <a:r>
+              <a:t>Grow with every user.</a:t>
+            </a:r>
+          </a:p>
+        </p:txBody>
+      </p:sp>
+      <p:sp>
+        <p:nvSpPr>
+          <p:cNvPr id="6" name="TextBox 5"/>
+          <p:cNvSpPr txBox="1"/>
+          <p:nvPr/>
+        </p:nvSpPr>
+        <p:spPr>
+          <a:xfrm>
+            <a:off x="1097280" y="3108960"/>
+            <a:ext cx="1645920" cy="365760"/>
+          </a:xfrm>
+          <a:prstGeom prst="rect">
+            <a:avLst/>
+          </a:prstGeom>
+          <a:noFill/>
+        </p:spPr>
+        <p:txBody>
+          <a:bodyPr wrap="square">
+            <a:spAutoFit/>
+          </a:bodyPr>
+          <a:lstStyle/>
+          <a:p>
+            <a:pPr algn="l">
+              <a:lnSpc>
+                <a:spcPct val="120000"/>
+              </a:lnSpc>
+              <a:spcBef>
+                <a:spcPts val="0"/>
+              </a:spcBef>
+              <a:spcAft>
+                <a:spcPts val="0"/>
+              </a:spcAft>
+              <a:defRPr sz="2200" b="0">
+                <a:solidFill>
+                  <a:srgbClr val="9A9690"/>
+                </a:solidFill>
+                <a:latin typeface="Georgia"/>
+              </a:defRPr>
+            </a:pPr>
+            <a:r>
+              <a:t>Free</a:t>
+            </a:r>
+          </a:p>
+        </p:txBody>
+      </p:sp>
+      <p:sp>
+        <p:nvSpPr>
+          <p:cNvPr id="7" name="TextBox 6"/>
+          <p:cNvSpPr txBox="1"/>
+          <p:nvPr/>
+        </p:nvSpPr>
+        <p:spPr>
+          <a:xfrm>
+            <a:off x="2926080" y="3136392"/>
+            <a:ext cx="7315200" cy="365760"/>
+          </a:xfrm>
+          <a:prstGeom prst="rect">
+            <a:avLst/>
+          </a:prstGeom>
+          <a:noFill/>
+        </p:spPr>
+        <p:txBody>
+          <a:bodyPr wrap="square">
+            <a:spAutoFit/>
+          </a:bodyPr>
+          <a:lstStyle/>
+          <a:p>
+            <a:pPr algn="l">
+              <a:lnSpc>
+                <a:spcPct val="120000"/>
+              </a:lnSpc>
+              <a:spcBef>
+                <a:spcPts val="0"/>
+              </a:spcBef>
+              <a:spcAft>
+                <a:spcPts val="0"/>
+              </a:spcAft>
+              <a:defRPr sz="1500" b="0">
+                <a:solidFill>
+                  <a:srgbClr val="6B6860"/>
+                </a:solidFill>
+                <a:latin typeface="Calibri"/>
+              </a:defRPr>
+            </a:pPr>
+            <a:r>
+              <a:t>Offline journal + on-device transcription. Zero hosting cost.</a:t>
+            </a:r>
+          </a:p>
+        </p:txBody>
+      </p:sp>
+      <p:sp>
+        <p:nvSpPr>
+          <p:cNvPr id="8" name="TextBox 7"/>
+          <p:cNvSpPr txBox="1"/>
+          <p:nvPr/>
+        </p:nvSpPr>
+        <p:spPr>
+          <a:xfrm>
+            <a:off x="1097280" y="3749040"/>
+            <a:ext cx="1645920" cy="365760"/>
+          </a:xfrm>
+          <a:prstGeom prst="rect">
+            <a:avLst/>
+          </a:prstGeom>
+          <a:noFill/>
+        </p:spPr>
+        <p:txBody>
+          <a:bodyPr wrap="square">
+            <a:spAutoFit/>
+          </a:bodyPr>
+          <a:lstStyle/>
+          <a:p>
+            <a:pPr algn="l">
+              <a:lnSpc>
+                <a:spcPct val="120000"/>
+              </a:lnSpc>
+              <a:spcBef>
+                <a:spcPts val="0"/>
+              </a:spcBef>
+              <a:spcAft>
+                <a:spcPts val="0"/>
+              </a:spcAft>
+              <a:defRPr sz="2200" b="0">
+                <a:solidFill>
+                  <a:srgbClr val="6B6860"/>
+                </a:solidFill>
+                <a:latin typeface="Georgia"/>
+              </a:defRPr>
+            </a:pPr>
+            <a:r>
+              <a:t>$2/mo</a:t>
+            </a:r>
+          </a:p>
+        </p:txBody>
+      </p:sp>
+      <p:sp>
+        <p:nvSpPr>
+          <p:cNvPr id="9" name="TextBox 8"/>
+          <p:cNvSpPr txBox="1"/>
+          <p:nvPr/>
+        </p:nvSpPr>
+        <p:spPr>
+          <a:xfrm>
+            <a:off x="2926080" y="3776472"/>
+            <a:ext cx="7315200" cy="365760"/>
+          </a:xfrm>
+          <a:prstGeom prst="rect">
+            <a:avLst/>
+          </a:prstGeom>
+          <a:noFill/>
+        </p:spPr>
+        <p:txBody>
+          <a:bodyPr wrap="square">
+            <a:spAutoFit/>
+          </a:bodyPr>
+          <a:lstStyle/>
+          <a:p>
+            <a:pPr algn="l">
+              <a:lnSpc>
+                <a:spcPct val="120000"/>
+              </a:lnSpc>
+              <a:spcBef>
+                <a:spcPts val="0"/>
+              </a:spcBef>
+              <a:spcAft>
+                <a:spcPts val="0"/>
+              </a:spcAft>
+              <a:defRPr sz="1500" b="0">
+                <a:solidFill>
+                  <a:srgbClr val="6B6860"/>
+                </a:solidFill>
+                <a:latin typeface="Calibri"/>
+              </a:defRPr>
+            </a:pPr>
+            <a:r>
+              <a:t>Cloud sync + MCP access — your notes available to any AI</a:t>
+            </a:r>
+          </a:p>
+        </p:txBody>
+      </p:sp>
+      <p:sp>
+        <p:nvSpPr>
+          <p:cNvPr id="10" name="TextBox 9"/>
+          <p:cNvSpPr txBox="1"/>
+          <p:nvPr/>
+        </p:nvSpPr>
+        <p:spPr>
+          <a:xfrm>
+            <a:off x="1097280" y="4389120"/>
+            <a:ext cx="1645920" cy="365760"/>
+          </a:xfrm>
+          <a:prstGeom prst="rect">
+            <a:avLst/>
+          </a:prstGeom>
+          <a:noFill/>
+        </p:spPr>
+        <p:txBody>
+          <a:bodyPr wrap="square">
+            <a:spAutoFit/>
+          </a:bodyPr>
+          <a:lstStyle/>
+          <a:p>
+            <a:pPr algn="l">
+              <a:lnSpc>
+                <a:spcPct val="120000"/>
+              </a:lnSpc>
+              <a:spcBef>
+                <a:spcPts val="0"/>
+              </a:spcBef>
+              <a:spcAft>
+                <a:spcPts val="0"/>
+              </a:spcAft>
+              <a:defRPr sz="2200" b="0">
+                <a:solidFill>
+                  <a:srgbClr val="6B6860"/>
+                </a:solidFill>
+                <a:latin typeface="Georgia"/>
+              </a:defRPr>
+            </a:pPr>
+            <a:r>
+              <a:t>$5/mo</a:t>
+            </a:r>
+          </a:p>
+        </p:txBody>
+      </p:sp>
+      <p:sp>
+        <p:nvSpPr>
+          <p:cNvPr id="11" name="TextBox 10"/>
+          <p:cNvSpPr txBox="1"/>
+          <p:nvPr/>
+        </p:nvSpPr>
+        <p:spPr>
+          <a:xfrm>
+            <a:off x="2926080" y="4416552"/>
+            <a:ext cx="7315200" cy="365760"/>
+          </a:xfrm>
+          <a:prstGeom prst="rect">
+            <a:avLst/>
+          </a:prstGeom>
+          <a:noFill/>
+        </p:spPr>
+        <p:txBody>
+          <a:bodyPr wrap="square">
+            <a:spAutoFit/>
+          </a:bodyPr>
+          <a:lstStyle/>
+          <a:p>
+            <a:pPr algn="l">
+              <a:lnSpc>
+                <a:spcPct val="120000"/>
+              </a:lnSpc>
+              <a:spcBef>
+                <a:spcPts val="0"/>
+              </a:spcBef>
+              <a:spcAft>
+                <a:spcPts val="0"/>
+              </a:spcAft>
+              <a:defRPr sz="1500" b="0">
+                <a:solidFill>
+                  <a:srgbClr val="6B6860"/>
+                </a:solidFill>
+                <a:latin typeface="Calibri"/>
+              </a:defRPr>
+            </a:pPr>
+            <a:r>
+              <a:t>Cloud transcription + cleanup — server-side, better accuracy</a:t>
+            </a:r>
+          </a:p>
+        </p:txBody>
+      </p:sp>
+      <p:sp>
+        <p:nvSpPr>
+          <p:cNvPr id="12" name="Rounded Rectangle 11"/>
+          <p:cNvSpPr/>
+          <p:nvPr/>
+        </p:nvSpPr>
+        <p:spPr>
+          <a:xfrm>
+            <a:off x="914400" y="4937760"/>
+            <a:ext cx="9601200" cy="502920"/>
+          </a:xfrm>
+          <a:prstGeom prst="roundRect">
+            <a:avLst/>
+          </a:prstGeom>
+          <a:solidFill>
+            <a:srgbClr val="E8F5EC"/>
+          </a:solidFill>
+          <a:ln>
+            <a:noFill/>
+          </a:ln>
+        </p:spPr>
+        <p:style>
+          <a:lnRef idx="1">
+            <a:schemeClr val="accent1"/>
+          </a:lnRef>
+          <a:fillRef idx="3">
+            <a:schemeClr val="accent1"/>
+          </a:fillRef>
+          <a:effectRef idx="2">
+            <a:schemeClr val="accent1"/>
+          </a:effectRef>
+          <a:fontRef idx="minor">
+            <a:schemeClr val="lt1"/>
+          </a:fontRef>
+        </p:style>
+        <p:txBody>
+          <a:bodyPr rtlCol="0" anchor="ctr"/>
+          <a:lstStyle/>
+          <a:p>
+            <a:pPr algn="ctr"/>
+          </a:p>
+        </p:txBody>
+      </p:sp>
+      <p:sp>
+        <p:nvSpPr>
+          <p:cNvPr id="13" name="TextBox 12"/>
+          <p:cNvSpPr txBox="1"/>
+          <p:nvPr/>
+        </p:nvSpPr>
+        <p:spPr>
+          <a:xfrm>
+            <a:off x="1097280" y="5029200"/>
+            <a:ext cx="1645920" cy="365760"/>
+          </a:xfrm>
+          <a:prstGeom prst="rect">
+            <a:avLst/>
+          </a:prstGeom>
+          <a:noFill/>
+        </p:spPr>
+        <p:txBody>
+          <a:bodyPr wrap="square">
+            <a:spAutoFit/>
+          </a:bodyPr>
+          <a:lstStyle/>
+          <a:p>
+            <a:pPr algn="l">
+              <a:lnSpc>
+                <a:spcPct val="120000"/>
+              </a:lnSpc>
+              <a:spcBef>
+                <a:spcPts val="0"/>
+              </a:spcBef>
+              <a:spcAft>
+                <a:spcPts val="0"/>
+              </a:spcAft>
+              <a:defRPr sz="2200" b="0">
+                <a:solidFill>
+                  <a:srgbClr val="4A7C59"/>
+                </a:solidFill>
+                <a:latin typeface="Georgia"/>
+              </a:defRPr>
+            </a:pPr>
+            <a:r>
+              <a:t>$10/mo</a:t>
+            </a:r>
+          </a:p>
+        </p:txBody>
+      </p:sp>
+      <p:sp>
+        <p:nvSpPr>
+          <p:cNvPr id="14" name="TextBox 13"/>
+          <p:cNvSpPr txBox="1"/>
+          <p:nvPr/>
+        </p:nvSpPr>
+        <p:spPr>
+          <a:xfrm>
+            <a:off x="2926080" y="5056632"/>
+            <a:ext cx="7315200" cy="365760"/>
+          </a:xfrm>
+          <a:prstGeom prst="rect">
+            <a:avLst/>
+          </a:prstGeom>
+          <a:noFill/>
+        </p:spPr>
+        <p:txBody>
+          <a:bodyPr wrap="square">
+            <a:spAutoFit/>
+          </a:bodyPr>
+          <a:lstStyle/>
+          <a:p>
+            <a:pPr algn="l">
+              <a:lnSpc>
+                <a:spcPct val="120000"/>
+              </a:lnSpc>
+              <a:spcBef>
+                <a:spcPts val="0"/>
+              </a:spcBef>
+              <a:spcAft>
+                <a:spcPts val="0"/>
+              </a:spcAft>
+              <a:defRPr sz="1500" b="0">
+                <a:solidFill>
+                  <a:srgbClr val="6B6860"/>
+                </a:solidFill>
+                <a:latin typeface="Calibri"/>
+              </a:defRPr>
+            </a:pPr>
+            <a:r>
+              <a:t>AI reflections, vector search, and synthesis</a:t>
+            </a:r>
+          </a:p>
+        </p:txBody>
+      </p:sp>
+      <p:sp>
+        <p:nvSpPr>
+          <p:cNvPr id="15" name="TextBox 14"/>
+          <p:cNvSpPr txBox="1"/>
+          <p:nvPr/>
+        </p:nvSpPr>
+        <p:spPr>
+          <a:xfrm>
+            <a:off x="1097280" y="5943600"/>
+            <a:ext cx="9144000" cy="548640"/>
+          </a:xfrm>
+          <a:prstGeom prst="rect">
+            <a:avLst/>
+          </a:prstGeom>
+          <a:noFill/>
+        </p:spPr>
+        <p:txBody>
+          <a:bodyPr wrap="square">
+            <a:spAutoFit/>
+          </a:bodyPr>
+          <a:lstStyle/>
+          <a:p>
+            <a:pPr algn="l">
+              <a:lnSpc>
+                <a:spcPct val="150000"/>
+              </a:lnSpc>
+              <a:spcBef>
+                <a:spcPts val="0"/>
+              </a:spcBef>
+              <a:spcAft>
+                <a:spcPts val="0"/>
+              </a:spcAft>
+              <a:defRPr sz="1500" b="0">
+                <a:solidFill>
+                  <a:srgbClr val="9A9690"/>
+                </a:solidFill>
+                <a:latin typeface="Calibri"/>
+              </a:defRPr>
+            </a:pPr>
+            <a:r>
+              <a:t>100M+ people already pay $20+/mo for AI. We’re not competing with that subscription —</a:t>
+            </a:r>
+            <a:br/>
+            <a:r>
+              <a:t>we’re the $2–10 add-on that makes it dramatically better. Free tier = zero hosting cost.</a:t>
+            </a:r>
+          </a:p>
+        </p:txBody>
+      </p:sp>
     </p:spTree>
   </p:cSld>
   <p:clrMapOvr>
@@ -3341,6 +6452,14 @@
 <file path=ppt/slides/slide7.xml><?xml version="1.0" encoding="utf-8"?>
 <p:sld xmlns:a="http://schemas.openxmlformats.org/drawingml/2006/main" xmlns:p="http://schemas.openxmlformats.org/presentationml/2006/main" xmlns:r="http://schemas.openxmlformats.org/officeDocument/2006/relationships">
   <p:cSld>
+    <p:bg>
+      <p:bgPr>
+        <a:solidFill>
+          <a:srgbClr val="FAF8F4"/>
+        </a:solidFill>
+        <a:effectLst/>
+      </p:bgPr>
+    </p:bg>
     <p:spTree>
       <p:nvGrpSpPr>
         <p:cNvPr id="1" name=""/>
@@ -3348,30 +6467,1669 @@
         <p:nvPr/>
       </p:nvGrpSpPr>
       <p:grpSpPr/>
-      <p:pic>
-        <p:nvPicPr>
-          <p:cNvPr id="2" name="Picture 1" descr="slide_07.png"/>
-          <p:cNvPicPr>
-            <a:picLocks noChangeAspect="1"/>
-          </p:cNvPicPr>
-          <p:nvPr/>
-        </p:nvPicPr>
-        <p:blipFill>
-          <a:blip r:embed="rId2"/>
-          <a:stretch>
-            <a:fillRect/>
-          </a:stretch>
-        </p:blipFill>
+      <p:sp>
+        <p:nvSpPr>
+          <p:cNvPr id="2" name="Rectangle 1"/>
+          <p:cNvSpPr/>
+          <p:nvPr/>
+        </p:nvSpPr>
         <p:spPr>
           <a:xfrm>
             <a:off x="0" y="0"/>
-            <a:ext cx="12191695" cy="6858000"/>
-          </a:xfrm>
-          <a:prstGeom prst="rect">
-            <a:avLst/>
-          </a:prstGeom>
-        </p:spPr>
-      </p:pic>
+            <a:ext cx="12191695" cy="54864"/>
+          </a:xfrm>
+          <a:prstGeom prst="rect">
+            <a:avLst/>
+          </a:prstGeom>
+          <a:solidFill>
+            <a:srgbClr val="4A7C59"/>
+          </a:solidFill>
+          <a:ln>
+            <a:noFill/>
+          </a:ln>
+        </p:spPr>
+        <p:style>
+          <a:lnRef idx="1">
+            <a:schemeClr val="accent1"/>
+          </a:lnRef>
+          <a:fillRef idx="3">
+            <a:schemeClr val="accent1"/>
+          </a:fillRef>
+          <a:effectRef idx="2">
+            <a:schemeClr val="accent1"/>
+          </a:effectRef>
+          <a:fontRef idx="minor">
+            <a:schemeClr val="lt1"/>
+          </a:fontRef>
+        </p:style>
+        <p:txBody>
+          <a:bodyPr rtlCol="0" anchor="ctr"/>
+          <a:lstStyle/>
+          <a:p>
+            <a:pPr algn="ctr"/>
+          </a:p>
+        </p:txBody>
+      </p:sp>
+      <p:sp>
+        <p:nvSpPr>
+          <p:cNvPr id="3" name="TextBox 2"/>
+          <p:cNvSpPr txBox="1"/>
+          <p:nvPr/>
+        </p:nvSpPr>
+        <p:spPr>
+          <a:xfrm>
+            <a:off x="1097280" y="6400800"/>
+            <a:ext cx="3657600" cy="274320"/>
+          </a:xfrm>
+          <a:prstGeom prst="rect">
+            <a:avLst/>
+          </a:prstGeom>
+          <a:noFill/>
+        </p:spPr>
+        <p:txBody>
+          <a:bodyPr wrap="none">
+            <a:spAutoFit/>
+          </a:bodyPr>
+          <a:lstStyle/>
+          <a:p>
+            <a:pPr>
+              <a:defRPr sz="900">
+                <a:solidFill>
+                  <a:srgbClr val="9A9690"/>
+                </a:solidFill>
+                <a:latin typeface="Calibri"/>
+              </a:defRPr>
+            </a:pPr>
+            <a:r>
+              <a:t>parachute.computer</a:t>
+            </a:r>
+          </a:p>
+        </p:txBody>
+      </p:sp>
+      <p:sp>
+        <p:nvSpPr>
+          <p:cNvPr id="4" name="TextBox 3"/>
+          <p:cNvSpPr txBox="1"/>
+          <p:nvPr/>
+        </p:nvSpPr>
+        <p:spPr>
+          <a:xfrm>
+            <a:off x="1097280" y="1097280"/>
+            <a:ext cx="3657600" cy="365760"/>
+          </a:xfrm>
+          <a:prstGeom prst="rect">
+            <a:avLst/>
+          </a:prstGeom>
+          <a:noFill/>
+        </p:spPr>
+        <p:txBody>
+          <a:bodyPr wrap="square">
+            <a:spAutoFit/>
+          </a:bodyPr>
+          <a:lstStyle/>
+          <a:p>
+            <a:pPr algn="l">
+              <a:lnSpc>
+                <a:spcPct val="120000"/>
+              </a:lnSpc>
+              <a:spcBef>
+                <a:spcPts val="0"/>
+              </a:spcBef>
+              <a:spcAft>
+                <a:spcPts val="0"/>
+              </a:spcAft>
+              <a:defRPr sz="1100" b="1">
+                <a:solidFill>
+                  <a:srgbClr val="4A7C59"/>
+                </a:solidFill>
+                <a:latin typeface="Calibri"/>
+              </a:defRPr>
+            </a:pPr>
+            <a:r>
+              <a:t>FINANCIAL PROJECTIONS</a:t>
+            </a:r>
+          </a:p>
+        </p:txBody>
+      </p:sp>
+      <p:sp>
+        <p:nvSpPr>
+          <p:cNvPr id="5" name="TextBox 4"/>
+          <p:cNvSpPr txBox="1"/>
+          <p:nvPr/>
+        </p:nvSpPr>
+        <p:spPr>
+          <a:xfrm>
+            <a:off x="1097280" y="1554480"/>
+            <a:ext cx="9144000" cy="1371600"/>
+          </a:xfrm>
+          <a:prstGeom prst="rect">
+            <a:avLst/>
+          </a:prstGeom>
+          <a:noFill/>
+        </p:spPr>
+        <p:txBody>
+          <a:bodyPr wrap="square">
+            <a:spAutoFit/>
+          </a:bodyPr>
+          <a:lstStyle/>
+          <a:p>
+            <a:pPr algn="l">
+              <a:lnSpc>
+                <a:spcPct val="105000"/>
+              </a:lnSpc>
+              <a:spcBef>
+                <a:spcPts val="0"/>
+              </a:spcBef>
+              <a:spcAft>
+                <a:spcPts val="0"/>
+              </a:spcAft>
+              <a:defRPr sz="4000" b="0">
+                <a:solidFill>
+                  <a:srgbClr val="2C2A26"/>
+                </a:solidFill>
+                <a:latin typeface="Georgia"/>
+              </a:defRPr>
+            </a:pPr>
+            <a:r>
+              <a:t>Profitable by year three.</a:t>
+            </a:r>
+          </a:p>
+        </p:txBody>
+      </p:sp>
+      <p:graphicFrame>
+        <p:nvGraphicFramePr>
+          <p:cNvPr id="6" name="Table 5"/>
+          <p:cNvGraphicFramePr>
+            <a:graphicFrameLocks noGrp="1"/>
+          </p:cNvGraphicFramePr>
+          <p:nvPr/>
+        </p:nvGraphicFramePr>
+        <p:xfrm>
+          <a:off x="1371600" y="3017520"/>
+          <a:ext cx="7498080" cy="2743200"/>
+        </p:xfrm>
+        <a:graphic>
+          <a:graphicData uri="http://schemas.openxmlformats.org/drawingml/2006/table">
+            <a:tbl>
+              <a:tblPr firstRow="1" bandRow="1">
+                <a:tableStyleId>{5C22544A-7EE6-4342-B048-85BDC9FD1C3A}</a:tableStyleId>
+              </a:tblPr>
+              <a:tblGrid>
+                <a:gridCol w="2560320"/>
+                <a:gridCol w="1645920"/>
+                <a:gridCol w="1645920"/>
+                <a:gridCol w="1645920"/>
+              </a:tblGrid>
+              <a:tr h="342900">
+                <a:tc>
+                  <a:txBody>
+                    <a:bodyPr/>
+                    <a:lstStyle/>
+                    <a:p>
+                      <a:pPr algn="l">
+                        <a:defRPr sz="1100" b="1">
+                          <a:solidFill>
+                            <a:srgbClr val="9A9690"/>
+                          </a:solidFill>
+                          <a:latin typeface="Calibri"/>
+                        </a:defRPr>
+                      </a:pPr>
+                    </a:p>
+                  </a:txBody>
+                  <a:tcPr>
+                    <a:solidFill>
+                      <a:srgbClr val="F3F0EA"/>
+                    </a:solidFill>
+                    <a:lnL w="6350">
+                      <a:solidFill>
+                        <a:srgbClr val="E4E0D8"/>
+                      </a:solidFill>
+                    </a:lnL>
+                    <a:lnR w="6350">
+                      <a:solidFill>
+                        <a:srgbClr val="E4E0D8"/>
+                      </a:solidFill>
+                    </a:lnR>
+                    <a:lnT w="6350">
+                      <a:solidFill>
+                        <a:srgbClr val="E4E0D8"/>
+                      </a:solidFill>
+                    </a:lnT>
+                    <a:lnB w="6350">
+                      <a:solidFill>
+                        <a:srgbClr val="E4E0D8"/>
+                      </a:solidFill>
+                    </a:lnB>
+                  </a:tcPr>
+                </a:tc>
+                <a:tc>
+                  <a:txBody>
+                    <a:bodyPr/>
+                    <a:lstStyle/>
+                    <a:p>
+                      <a:pPr algn="ctr">
+                        <a:defRPr sz="1100" b="1">
+                          <a:solidFill>
+                            <a:srgbClr val="9A9690"/>
+                          </a:solidFill>
+                          <a:latin typeface="Calibri"/>
+                        </a:defRPr>
+                      </a:pPr>
+                      <a:r>
+                        <a:t>2026</a:t>
+                      </a:r>
+                    </a:p>
+                  </a:txBody>
+                  <a:tcPr>
+                    <a:solidFill>
+                      <a:srgbClr val="F3F0EA"/>
+                    </a:solidFill>
+                    <a:lnL w="6350">
+                      <a:solidFill>
+                        <a:srgbClr val="E4E0D8"/>
+                      </a:solidFill>
+                    </a:lnL>
+                    <a:lnR w="6350">
+                      <a:solidFill>
+                        <a:srgbClr val="E4E0D8"/>
+                      </a:solidFill>
+                    </a:lnR>
+                    <a:lnT w="6350">
+                      <a:solidFill>
+                        <a:srgbClr val="E4E0D8"/>
+                      </a:solidFill>
+                    </a:lnT>
+                    <a:lnB w="6350">
+                      <a:solidFill>
+                        <a:srgbClr val="E4E0D8"/>
+                      </a:solidFill>
+                    </a:lnB>
+                  </a:tcPr>
+                </a:tc>
+                <a:tc>
+                  <a:txBody>
+                    <a:bodyPr/>
+                    <a:lstStyle/>
+                    <a:p>
+                      <a:pPr algn="ctr">
+                        <a:defRPr sz="1100" b="1">
+                          <a:solidFill>
+                            <a:srgbClr val="9A9690"/>
+                          </a:solidFill>
+                          <a:latin typeface="Calibri"/>
+                        </a:defRPr>
+                      </a:pPr>
+                      <a:r>
+                        <a:t>2027</a:t>
+                      </a:r>
+                    </a:p>
+                  </a:txBody>
+                  <a:tcPr>
+                    <a:solidFill>
+                      <a:srgbClr val="F3F0EA"/>
+                    </a:solidFill>
+                    <a:lnL w="6350">
+                      <a:solidFill>
+                        <a:srgbClr val="E4E0D8"/>
+                      </a:solidFill>
+                    </a:lnL>
+                    <a:lnR w="6350">
+                      <a:solidFill>
+                        <a:srgbClr val="E4E0D8"/>
+                      </a:solidFill>
+                    </a:lnR>
+                    <a:lnT w="6350">
+                      <a:solidFill>
+                        <a:srgbClr val="E4E0D8"/>
+                      </a:solidFill>
+                    </a:lnT>
+                    <a:lnB w="6350">
+                      <a:solidFill>
+                        <a:srgbClr val="E4E0D8"/>
+                      </a:solidFill>
+                    </a:lnB>
+                  </a:tcPr>
+                </a:tc>
+                <a:tc>
+                  <a:txBody>
+                    <a:bodyPr/>
+                    <a:lstStyle/>
+                    <a:p>
+                      <a:pPr algn="ctr">
+                        <a:defRPr sz="1100" b="1">
+                          <a:solidFill>
+                            <a:srgbClr val="9A9690"/>
+                          </a:solidFill>
+                          <a:latin typeface="Calibri"/>
+                        </a:defRPr>
+                      </a:pPr>
+                      <a:r>
+                        <a:t>2028</a:t>
+                      </a:r>
+                    </a:p>
+                  </a:txBody>
+                  <a:tcPr>
+                    <a:solidFill>
+                      <a:srgbClr val="F3F0EA"/>
+                    </a:solidFill>
+                    <a:lnL w="6350">
+                      <a:solidFill>
+                        <a:srgbClr val="E4E0D8"/>
+                      </a:solidFill>
+                    </a:lnL>
+                    <a:lnR w="6350">
+                      <a:solidFill>
+                        <a:srgbClr val="E4E0D8"/>
+                      </a:solidFill>
+                    </a:lnR>
+                    <a:lnT w="6350">
+                      <a:solidFill>
+                        <a:srgbClr val="E4E0D8"/>
+                      </a:solidFill>
+                    </a:lnT>
+                    <a:lnB w="6350">
+                      <a:solidFill>
+                        <a:srgbClr val="E4E0D8"/>
+                      </a:solidFill>
+                    </a:lnB>
+                  </a:tcPr>
+                </a:tc>
+              </a:tr>
+              <a:tr h="342900">
+                <a:tc>
+                  <a:txBody>
+                    <a:bodyPr/>
+                    <a:lstStyle/>
+                    <a:p>
+                      <a:pPr algn="l">
+                        <a:defRPr sz="1100" b="1">
+                          <a:solidFill>
+                            <a:srgbClr val="2C2A26"/>
+                          </a:solidFill>
+                          <a:latin typeface="Calibri"/>
+                        </a:defRPr>
+                      </a:pPr>
+                      <a:r>
+                        <a:t>Free users</a:t>
+                      </a:r>
+                    </a:p>
+                  </a:txBody>
+                  <a:tcPr>
+                    <a:solidFill>
+                      <a:srgbClr val="FFFFFF"/>
+                    </a:solidFill>
+                    <a:lnL w="6350">
+                      <a:solidFill>
+                        <a:srgbClr val="E4E0D8"/>
+                      </a:solidFill>
+                    </a:lnL>
+                    <a:lnR w="6350">
+                      <a:solidFill>
+                        <a:srgbClr val="E4E0D8"/>
+                      </a:solidFill>
+                    </a:lnR>
+                    <a:lnT w="6350">
+                      <a:solidFill>
+                        <a:srgbClr val="E4E0D8"/>
+                      </a:solidFill>
+                    </a:lnT>
+                    <a:lnB w="6350">
+                      <a:solidFill>
+                        <a:srgbClr val="E4E0D8"/>
+                      </a:solidFill>
+                    </a:lnB>
+                  </a:tcPr>
+                </a:tc>
+                <a:tc>
+                  <a:txBody>
+                    <a:bodyPr/>
+                    <a:lstStyle/>
+                    <a:p>
+                      <a:pPr algn="ctr">
+                        <a:defRPr sz="1200">
+                          <a:solidFill>
+                            <a:srgbClr val="6B6860"/>
+                          </a:solidFill>
+                          <a:latin typeface="Calibri"/>
+                        </a:defRPr>
+                      </a:pPr>
+                      <a:r>
+                        <a:t>5,000</a:t>
+                      </a:r>
+                    </a:p>
+                  </a:txBody>
+                  <a:tcPr>
+                    <a:solidFill>
+                      <a:srgbClr val="FFFFFF"/>
+                    </a:solidFill>
+                    <a:lnL w="6350">
+                      <a:solidFill>
+                        <a:srgbClr val="E4E0D8"/>
+                      </a:solidFill>
+                    </a:lnL>
+                    <a:lnR w="6350">
+                      <a:solidFill>
+                        <a:srgbClr val="E4E0D8"/>
+                      </a:solidFill>
+                    </a:lnR>
+                    <a:lnT w="6350">
+                      <a:solidFill>
+                        <a:srgbClr val="E4E0D8"/>
+                      </a:solidFill>
+                    </a:lnT>
+                    <a:lnB w="6350">
+                      <a:solidFill>
+                        <a:srgbClr val="E4E0D8"/>
+                      </a:solidFill>
+                    </a:lnB>
+                  </a:tcPr>
+                </a:tc>
+                <a:tc>
+                  <a:txBody>
+                    <a:bodyPr/>
+                    <a:lstStyle/>
+                    <a:p>
+                      <a:pPr algn="ctr">
+                        <a:defRPr sz="1200">
+                          <a:solidFill>
+                            <a:srgbClr val="6B6860"/>
+                          </a:solidFill>
+                          <a:latin typeface="Calibri"/>
+                        </a:defRPr>
+                      </a:pPr>
+                      <a:r>
+                        <a:t>75,000</a:t>
+                      </a:r>
+                    </a:p>
+                  </a:txBody>
+                  <a:tcPr>
+                    <a:solidFill>
+                      <a:srgbClr val="FFFFFF"/>
+                    </a:solidFill>
+                    <a:lnL w="6350">
+                      <a:solidFill>
+                        <a:srgbClr val="E4E0D8"/>
+                      </a:solidFill>
+                    </a:lnL>
+                    <a:lnR w="6350">
+                      <a:solidFill>
+                        <a:srgbClr val="E4E0D8"/>
+                      </a:solidFill>
+                    </a:lnR>
+                    <a:lnT w="6350">
+                      <a:solidFill>
+                        <a:srgbClr val="E4E0D8"/>
+                      </a:solidFill>
+                    </a:lnT>
+                    <a:lnB w="6350">
+                      <a:solidFill>
+                        <a:srgbClr val="E4E0D8"/>
+                      </a:solidFill>
+                    </a:lnB>
+                  </a:tcPr>
+                </a:tc>
+                <a:tc>
+                  <a:txBody>
+                    <a:bodyPr/>
+                    <a:lstStyle/>
+                    <a:p>
+                      <a:pPr algn="ctr">
+                        <a:defRPr sz="1200">
+                          <a:solidFill>
+                            <a:srgbClr val="6B6860"/>
+                          </a:solidFill>
+                          <a:latin typeface="Calibri"/>
+                        </a:defRPr>
+                      </a:pPr>
+                      <a:r>
+                        <a:t>500,000</a:t>
+                      </a:r>
+                    </a:p>
+                  </a:txBody>
+                  <a:tcPr>
+                    <a:solidFill>
+                      <a:srgbClr val="FFFFFF"/>
+                    </a:solidFill>
+                    <a:lnL w="6350">
+                      <a:solidFill>
+                        <a:srgbClr val="E4E0D8"/>
+                      </a:solidFill>
+                    </a:lnL>
+                    <a:lnR w="6350">
+                      <a:solidFill>
+                        <a:srgbClr val="E4E0D8"/>
+                      </a:solidFill>
+                    </a:lnR>
+                    <a:lnT w="6350">
+                      <a:solidFill>
+                        <a:srgbClr val="E4E0D8"/>
+                      </a:solidFill>
+                    </a:lnT>
+                    <a:lnB w="6350">
+                      <a:solidFill>
+                        <a:srgbClr val="E4E0D8"/>
+                      </a:solidFill>
+                    </a:lnB>
+                  </a:tcPr>
+                </a:tc>
+              </a:tr>
+              <a:tr h="342900">
+                <a:tc>
+                  <a:txBody>
+                    <a:bodyPr/>
+                    <a:lstStyle/>
+                    <a:p>
+                      <a:pPr algn="l">
+                        <a:defRPr sz="1100" b="1">
+                          <a:solidFill>
+                            <a:srgbClr val="2C2A26"/>
+                          </a:solidFill>
+                          <a:latin typeface="Calibri"/>
+                        </a:defRPr>
+                      </a:pPr>
+                      <a:r>
+                        <a:t>Paid subscribers</a:t>
+                      </a:r>
+                    </a:p>
+                  </a:txBody>
+                  <a:tcPr>
+                    <a:solidFill>
+                      <a:srgbClr val="FAF8F4"/>
+                    </a:solidFill>
+                    <a:lnL w="6350">
+                      <a:solidFill>
+                        <a:srgbClr val="E4E0D8"/>
+                      </a:solidFill>
+                    </a:lnL>
+                    <a:lnR w="6350">
+                      <a:solidFill>
+                        <a:srgbClr val="E4E0D8"/>
+                      </a:solidFill>
+                    </a:lnR>
+                    <a:lnT w="6350">
+                      <a:solidFill>
+                        <a:srgbClr val="E4E0D8"/>
+                      </a:solidFill>
+                    </a:lnT>
+                    <a:lnB w="6350">
+                      <a:solidFill>
+                        <a:srgbClr val="E4E0D8"/>
+                      </a:solidFill>
+                    </a:lnB>
+                  </a:tcPr>
+                </a:tc>
+                <a:tc>
+                  <a:txBody>
+                    <a:bodyPr/>
+                    <a:lstStyle/>
+                    <a:p>
+                      <a:pPr algn="ctr">
+                        <a:defRPr sz="1200">
+                          <a:solidFill>
+                            <a:srgbClr val="6B6860"/>
+                          </a:solidFill>
+                          <a:latin typeface="Calibri"/>
+                        </a:defRPr>
+                      </a:pPr>
+                      <a:r>
+                        <a:t>500</a:t>
+                      </a:r>
+                    </a:p>
+                  </a:txBody>
+                  <a:tcPr>
+                    <a:solidFill>
+                      <a:srgbClr val="FAF8F4"/>
+                    </a:solidFill>
+                    <a:lnL w="6350">
+                      <a:solidFill>
+                        <a:srgbClr val="E4E0D8"/>
+                      </a:solidFill>
+                    </a:lnL>
+                    <a:lnR w="6350">
+                      <a:solidFill>
+                        <a:srgbClr val="E4E0D8"/>
+                      </a:solidFill>
+                    </a:lnR>
+                    <a:lnT w="6350">
+                      <a:solidFill>
+                        <a:srgbClr val="E4E0D8"/>
+                      </a:solidFill>
+                    </a:lnT>
+                    <a:lnB w="6350">
+                      <a:solidFill>
+                        <a:srgbClr val="E4E0D8"/>
+                      </a:solidFill>
+                    </a:lnB>
+                  </a:tcPr>
+                </a:tc>
+                <a:tc>
+                  <a:txBody>
+                    <a:bodyPr/>
+                    <a:lstStyle/>
+                    <a:p>
+                      <a:pPr algn="ctr">
+                        <a:defRPr sz="1200">
+                          <a:solidFill>
+                            <a:srgbClr val="6B6860"/>
+                          </a:solidFill>
+                          <a:latin typeface="Calibri"/>
+                        </a:defRPr>
+                      </a:pPr>
+                      <a:r>
+                        <a:t>8,000</a:t>
+                      </a:r>
+                    </a:p>
+                  </a:txBody>
+                  <a:tcPr>
+                    <a:solidFill>
+                      <a:srgbClr val="FAF8F4"/>
+                    </a:solidFill>
+                    <a:lnL w="6350">
+                      <a:solidFill>
+                        <a:srgbClr val="E4E0D8"/>
+                      </a:solidFill>
+                    </a:lnL>
+                    <a:lnR w="6350">
+                      <a:solidFill>
+                        <a:srgbClr val="E4E0D8"/>
+                      </a:solidFill>
+                    </a:lnR>
+                    <a:lnT w="6350">
+                      <a:solidFill>
+                        <a:srgbClr val="E4E0D8"/>
+                      </a:solidFill>
+                    </a:lnT>
+                    <a:lnB w="6350">
+                      <a:solidFill>
+                        <a:srgbClr val="E4E0D8"/>
+                      </a:solidFill>
+                    </a:lnB>
+                  </a:tcPr>
+                </a:tc>
+                <a:tc>
+                  <a:txBody>
+                    <a:bodyPr/>
+                    <a:lstStyle/>
+                    <a:p>
+                      <a:pPr algn="ctr">
+                        <a:defRPr sz="1200">
+                          <a:solidFill>
+                            <a:srgbClr val="6B6860"/>
+                          </a:solidFill>
+                          <a:latin typeface="Calibri"/>
+                        </a:defRPr>
+                      </a:pPr>
+                      <a:r>
+                        <a:t>50,000</a:t>
+                      </a:r>
+                    </a:p>
+                  </a:txBody>
+                  <a:tcPr>
+                    <a:solidFill>
+                      <a:srgbClr val="FAF8F4"/>
+                    </a:solidFill>
+                    <a:lnL w="6350">
+                      <a:solidFill>
+                        <a:srgbClr val="E4E0D8"/>
+                      </a:solidFill>
+                    </a:lnL>
+                    <a:lnR w="6350">
+                      <a:solidFill>
+                        <a:srgbClr val="E4E0D8"/>
+                      </a:solidFill>
+                    </a:lnR>
+                    <a:lnT w="6350">
+                      <a:solidFill>
+                        <a:srgbClr val="E4E0D8"/>
+                      </a:solidFill>
+                    </a:lnT>
+                    <a:lnB w="6350">
+                      <a:solidFill>
+                        <a:srgbClr val="E4E0D8"/>
+                      </a:solidFill>
+                    </a:lnB>
+                  </a:tcPr>
+                </a:tc>
+              </a:tr>
+              <a:tr h="342900">
+                <a:tc>
+                  <a:txBody>
+                    <a:bodyPr/>
+                    <a:lstStyle/>
+                    <a:p>
+                      <a:pPr algn="l">
+                        <a:defRPr sz="1100" b="1">
+                          <a:solidFill>
+                            <a:srgbClr val="2C2A26"/>
+                          </a:solidFill>
+                          <a:latin typeface="Calibri"/>
+                        </a:defRPr>
+                      </a:pPr>
+                      <a:r>
+                        <a:t>Avg rev / subscriber</a:t>
+                      </a:r>
+                    </a:p>
+                  </a:txBody>
+                  <a:tcPr>
+                    <a:solidFill>
+                      <a:srgbClr val="FFFFFF"/>
+                    </a:solidFill>
+                    <a:lnL w="6350">
+                      <a:solidFill>
+                        <a:srgbClr val="E4E0D8"/>
+                      </a:solidFill>
+                    </a:lnL>
+                    <a:lnR w="6350">
+                      <a:solidFill>
+                        <a:srgbClr val="E4E0D8"/>
+                      </a:solidFill>
+                    </a:lnR>
+                    <a:lnT w="6350">
+                      <a:solidFill>
+                        <a:srgbClr val="E4E0D8"/>
+                      </a:solidFill>
+                    </a:lnT>
+                    <a:lnB w="6350">
+                      <a:solidFill>
+                        <a:srgbClr val="E4E0D8"/>
+                      </a:solidFill>
+                    </a:lnB>
+                  </a:tcPr>
+                </a:tc>
+                <a:tc>
+                  <a:txBody>
+                    <a:bodyPr/>
+                    <a:lstStyle/>
+                    <a:p>
+                      <a:pPr algn="ctr">
+                        <a:defRPr sz="1200">
+                          <a:solidFill>
+                            <a:srgbClr val="6B6860"/>
+                          </a:solidFill>
+                          <a:latin typeface="Calibri"/>
+                        </a:defRPr>
+                      </a:pPr>
+                      <a:r>
+                        <a:t>~$5/mo</a:t>
+                      </a:r>
+                    </a:p>
+                  </a:txBody>
+                  <a:tcPr>
+                    <a:solidFill>
+                      <a:srgbClr val="FFFFFF"/>
+                    </a:solidFill>
+                    <a:lnL w="6350">
+                      <a:solidFill>
+                        <a:srgbClr val="E4E0D8"/>
+                      </a:solidFill>
+                    </a:lnL>
+                    <a:lnR w="6350">
+                      <a:solidFill>
+                        <a:srgbClr val="E4E0D8"/>
+                      </a:solidFill>
+                    </a:lnR>
+                    <a:lnT w="6350">
+                      <a:solidFill>
+                        <a:srgbClr val="E4E0D8"/>
+                      </a:solidFill>
+                    </a:lnT>
+                    <a:lnB w="6350">
+                      <a:solidFill>
+                        <a:srgbClr val="E4E0D8"/>
+                      </a:solidFill>
+                    </a:lnB>
+                  </a:tcPr>
+                </a:tc>
+                <a:tc>
+                  <a:txBody>
+                    <a:bodyPr/>
+                    <a:lstStyle/>
+                    <a:p>
+                      <a:pPr algn="ctr">
+                        <a:defRPr sz="1200">
+                          <a:solidFill>
+                            <a:srgbClr val="6B6860"/>
+                          </a:solidFill>
+                          <a:latin typeface="Calibri"/>
+                        </a:defRPr>
+                      </a:pPr>
+                      <a:r>
+                        <a:t>~$5/mo</a:t>
+                      </a:r>
+                    </a:p>
+                  </a:txBody>
+                  <a:tcPr>
+                    <a:solidFill>
+                      <a:srgbClr val="FFFFFF"/>
+                    </a:solidFill>
+                    <a:lnL w="6350">
+                      <a:solidFill>
+                        <a:srgbClr val="E4E0D8"/>
+                      </a:solidFill>
+                    </a:lnL>
+                    <a:lnR w="6350">
+                      <a:solidFill>
+                        <a:srgbClr val="E4E0D8"/>
+                      </a:solidFill>
+                    </a:lnR>
+                    <a:lnT w="6350">
+                      <a:solidFill>
+                        <a:srgbClr val="E4E0D8"/>
+                      </a:solidFill>
+                    </a:lnT>
+                    <a:lnB w="6350">
+                      <a:solidFill>
+                        <a:srgbClr val="E4E0D8"/>
+                      </a:solidFill>
+                    </a:lnB>
+                  </a:tcPr>
+                </a:tc>
+                <a:tc>
+                  <a:txBody>
+                    <a:bodyPr/>
+                    <a:lstStyle/>
+                    <a:p>
+                      <a:pPr algn="ctr">
+                        <a:defRPr sz="1200">
+                          <a:solidFill>
+                            <a:srgbClr val="6B6860"/>
+                          </a:solidFill>
+                          <a:latin typeface="Calibri"/>
+                        </a:defRPr>
+                      </a:pPr>
+                      <a:r>
+                        <a:t>~$5/mo</a:t>
+                      </a:r>
+                    </a:p>
+                  </a:txBody>
+                  <a:tcPr>
+                    <a:solidFill>
+                      <a:srgbClr val="FFFFFF"/>
+                    </a:solidFill>
+                    <a:lnL w="6350">
+                      <a:solidFill>
+                        <a:srgbClr val="E4E0D8"/>
+                      </a:solidFill>
+                    </a:lnL>
+                    <a:lnR w="6350">
+                      <a:solidFill>
+                        <a:srgbClr val="E4E0D8"/>
+                      </a:solidFill>
+                    </a:lnR>
+                    <a:lnT w="6350">
+                      <a:solidFill>
+                        <a:srgbClr val="E4E0D8"/>
+                      </a:solidFill>
+                    </a:lnT>
+                    <a:lnB w="6350">
+                      <a:solidFill>
+                        <a:srgbClr val="E4E0D8"/>
+                      </a:solidFill>
+                    </a:lnB>
+                  </a:tcPr>
+                </a:tc>
+              </a:tr>
+              <a:tr h="342900">
+                <a:tc>
+                  <a:txBody>
+                    <a:bodyPr/>
+                    <a:lstStyle/>
+                    <a:p>
+                      <a:pPr algn="l">
+                        <a:defRPr sz="1100" b="1">
+                          <a:solidFill>
+                            <a:srgbClr val="2C2A26"/>
+                          </a:solidFill>
+                          <a:latin typeface="Calibri"/>
+                        </a:defRPr>
+                      </a:pPr>
+                      <a:r>
+                        <a:t>ARR</a:t>
+                      </a:r>
+                    </a:p>
+                  </a:txBody>
+                  <a:tcPr>
+                    <a:solidFill>
+                      <a:srgbClr val="F0F8F2"/>
+                    </a:solidFill>
+                    <a:lnL w="6350">
+                      <a:solidFill>
+                        <a:srgbClr val="E4E0D8"/>
+                      </a:solidFill>
+                    </a:lnL>
+                    <a:lnR w="6350">
+                      <a:solidFill>
+                        <a:srgbClr val="E4E0D8"/>
+                      </a:solidFill>
+                    </a:lnR>
+                    <a:lnT w="6350">
+                      <a:solidFill>
+                        <a:srgbClr val="E4E0D8"/>
+                      </a:solidFill>
+                    </a:lnT>
+                    <a:lnB w="6350">
+                      <a:solidFill>
+                        <a:srgbClr val="E4E0D8"/>
+                      </a:solidFill>
+                    </a:lnB>
+                  </a:tcPr>
+                </a:tc>
+                <a:tc>
+                  <a:txBody>
+                    <a:bodyPr/>
+                    <a:lstStyle/>
+                    <a:p>
+                      <a:pPr algn="ctr">
+                        <a:defRPr sz="1200" b="1">
+                          <a:solidFill>
+                            <a:srgbClr val="4A7C59"/>
+                          </a:solidFill>
+                          <a:latin typeface="Calibri"/>
+                        </a:defRPr>
+                      </a:pPr>
+                      <a:r>
+                        <a:t>~$30K</a:t>
+                      </a:r>
+                    </a:p>
+                  </a:txBody>
+                  <a:tcPr>
+                    <a:solidFill>
+                      <a:srgbClr val="F0F8F2"/>
+                    </a:solidFill>
+                    <a:lnL w="6350">
+                      <a:solidFill>
+                        <a:srgbClr val="E4E0D8"/>
+                      </a:solidFill>
+                    </a:lnL>
+                    <a:lnR w="6350">
+                      <a:solidFill>
+                        <a:srgbClr val="E4E0D8"/>
+                      </a:solidFill>
+                    </a:lnR>
+                    <a:lnT w="6350">
+                      <a:solidFill>
+                        <a:srgbClr val="E4E0D8"/>
+                      </a:solidFill>
+                    </a:lnT>
+                    <a:lnB w="6350">
+                      <a:solidFill>
+                        <a:srgbClr val="E4E0D8"/>
+                      </a:solidFill>
+                    </a:lnB>
+                  </a:tcPr>
+                </a:tc>
+                <a:tc>
+                  <a:txBody>
+                    <a:bodyPr/>
+                    <a:lstStyle/>
+                    <a:p>
+                      <a:pPr algn="ctr">
+                        <a:defRPr sz="1200" b="1">
+                          <a:solidFill>
+                            <a:srgbClr val="4A7C59"/>
+                          </a:solidFill>
+                          <a:latin typeface="Calibri"/>
+                        </a:defRPr>
+                      </a:pPr>
+                      <a:r>
+                        <a:t>~$480K</a:t>
+                      </a:r>
+                    </a:p>
+                  </a:txBody>
+                  <a:tcPr>
+                    <a:solidFill>
+                      <a:srgbClr val="F0F8F2"/>
+                    </a:solidFill>
+                    <a:lnL w="6350">
+                      <a:solidFill>
+                        <a:srgbClr val="E4E0D8"/>
+                      </a:solidFill>
+                    </a:lnL>
+                    <a:lnR w="6350">
+                      <a:solidFill>
+                        <a:srgbClr val="E4E0D8"/>
+                      </a:solidFill>
+                    </a:lnR>
+                    <a:lnT w="6350">
+                      <a:solidFill>
+                        <a:srgbClr val="E4E0D8"/>
+                      </a:solidFill>
+                    </a:lnT>
+                    <a:lnB w="6350">
+                      <a:solidFill>
+                        <a:srgbClr val="E4E0D8"/>
+                      </a:solidFill>
+                    </a:lnB>
+                  </a:tcPr>
+                </a:tc>
+                <a:tc>
+                  <a:txBody>
+                    <a:bodyPr/>
+                    <a:lstStyle/>
+                    <a:p>
+                      <a:pPr algn="ctr">
+                        <a:defRPr sz="1200" b="1">
+                          <a:solidFill>
+                            <a:srgbClr val="4A7C59"/>
+                          </a:solidFill>
+                          <a:latin typeface="Calibri"/>
+                        </a:defRPr>
+                      </a:pPr>
+                      <a:r>
+                        <a:t>~$3M</a:t>
+                      </a:r>
+                    </a:p>
+                  </a:txBody>
+                  <a:tcPr>
+                    <a:solidFill>
+                      <a:srgbClr val="F0F8F2"/>
+                    </a:solidFill>
+                    <a:lnL w="6350">
+                      <a:solidFill>
+                        <a:srgbClr val="E4E0D8"/>
+                      </a:solidFill>
+                    </a:lnL>
+                    <a:lnR w="6350">
+                      <a:solidFill>
+                        <a:srgbClr val="E4E0D8"/>
+                      </a:solidFill>
+                    </a:lnR>
+                    <a:lnT w="6350">
+                      <a:solidFill>
+                        <a:srgbClr val="E4E0D8"/>
+                      </a:solidFill>
+                    </a:lnT>
+                    <a:lnB w="6350">
+                      <a:solidFill>
+                        <a:srgbClr val="E4E0D8"/>
+                      </a:solidFill>
+                    </a:lnB>
+                  </a:tcPr>
+                </a:tc>
+              </a:tr>
+              <a:tr h="342900">
+                <a:tc>
+                  <a:txBody>
+                    <a:bodyPr/>
+                    <a:lstStyle/>
+                    <a:p>
+                      <a:pPr algn="l">
+                        <a:defRPr sz="1100" b="1">
+                          <a:solidFill>
+                            <a:srgbClr val="2C2A26"/>
+                          </a:solidFill>
+                          <a:latin typeface="Calibri"/>
+                        </a:defRPr>
+                      </a:pPr>
+                      <a:r>
+                        <a:t>Team costs</a:t>
+                      </a:r>
+                    </a:p>
+                  </a:txBody>
+                  <a:tcPr>
+                    <a:solidFill>
+                      <a:srgbClr val="FFFFFF"/>
+                    </a:solidFill>
+                    <a:lnL w="6350">
+                      <a:solidFill>
+                        <a:srgbClr val="E4E0D8"/>
+                      </a:solidFill>
+                    </a:lnL>
+                    <a:lnR w="6350">
+                      <a:solidFill>
+                        <a:srgbClr val="E4E0D8"/>
+                      </a:solidFill>
+                    </a:lnR>
+                    <a:lnT w="6350">
+                      <a:solidFill>
+                        <a:srgbClr val="E4E0D8"/>
+                      </a:solidFill>
+                    </a:lnT>
+                    <a:lnB w="6350">
+                      <a:solidFill>
+                        <a:srgbClr val="E4E0D8"/>
+                      </a:solidFill>
+                    </a:lnB>
+                  </a:tcPr>
+                </a:tc>
+                <a:tc>
+                  <a:txBody>
+                    <a:bodyPr/>
+                    <a:lstStyle/>
+                    <a:p>
+                      <a:pPr algn="ctr">
+                        <a:defRPr sz="1200">
+                          <a:solidFill>
+                            <a:srgbClr val="6B6860"/>
+                          </a:solidFill>
+                          <a:latin typeface="Calibri"/>
+                        </a:defRPr>
+                      </a:pPr>
+                      <a:r>
+                        <a:t>~$150K</a:t>
+                      </a:r>
+                    </a:p>
+                  </a:txBody>
+                  <a:tcPr>
+                    <a:solidFill>
+                      <a:srgbClr val="FFFFFF"/>
+                    </a:solidFill>
+                    <a:lnL w="6350">
+                      <a:solidFill>
+                        <a:srgbClr val="E4E0D8"/>
+                      </a:solidFill>
+                    </a:lnL>
+                    <a:lnR w="6350">
+                      <a:solidFill>
+                        <a:srgbClr val="E4E0D8"/>
+                      </a:solidFill>
+                    </a:lnR>
+                    <a:lnT w="6350">
+                      <a:solidFill>
+                        <a:srgbClr val="E4E0D8"/>
+                      </a:solidFill>
+                    </a:lnT>
+                    <a:lnB w="6350">
+                      <a:solidFill>
+                        <a:srgbClr val="E4E0D8"/>
+                      </a:solidFill>
+                    </a:lnB>
+                  </a:tcPr>
+                </a:tc>
+                <a:tc>
+                  <a:txBody>
+                    <a:bodyPr/>
+                    <a:lstStyle/>
+                    <a:p>
+                      <a:pPr algn="ctr">
+                        <a:defRPr sz="1200">
+                          <a:solidFill>
+                            <a:srgbClr val="6B6860"/>
+                          </a:solidFill>
+                          <a:latin typeface="Calibri"/>
+                        </a:defRPr>
+                      </a:pPr>
+                      <a:r>
+                        <a:t>~$400K</a:t>
+                      </a:r>
+                    </a:p>
+                  </a:txBody>
+                  <a:tcPr>
+                    <a:solidFill>
+                      <a:srgbClr val="FFFFFF"/>
+                    </a:solidFill>
+                    <a:lnL w="6350">
+                      <a:solidFill>
+                        <a:srgbClr val="E4E0D8"/>
+                      </a:solidFill>
+                    </a:lnL>
+                    <a:lnR w="6350">
+                      <a:solidFill>
+                        <a:srgbClr val="E4E0D8"/>
+                      </a:solidFill>
+                    </a:lnR>
+                    <a:lnT w="6350">
+                      <a:solidFill>
+                        <a:srgbClr val="E4E0D8"/>
+                      </a:solidFill>
+                    </a:lnT>
+                    <a:lnB w="6350">
+                      <a:solidFill>
+                        <a:srgbClr val="E4E0D8"/>
+                      </a:solidFill>
+                    </a:lnB>
+                  </a:tcPr>
+                </a:tc>
+                <a:tc>
+                  <a:txBody>
+                    <a:bodyPr/>
+                    <a:lstStyle/>
+                    <a:p>
+                      <a:pPr algn="ctr">
+                        <a:defRPr sz="1200">
+                          <a:solidFill>
+                            <a:srgbClr val="6B6860"/>
+                          </a:solidFill>
+                          <a:latin typeface="Calibri"/>
+                        </a:defRPr>
+                      </a:pPr>
+                      <a:r>
+                        <a:t>~$800K</a:t>
+                      </a:r>
+                    </a:p>
+                  </a:txBody>
+                  <a:tcPr>
+                    <a:solidFill>
+                      <a:srgbClr val="FFFFFF"/>
+                    </a:solidFill>
+                    <a:lnL w="6350">
+                      <a:solidFill>
+                        <a:srgbClr val="E4E0D8"/>
+                      </a:solidFill>
+                    </a:lnL>
+                    <a:lnR w="6350">
+                      <a:solidFill>
+                        <a:srgbClr val="E4E0D8"/>
+                      </a:solidFill>
+                    </a:lnR>
+                    <a:lnT w="6350">
+                      <a:solidFill>
+                        <a:srgbClr val="E4E0D8"/>
+                      </a:solidFill>
+                    </a:lnT>
+                    <a:lnB w="6350">
+                      <a:solidFill>
+                        <a:srgbClr val="E4E0D8"/>
+                      </a:solidFill>
+                    </a:lnB>
+                  </a:tcPr>
+                </a:tc>
+              </a:tr>
+              <a:tr h="342900">
+                <a:tc>
+                  <a:txBody>
+                    <a:bodyPr/>
+                    <a:lstStyle/>
+                    <a:p>
+                      <a:pPr algn="l">
+                        <a:defRPr sz="1100" b="1">
+                          <a:solidFill>
+                            <a:srgbClr val="2C2A26"/>
+                          </a:solidFill>
+                          <a:latin typeface="Calibri"/>
+                        </a:defRPr>
+                      </a:pPr>
+                      <a:r>
+                        <a:t>Infra + COGS</a:t>
+                      </a:r>
+                    </a:p>
+                  </a:txBody>
+                  <a:tcPr>
+                    <a:solidFill>
+                      <a:srgbClr val="FAF8F4"/>
+                    </a:solidFill>
+                    <a:lnL w="6350">
+                      <a:solidFill>
+                        <a:srgbClr val="E4E0D8"/>
+                      </a:solidFill>
+                    </a:lnL>
+                    <a:lnR w="6350">
+                      <a:solidFill>
+                        <a:srgbClr val="E4E0D8"/>
+                      </a:solidFill>
+                    </a:lnR>
+                    <a:lnT w="6350">
+                      <a:solidFill>
+                        <a:srgbClr val="E4E0D8"/>
+                      </a:solidFill>
+                    </a:lnT>
+                    <a:lnB w="6350">
+                      <a:solidFill>
+                        <a:srgbClr val="E4E0D8"/>
+                      </a:solidFill>
+                    </a:lnB>
+                  </a:tcPr>
+                </a:tc>
+                <a:tc>
+                  <a:txBody>
+                    <a:bodyPr/>
+                    <a:lstStyle/>
+                    <a:p>
+                      <a:pPr algn="ctr">
+                        <a:defRPr sz="1200">
+                          <a:solidFill>
+                            <a:srgbClr val="6B6860"/>
+                          </a:solidFill>
+                          <a:latin typeface="Calibri"/>
+                        </a:defRPr>
+                      </a:pPr>
+                      <a:r>
+                        <a:t>~$10K</a:t>
+                      </a:r>
+                    </a:p>
+                  </a:txBody>
+                  <a:tcPr>
+                    <a:solidFill>
+                      <a:srgbClr val="FAF8F4"/>
+                    </a:solidFill>
+                    <a:lnL w="6350">
+                      <a:solidFill>
+                        <a:srgbClr val="E4E0D8"/>
+                      </a:solidFill>
+                    </a:lnL>
+                    <a:lnR w="6350">
+                      <a:solidFill>
+                        <a:srgbClr val="E4E0D8"/>
+                      </a:solidFill>
+                    </a:lnR>
+                    <a:lnT w="6350">
+                      <a:solidFill>
+                        <a:srgbClr val="E4E0D8"/>
+                      </a:solidFill>
+                    </a:lnT>
+                    <a:lnB w="6350">
+                      <a:solidFill>
+                        <a:srgbClr val="E4E0D8"/>
+                      </a:solidFill>
+                    </a:lnB>
+                  </a:tcPr>
+                </a:tc>
+                <a:tc>
+                  <a:txBody>
+                    <a:bodyPr/>
+                    <a:lstStyle/>
+                    <a:p>
+                      <a:pPr algn="ctr">
+                        <a:defRPr sz="1200">
+                          <a:solidFill>
+                            <a:srgbClr val="6B6860"/>
+                          </a:solidFill>
+                          <a:latin typeface="Calibri"/>
+                        </a:defRPr>
+                      </a:pPr>
+                      <a:r>
+                        <a:t>~$100K</a:t>
+                      </a:r>
+                    </a:p>
+                  </a:txBody>
+                  <a:tcPr>
+                    <a:solidFill>
+                      <a:srgbClr val="FAF8F4"/>
+                    </a:solidFill>
+                    <a:lnL w="6350">
+                      <a:solidFill>
+                        <a:srgbClr val="E4E0D8"/>
+                      </a:solidFill>
+                    </a:lnL>
+                    <a:lnR w="6350">
+                      <a:solidFill>
+                        <a:srgbClr val="E4E0D8"/>
+                      </a:solidFill>
+                    </a:lnR>
+                    <a:lnT w="6350">
+                      <a:solidFill>
+                        <a:srgbClr val="E4E0D8"/>
+                      </a:solidFill>
+                    </a:lnT>
+                    <a:lnB w="6350">
+                      <a:solidFill>
+                        <a:srgbClr val="E4E0D8"/>
+                      </a:solidFill>
+                    </a:lnB>
+                  </a:tcPr>
+                </a:tc>
+                <a:tc>
+                  <a:txBody>
+                    <a:bodyPr/>
+                    <a:lstStyle/>
+                    <a:p>
+                      <a:pPr algn="ctr">
+                        <a:defRPr sz="1200">
+                          <a:solidFill>
+                            <a:srgbClr val="6B6860"/>
+                          </a:solidFill>
+                          <a:latin typeface="Calibri"/>
+                        </a:defRPr>
+                      </a:pPr>
+                      <a:r>
+                        <a:t>~$400K</a:t>
+                      </a:r>
+                    </a:p>
+                  </a:txBody>
+                  <a:tcPr>
+                    <a:solidFill>
+                      <a:srgbClr val="FAF8F4"/>
+                    </a:solidFill>
+                    <a:lnL w="6350">
+                      <a:solidFill>
+                        <a:srgbClr val="E4E0D8"/>
+                      </a:solidFill>
+                    </a:lnL>
+                    <a:lnR w="6350">
+                      <a:solidFill>
+                        <a:srgbClr val="E4E0D8"/>
+                      </a:solidFill>
+                    </a:lnR>
+                    <a:lnT w="6350">
+                      <a:solidFill>
+                        <a:srgbClr val="E4E0D8"/>
+                      </a:solidFill>
+                    </a:lnT>
+                    <a:lnB w="6350">
+                      <a:solidFill>
+                        <a:srgbClr val="E4E0D8"/>
+                      </a:solidFill>
+                    </a:lnB>
+                  </a:tcPr>
+                </a:tc>
+              </a:tr>
+              <a:tr h="342900">
+                <a:tc>
+                  <a:txBody>
+                    <a:bodyPr/>
+                    <a:lstStyle/>
+                    <a:p>
+                      <a:pPr algn="l">
+                        <a:defRPr sz="1100" b="1">
+                          <a:solidFill>
+                            <a:srgbClr val="2C2A26"/>
+                          </a:solidFill>
+                          <a:latin typeface="Calibri"/>
+                        </a:defRPr>
+                      </a:pPr>
+                      <a:r>
+                        <a:t>Total opex</a:t>
+                      </a:r>
+                    </a:p>
+                  </a:txBody>
+                  <a:tcPr>
+                    <a:solidFill>
+                      <a:srgbClr val="FFFFFF"/>
+                    </a:solidFill>
+                    <a:lnL w="6350">
+                      <a:solidFill>
+                        <a:srgbClr val="E4E0D8"/>
+                      </a:solidFill>
+                    </a:lnL>
+                    <a:lnR w="6350">
+                      <a:solidFill>
+                        <a:srgbClr val="E4E0D8"/>
+                      </a:solidFill>
+                    </a:lnR>
+                    <a:lnT w="6350">
+                      <a:solidFill>
+                        <a:srgbClr val="E4E0D8"/>
+                      </a:solidFill>
+                    </a:lnT>
+                    <a:lnB w="6350">
+                      <a:solidFill>
+                        <a:srgbClr val="E4E0D8"/>
+                      </a:solidFill>
+                    </a:lnB>
+                  </a:tcPr>
+                </a:tc>
+                <a:tc>
+                  <a:txBody>
+                    <a:bodyPr/>
+                    <a:lstStyle/>
+                    <a:p>
+                      <a:pPr algn="ctr">
+                        <a:defRPr sz="1200">
+                          <a:solidFill>
+                            <a:srgbClr val="6B6860"/>
+                          </a:solidFill>
+                          <a:latin typeface="Calibri"/>
+                        </a:defRPr>
+                      </a:pPr>
+                      <a:r>
+                        <a:t>~$160K</a:t>
+                      </a:r>
+                    </a:p>
+                  </a:txBody>
+                  <a:tcPr>
+                    <a:solidFill>
+                      <a:srgbClr val="FFFFFF"/>
+                    </a:solidFill>
+                    <a:lnL w="6350">
+                      <a:solidFill>
+                        <a:srgbClr val="E4E0D8"/>
+                      </a:solidFill>
+                    </a:lnL>
+                    <a:lnR w="6350">
+                      <a:solidFill>
+                        <a:srgbClr val="E4E0D8"/>
+                      </a:solidFill>
+                    </a:lnR>
+                    <a:lnT w="6350">
+                      <a:solidFill>
+                        <a:srgbClr val="E4E0D8"/>
+                      </a:solidFill>
+                    </a:lnT>
+                    <a:lnB w="6350">
+                      <a:solidFill>
+                        <a:srgbClr val="E4E0D8"/>
+                      </a:solidFill>
+                    </a:lnB>
+                  </a:tcPr>
+                </a:tc>
+                <a:tc>
+                  <a:txBody>
+                    <a:bodyPr/>
+                    <a:lstStyle/>
+                    <a:p>
+                      <a:pPr algn="ctr">
+                        <a:defRPr sz="1200">
+                          <a:solidFill>
+                            <a:srgbClr val="6B6860"/>
+                          </a:solidFill>
+                          <a:latin typeface="Calibri"/>
+                        </a:defRPr>
+                      </a:pPr>
+                      <a:r>
+                        <a:t>~$500K</a:t>
+                      </a:r>
+                    </a:p>
+                  </a:txBody>
+                  <a:tcPr>
+                    <a:solidFill>
+                      <a:srgbClr val="FFFFFF"/>
+                    </a:solidFill>
+                    <a:lnL w="6350">
+                      <a:solidFill>
+                        <a:srgbClr val="E4E0D8"/>
+                      </a:solidFill>
+                    </a:lnL>
+                    <a:lnR w="6350">
+                      <a:solidFill>
+                        <a:srgbClr val="E4E0D8"/>
+                      </a:solidFill>
+                    </a:lnR>
+                    <a:lnT w="6350">
+                      <a:solidFill>
+                        <a:srgbClr val="E4E0D8"/>
+                      </a:solidFill>
+                    </a:lnT>
+                    <a:lnB w="6350">
+                      <a:solidFill>
+                        <a:srgbClr val="E4E0D8"/>
+                      </a:solidFill>
+                    </a:lnB>
+                  </a:tcPr>
+                </a:tc>
+                <a:tc>
+                  <a:txBody>
+                    <a:bodyPr/>
+                    <a:lstStyle/>
+                    <a:p>
+                      <a:pPr algn="ctr">
+                        <a:defRPr sz="1200">
+                          <a:solidFill>
+                            <a:srgbClr val="6B6860"/>
+                          </a:solidFill>
+                          <a:latin typeface="Calibri"/>
+                        </a:defRPr>
+                      </a:pPr>
+                      <a:r>
+                        <a:t>~$1.2M</a:t>
+                      </a:r>
+                    </a:p>
+                  </a:txBody>
+                  <a:tcPr>
+                    <a:solidFill>
+                      <a:srgbClr val="FFFFFF"/>
+                    </a:solidFill>
+                    <a:lnL w="6350">
+                      <a:solidFill>
+                        <a:srgbClr val="E4E0D8"/>
+                      </a:solidFill>
+                    </a:lnL>
+                    <a:lnR w="6350">
+                      <a:solidFill>
+                        <a:srgbClr val="E4E0D8"/>
+                      </a:solidFill>
+                    </a:lnR>
+                    <a:lnT w="6350">
+                      <a:solidFill>
+                        <a:srgbClr val="E4E0D8"/>
+                      </a:solidFill>
+                    </a:lnT>
+                    <a:lnB w="6350">
+                      <a:solidFill>
+                        <a:srgbClr val="E4E0D8"/>
+                      </a:solidFill>
+                    </a:lnB>
+                  </a:tcPr>
+                </a:tc>
+              </a:tr>
+            </a:tbl>
+          </a:graphicData>
+        </a:graphic>
+      </p:graphicFrame>
+      <p:sp>
+        <p:nvSpPr>
+          <p:cNvPr id="7" name="TextBox 6"/>
+          <p:cNvSpPr txBox="1"/>
+          <p:nvPr/>
+        </p:nvSpPr>
+        <p:spPr>
+          <a:xfrm>
+            <a:off x="1371600" y="5943600"/>
+            <a:ext cx="8229600" cy="365760"/>
+          </a:xfrm>
+          <a:prstGeom prst="rect">
+            <a:avLst/>
+          </a:prstGeom>
+          <a:noFill/>
+        </p:spPr>
+        <p:txBody>
+          <a:bodyPr wrap="square">
+            <a:spAutoFit/>
+          </a:bodyPr>
+          <a:lstStyle/>
+          <a:p>
+            <a:pPr algn="l">
+              <a:lnSpc>
+                <a:spcPct val="120000"/>
+              </a:lnSpc>
+              <a:spcBef>
+                <a:spcPts val="0"/>
+              </a:spcBef>
+              <a:spcAft>
+                <a:spcPts val="0"/>
+              </a:spcAft>
+              <a:defRPr sz="1300" b="0">
+                <a:solidFill>
+                  <a:srgbClr val="9A9690"/>
+                </a:solidFill>
+                <a:latin typeface="Calibri"/>
+              </a:defRPr>
+            </a:pPr>
+            <a:r>
+              <a:t>100M+ AI users are all potential customers. Conservative given the scale of the opportunity.</a:t>
+            </a:r>
+          </a:p>
+        </p:txBody>
+      </p:sp>
     </p:spTree>
   </p:cSld>
   <p:clrMapOvr>
@@ -3383,6 +8141,14 @@
 <file path=ppt/slides/slide8.xml><?xml version="1.0" encoding="utf-8"?>
 <p:sld xmlns:a="http://schemas.openxmlformats.org/drawingml/2006/main" xmlns:p="http://schemas.openxmlformats.org/presentationml/2006/main" xmlns:r="http://schemas.openxmlformats.org/officeDocument/2006/relationships">
   <p:cSld>
+    <p:bg>
+      <p:bgPr>
+        <a:solidFill>
+          <a:srgbClr val="FAF8F4"/>
+        </a:solidFill>
+        <a:effectLst/>
+      </p:bgPr>
+    </p:bg>
     <p:spTree>
       <p:nvGrpSpPr>
         <p:cNvPr id="1" name=""/>
@@ -3390,30 +8156,1124 @@
         <p:nvPr/>
       </p:nvGrpSpPr>
       <p:grpSpPr/>
-      <p:pic>
-        <p:nvPicPr>
-          <p:cNvPr id="2" name="Picture 1" descr="slide_08.png"/>
-          <p:cNvPicPr>
-            <a:picLocks noChangeAspect="1"/>
-          </p:cNvPicPr>
-          <p:nvPr/>
-        </p:nvPicPr>
-        <p:blipFill>
-          <a:blip r:embed="rId2"/>
-          <a:stretch>
-            <a:fillRect/>
-          </a:stretch>
-        </p:blipFill>
+      <p:sp>
+        <p:nvSpPr>
+          <p:cNvPr id="2" name="Rectangle 1"/>
+          <p:cNvSpPr/>
+          <p:nvPr/>
+        </p:nvSpPr>
         <p:spPr>
           <a:xfrm>
             <a:off x="0" y="0"/>
-            <a:ext cx="12191695" cy="6858000"/>
-          </a:xfrm>
-          <a:prstGeom prst="rect">
-            <a:avLst/>
-          </a:prstGeom>
-        </p:spPr>
-      </p:pic>
+            <a:ext cx="12191695" cy="54864"/>
+          </a:xfrm>
+          <a:prstGeom prst="rect">
+            <a:avLst/>
+          </a:prstGeom>
+          <a:solidFill>
+            <a:srgbClr val="4A7C59"/>
+          </a:solidFill>
+          <a:ln>
+            <a:noFill/>
+          </a:ln>
+        </p:spPr>
+        <p:style>
+          <a:lnRef idx="1">
+            <a:schemeClr val="accent1"/>
+          </a:lnRef>
+          <a:fillRef idx="3">
+            <a:schemeClr val="accent1"/>
+          </a:fillRef>
+          <a:effectRef idx="2">
+            <a:schemeClr val="accent1"/>
+          </a:effectRef>
+          <a:fontRef idx="minor">
+            <a:schemeClr val="lt1"/>
+          </a:fontRef>
+        </p:style>
+        <p:txBody>
+          <a:bodyPr rtlCol="0" anchor="ctr"/>
+          <a:lstStyle/>
+          <a:p>
+            <a:pPr algn="ctr"/>
+          </a:p>
+        </p:txBody>
+      </p:sp>
+      <p:sp>
+        <p:nvSpPr>
+          <p:cNvPr id="3" name="TextBox 2"/>
+          <p:cNvSpPr txBox="1"/>
+          <p:nvPr/>
+        </p:nvSpPr>
+        <p:spPr>
+          <a:xfrm>
+            <a:off x="1097280" y="6400800"/>
+            <a:ext cx="3657600" cy="274320"/>
+          </a:xfrm>
+          <a:prstGeom prst="rect">
+            <a:avLst/>
+          </a:prstGeom>
+          <a:noFill/>
+        </p:spPr>
+        <p:txBody>
+          <a:bodyPr wrap="none">
+            <a:spAutoFit/>
+          </a:bodyPr>
+          <a:lstStyle/>
+          <a:p>
+            <a:pPr>
+              <a:defRPr sz="900">
+                <a:solidFill>
+                  <a:srgbClr val="9A9690"/>
+                </a:solidFill>
+                <a:latin typeface="Calibri"/>
+              </a:defRPr>
+            </a:pPr>
+            <a:r>
+              <a:t>parachute.computer</a:t>
+            </a:r>
+          </a:p>
+        </p:txBody>
+      </p:sp>
+      <p:sp>
+        <p:nvSpPr>
+          <p:cNvPr id="4" name="TextBox 3"/>
+          <p:cNvSpPr txBox="1"/>
+          <p:nvPr/>
+        </p:nvSpPr>
+        <p:spPr>
+          <a:xfrm>
+            <a:off x="1097280" y="1097280"/>
+            <a:ext cx="3657600" cy="365760"/>
+          </a:xfrm>
+          <a:prstGeom prst="rect">
+            <a:avLst/>
+          </a:prstGeom>
+          <a:noFill/>
+        </p:spPr>
+        <p:txBody>
+          <a:bodyPr wrap="square">
+            <a:spAutoFit/>
+          </a:bodyPr>
+          <a:lstStyle/>
+          <a:p>
+            <a:pPr algn="l">
+              <a:lnSpc>
+                <a:spcPct val="120000"/>
+              </a:lnSpc>
+              <a:spcBef>
+                <a:spcPts val="0"/>
+              </a:spcBef>
+              <a:spcAft>
+                <a:spcPts val="0"/>
+              </a:spcAft>
+              <a:defRPr sz="1100" b="1">
+                <a:solidFill>
+                  <a:srgbClr val="4A7C59"/>
+                </a:solidFill>
+                <a:latin typeface="Calibri"/>
+              </a:defRPr>
+            </a:pPr>
+            <a:r>
+              <a:t>TEAM &amp; TRACTION</a:t>
+            </a:r>
+          </a:p>
+        </p:txBody>
+      </p:sp>
+      <p:sp>
+        <p:nvSpPr>
+          <p:cNvPr id="5" name="TextBox 4"/>
+          <p:cNvSpPr txBox="1"/>
+          <p:nvPr/>
+        </p:nvSpPr>
+        <p:spPr>
+          <a:xfrm>
+            <a:off x="1097280" y="1554480"/>
+            <a:ext cx="9144000" cy="1371600"/>
+          </a:xfrm>
+          <a:prstGeom prst="rect">
+            <a:avLst/>
+          </a:prstGeom>
+          <a:noFill/>
+        </p:spPr>
+        <p:txBody>
+          <a:bodyPr wrap="square">
+            <a:spAutoFit/>
+          </a:bodyPr>
+          <a:lstStyle/>
+          <a:p>
+            <a:pPr algn="l">
+              <a:lnSpc>
+                <a:spcPct val="105000"/>
+              </a:lnSpc>
+              <a:spcBef>
+                <a:spcPts val="0"/>
+              </a:spcBef>
+              <a:spcAft>
+                <a:spcPts val="0"/>
+              </a:spcAft>
+              <a:defRPr sz="4000" b="0">
+                <a:solidFill>
+                  <a:srgbClr val="2C2A26"/>
+                </a:solidFill>
+                <a:latin typeface="Georgia"/>
+              </a:defRPr>
+            </a:pPr>
+            <a:r>
+              <a:t>Self-funded.</a:t>
+            </a:r>
+            <a:br/>
+            <a:r>
+              <a:t>Built from scratch.</a:t>
+            </a:r>
+          </a:p>
+        </p:txBody>
+      </p:sp>
+      <p:sp>
+        <p:nvSpPr>
+          <p:cNvPr id="6" name="TextBox 5"/>
+          <p:cNvSpPr txBox="1"/>
+          <p:nvPr/>
+        </p:nvSpPr>
+        <p:spPr>
+          <a:xfrm>
+            <a:off x="1188720" y="3310128"/>
+            <a:ext cx="274320" cy="274320"/>
+          </a:xfrm>
+          <a:prstGeom prst="rect">
+            <a:avLst/>
+          </a:prstGeom>
+          <a:noFill/>
+        </p:spPr>
+        <p:txBody>
+          <a:bodyPr wrap="square">
+            <a:spAutoFit/>
+          </a:bodyPr>
+          <a:lstStyle/>
+          <a:p>
+            <a:pPr algn="l">
+              <a:lnSpc>
+                <a:spcPct val="120000"/>
+              </a:lnSpc>
+              <a:spcBef>
+                <a:spcPts val="0"/>
+              </a:spcBef>
+              <a:spcAft>
+                <a:spcPts val="0"/>
+              </a:spcAft>
+              <a:defRPr sz="1200" b="0">
+                <a:solidFill>
+                  <a:srgbClr val="4A7C59"/>
+                </a:solidFill>
+                <a:latin typeface="Calibri"/>
+              </a:defRPr>
+            </a:pPr>
+            <a:r>
+              <a:t>•</a:t>
+            </a:r>
+          </a:p>
+        </p:txBody>
+      </p:sp>
+      <p:sp>
+        <p:nvSpPr>
+          <p:cNvPr id="7" name="TextBox 6"/>
+          <p:cNvSpPr txBox="1"/>
+          <p:nvPr/>
+        </p:nvSpPr>
+        <p:spPr>
+          <a:xfrm>
+            <a:off x="1554480" y="3291840"/>
+            <a:ext cx="4572000" cy="320040"/>
+          </a:xfrm>
+          <a:prstGeom prst="rect">
+            <a:avLst/>
+          </a:prstGeom>
+          <a:noFill/>
+        </p:spPr>
+        <p:txBody>
+          <a:bodyPr wrap="square">
+            <a:spAutoFit/>
+          </a:bodyPr>
+          <a:lstStyle/>
+          <a:p>
+            <a:pPr algn="l">
+              <a:lnSpc>
+                <a:spcPct val="120000"/>
+              </a:lnSpc>
+              <a:spcBef>
+                <a:spcPts val="0"/>
+              </a:spcBef>
+              <a:spcAft>
+                <a:spcPts val="0"/>
+              </a:spcAft>
+              <a:defRPr sz="1300" b="0">
+                <a:solidFill>
+                  <a:srgbClr val="6B6860"/>
+                </a:solidFill>
+                <a:latin typeface="Calibri"/>
+              </a:defRPr>
+            </a:pPr>
+            <a:r>
+              <a:t>Working app with local voice transcription + graph-native storage</a:t>
+            </a:r>
+          </a:p>
+        </p:txBody>
+      </p:sp>
+      <p:sp>
+        <p:nvSpPr>
+          <p:cNvPr id="8" name="TextBox 7"/>
+          <p:cNvSpPr txBox="1"/>
+          <p:nvPr/>
+        </p:nvSpPr>
+        <p:spPr>
+          <a:xfrm>
+            <a:off x="1188720" y="3694176"/>
+            <a:ext cx="274320" cy="274320"/>
+          </a:xfrm>
+          <a:prstGeom prst="rect">
+            <a:avLst/>
+          </a:prstGeom>
+          <a:noFill/>
+        </p:spPr>
+        <p:txBody>
+          <a:bodyPr wrap="square">
+            <a:spAutoFit/>
+          </a:bodyPr>
+          <a:lstStyle/>
+          <a:p>
+            <a:pPr algn="l">
+              <a:lnSpc>
+                <a:spcPct val="120000"/>
+              </a:lnSpc>
+              <a:spcBef>
+                <a:spcPts val="0"/>
+              </a:spcBef>
+              <a:spcAft>
+                <a:spcPts val="0"/>
+              </a:spcAft>
+              <a:defRPr sz="1200" b="0">
+                <a:solidFill>
+                  <a:srgbClr val="4A7C59"/>
+                </a:solidFill>
+                <a:latin typeface="Calibri"/>
+              </a:defRPr>
+            </a:pPr>
+            <a:r>
+              <a:t>•</a:t>
+            </a:r>
+          </a:p>
+        </p:txBody>
+      </p:sp>
+      <p:sp>
+        <p:nvSpPr>
+          <p:cNvPr id="9" name="TextBox 8"/>
+          <p:cNvSpPr txBox="1"/>
+          <p:nvPr/>
+        </p:nvSpPr>
+        <p:spPr>
+          <a:xfrm>
+            <a:off x="1554480" y="3675888"/>
+            <a:ext cx="4572000" cy="320040"/>
+          </a:xfrm>
+          <a:prstGeom prst="rect">
+            <a:avLst/>
+          </a:prstGeom>
+          <a:noFill/>
+        </p:spPr>
+        <p:txBody>
+          <a:bodyPr wrap="square">
+            <a:spAutoFit/>
+          </a:bodyPr>
+          <a:lstStyle/>
+          <a:p>
+            <a:pPr algn="l">
+              <a:lnSpc>
+                <a:spcPct val="120000"/>
+              </a:lnSpc>
+              <a:spcBef>
+                <a:spcPts val="0"/>
+              </a:spcBef>
+              <a:spcAft>
+                <a:spcPts val="0"/>
+              </a:spcAft>
+              <a:defRPr sz="1300" b="0">
+                <a:solidFill>
+                  <a:srgbClr val="6B6860"/>
+                </a:solidFill>
+                <a:latin typeface="Calibri"/>
+              </a:defRPr>
+            </a:pPr>
+            <a:r>
+              <a:t>MCP server with Things, Tags, Tools architecture</a:t>
+            </a:r>
+          </a:p>
+        </p:txBody>
+      </p:sp>
+      <p:sp>
+        <p:nvSpPr>
+          <p:cNvPr id="10" name="TextBox 9"/>
+          <p:cNvSpPr txBox="1"/>
+          <p:nvPr/>
+        </p:nvSpPr>
+        <p:spPr>
+          <a:xfrm>
+            <a:off x="1188720" y="4078224"/>
+            <a:ext cx="274320" cy="274320"/>
+          </a:xfrm>
+          <a:prstGeom prst="rect">
+            <a:avLst/>
+          </a:prstGeom>
+          <a:noFill/>
+        </p:spPr>
+        <p:txBody>
+          <a:bodyPr wrap="square">
+            <a:spAutoFit/>
+          </a:bodyPr>
+          <a:lstStyle/>
+          <a:p>
+            <a:pPr algn="l">
+              <a:lnSpc>
+                <a:spcPct val="120000"/>
+              </a:lnSpc>
+              <a:spcBef>
+                <a:spcPts val="0"/>
+              </a:spcBef>
+              <a:spcAft>
+                <a:spcPts val="0"/>
+              </a:spcAft>
+              <a:defRPr sz="1200" b="0">
+                <a:solidFill>
+                  <a:srgbClr val="4A7C59"/>
+                </a:solidFill>
+                <a:latin typeface="Calibri"/>
+              </a:defRPr>
+            </a:pPr>
+            <a:r>
+              <a:t>•</a:t>
+            </a:r>
+          </a:p>
+        </p:txBody>
+      </p:sp>
+      <p:sp>
+        <p:nvSpPr>
+          <p:cNvPr id="11" name="TextBox 10"/>
+          <p:cNvSpPr txBox="1"/>
+          <p:nvPr/>
+        </p:nvSpPr>
+        <p:spPr>
+          <a:xfrm>
+            <a:off x="1554480" y="4059936"/>
+            <a:ext cx="4572000" cy="320040"/>
+          </a:xfrm>
+          <a:prstGeom prst="rect">
+            <a:avLst/>
+          </a:prstGeom>
+          <a:noFill/>
+        </p:spPr>
+        <p:txBody>
+          <a:bodyPr wrap="square">
+            <a:spAutoFit/>
+          </a:bodyPr>
+          <a:lstStyle/>
+          <a:p>
+            <a:pPr algn="l">
+              <a:lnSpc>
+                <a:spcPct val="120000"/>
+              </a:lnSpc>
+              <a:spcBef>
+                <a:spcPts val="0"/>
+              </a:spcBef>
+              <a:spcAft>
+                <a:spcPts val="0"/>
+              </a:spcAft>
+              <a:defRPr sz="1300" b="0">
+                <a:solidFill>
+                  <a:srgbClr val="6B6860"/>
+                </a:solidFill>
+                <a:latin typeface="Calibri"/>
+              </a:defRPr>
+            </a:pPr>
+            <a:r>
+              <a:t>Functional pendant prototype (on stage today)</a:t>
+            </a:r>
+          </a:p>
+        </p:txBody>
+      </p:sp>
+      <p:sp>
+        <p:nvSpPr>
+          <p:cNvPr id="12" name="TextBox 11"/>
+          <p:cNvSpPr txBox="1"/>
+          <p:nvPr/>
+        </p:nvSpPr>
+        <p:spPr>
+          <a:xfrm>
+            <a:off x="1188720" y="4462272"/>
+            <a:ext cx="274320" cy="274320"/>
+          </a:xfrm>
+          <a:prstGeom prst="rect">
+            <a:avLst/>
+          </a:prstGeom>
+          <a:noFill/>
+        </p:spPr>
+        <p:txBody>
+          <a:bodyPr wrap="square">
+            <a:spAutoFit/>
+          </a:bodyPr>
+          <a:lstStyle/>
+          <a:p>
+            <a:pPr algn="l">
+              <a:lnSpc>
+                <a:spcPct val="120000"/>
+              </a:lnSpc>
+              <a:spcBef>
+                <a:spcPts val="0"/>
+              </a:spcBef>
+              <a:spcAft>
+                <a:spcPts val="0"/>
+              </a:spcAft>
+              <a:defRPr sz="1200" b="0">
+                <a:solidFill>
+                  <a:srgbClr val="4A7C59"/>
+                </a:solidFill>
+                <a:latin typeface="Calibri"/>
+              </a:defRPr>
+            </a:pPr>
+            <a:r>
+              <a:t>•</a:t>
+            </a:r>
+          </a:p>
+        </p:txBody>
+      </p:sp>
+      <p:sp>
+        <p:nvSpPr>
+          <p:cNvPr id="13" name="TextBox 12"/>
+          <p:cNvSpPr txBox="1"/>
+          <p:nvPr/>
+        </p:nvSpPr>
+        <p:spPr>
+          <a:xfrm>
+            <a:off x="1554480" y="4443984"/>
+            <a:ext cx="4572000" cy="320040"/>
+          </a:xfrm>
+          <a:prstGeom prst="rect">
+            <a:avLst/>
+          </a:prstGeom>
+          <a:noFill/>
+        </p:spPr>
+        <p:txBody>
+          <a:bodyPr wrap="square">
+            <a:spAutoFit/>
+          </a:bodyPr>
+          <a:lstStyle/>
+          <a:p>
+            <a:pPr algn="l">
+              <a:lnSpc>
+                <a:spcPct val="120000"/>
+              </a:lnSpc>
+              <a:spcBef>
+                <a:spcPts val="0"/>
+              </a:spcBef>
+              <a:spcAft>
+                <a:spcPts val="0"/>
+              </a:spcAft>
+              <a:defRPr sz="1300" b="0">
+                <a:solidFill>
+                  <a:srgbClr val="6B6860"/>
+                </a:solidFill>
+                <a:latin typeface="Calibri"/>
+              </a:defRPr>
+            </a:pPr>
+            <a:r>
+              <a:t>Daily beta launching this month · PBC incorporated in Colorado</a:t>
+            </a:r>
+          </a:p>
+        </p:txBody>
+      </p:sp>
+      <p:sp>
+        <p:nvSpPr>
+          <p:cNvPr id="14" name="Rounded Rectangle 13"/>
+          <p:cNvSpPr/>
+          <p:nvPr/>
+        </p:nvSpPr>
+        <p:spPr>
+          <a:xfrm>
+            <a:off x="6858000" y="3017520"/>
+            <a:ext cx="4572000" cy="2926080"/>
+          </a:xfrm>
+          <a:prstGeom prst="roundRect">
+            <a:avLst/>
+          </a:prstGeom>
+          <a:solidFill>
+            <a:srgbClr val="F3F0EA"/>
+          </a:solidFill>
+          <a:ln w="12700">
+            <a:solidFill>
+              <a:srgbClr val="E4E0D8"/>
+            </a:solidFill>
+          </a:ln>
+        </p:spPr>
+        <p:style>
+          <a:lnRef idx="1">
+            <a:schemeClr val="accent1"/>
+          </a:lnRef>
+          <a:fillRef idx="3">
+            <a:schemeClr val="accent1"/>
+          </a:fillRef>
+          <a:effectRef idx="2">
+            <a:schemeClr val="accent1"/>
+          </a:effectRef>
+          <a:fontRef idx="minor">
+            <a:schemeClr val="lt1"/>
+          </a:fontRef>
+        </p:style>
+        <p:txBody>
+          <a:bodyPr rtlCol="0" anchor="ctr"/>
+          <a:lstStyle/>
+          <a:p>
+            <a:pPr algn="ctr"/>
+          </a:p>
+        </p:txBody>
+      </p:sp>
+      <p:sp>
+        <p:nvSpPr>
+          <p:cNvPr id="15" name="TextBox 14"/>
+          <p:cNvSpPr txBox="1"/>
+          <p:nvPr/>
+        </p:nvSpPr>
+        <p:spPr>
+          <a:xfrm>
+            <a:off x="7223760" y="3200400"/>
+            <a:ext cx="3657600" cy="320040"/>
+          </a:xfrm>
+          <a:prstGeom prst="rect">
+            <a:avLst/>
+          </a:prstGeom>
+          <a:noFill/>
+        </p:spPr>
+        <p:txBody>
+          <a:bodyPr wrap="square">
+            <a:spAutoFit/>
+          </a:bodyPr>
+          <a:lstStyle/>
+          <a:p>
+            <a:pPr algn="l">
+              <a:lnSpc>
+                <a:spcPct val="120000"/>
+              </a:lnSpc>
+              <a:spcBef>
+                <a:spcPts val="0"/>
+              </a:spcBef>
+              <a:spcAft>
+                <a:spcPts val="0"/>
+              </a:spcAft>
+              <a:defRPr sz="1100" b="1">
+                <a:solidFill>
+                  <a:srgbClr val="4A7C59"/>
+                </a:solidFill>
+                <a:latin typeface="Calibri"/>
+              </a:defRPr>
+            </a:pPr>
+            <a:r>
+              <a:t>THE TEAM</a:t>
+            </a:r>
+          </a:p>
+        </p:txBody>
+      </p:sp>
+      <p:sp>
+        <p:nvSpPr>
+          <p:cNvPr id="16" name="TextBox 15"/>
+          <p:cNvSpPr txBox="1"/>
+          <p:nvPr/>
+        </p:nvSpPr>
+        <p:spPr>
+          <a:xfrm>
+            <a:off x="7223760" y="3657600"/>
+            <a:ext cx="4114800" cy="256032"/>
+          </a:xfrm>
+          <a:prstGeom prst="rect">
+            <a:avLst/>
+          </a:prstGeom>
+          <a:noFill/>
+        </p:spPr>
+        <p:txBody>
+          <a:bodyPr wrap="square">
+            <a:spAutoFit/>
+          </a:bodyPr>
+          <a:lstStyle/>
+          <a:p>
+            <a:pPr algn="l">
+              <a:lnSpc>
+                <a:spcPct val="120000"/>
+              </a:lnSpc>
+              <a:spcBef>
+                <a:spcPts val="0"/>
+              </a:spcBef>
+              <a:spcAft>
+                <a:spcPts val="0"/>
+              </a:spcAft>
+              <a:defRPr sz="1300" b="1">
+                <a:solidFill>
+                  <a:srgbClr val="2C2A26"/>
+                </a:solidFill>
+                <a:latin typeface="Calibri"/>
+              </a:defRPr>
+            </a:pPr>
+            <a:r>
+              <a:t>Aaron Gabriel Neyer</a:t>
+            </a:r>
+          </a:p>
+        </p:txBody>
+      </p:sp>
+      <p:sp>
+        <p:nvSpPr>
+          <p:cNvPr id="17" name="TextBox 16"/>
+          <p:cNvSpPr txBox="1"/>
+          <p:nvPr/>
+        </p:nvSpPr>
+        <p:spPr>
+          <a:xfrm>
+            <a:off x="7223760" y="3886200"/>
+            <a:ext cx="4114800" cy="256032"/>
+          </a:xfrm>
+          <a:prstGeom prst="rect">
+            <a:avLst/>
+          </a:prstGeom>
+          <a:noFill/>
+        </p:spPr>
+        <p:txBody>
+          <a:bodyPr wrap="square">
+            <a:spAutoFit/>
+          </a:bodyPr>
+          <a:lstStyle/>
+          <a:p>
+            <a:pPr algn="l">
+              <a:lnSpc>
+                <a:spcPct val="120000"/>
+              </a:lnSpc>
+              <a:spcBef>
+                <a:spcPts val="0"/>
+              </a:spcBef>
+              <a:spcAft>
+                <a:spcPts val="0"/>
+              </a:spcAft>
+              <a:defRPr sz="1100" b="0">
+                <a:solidFill>
+                  <a:srgbClr val="6B6860"/>
+                </a:solidFill>
+                <a:latin typeface="Calibri"/>
+              </a:defRPr>
+            </a:pPr>
+            <a:r>
+              <a:t>Founder · Product &amp; architecture</a:t>
+            </a:r>
+          </a:p>
+        </p:txBody>
+      </p:sp>
+      <p:sp>
+        <p:nvSpPr>
+          <p:cNvPr id="18" name="TextBox 17"/>
+          <p:cNvSpPr txBox="1"/>
+          <p:nvPr/>
+        </p:nvSpPr>
+        <p:spPr>
+          <a:xfrm>
+            <a:off x="7223760" y="4114800"/>
+            <a:ext cx="4114800" cy="256032"/>
+          </a:xfrm>
+          <a:prstGeom prst="rect">
+            <a:avLst/>
+          </a:prstGeom>
+          <a:noFill/>
+        </p:spPr>
+        <p:txBody>
+          <a:bodyPr wrap="square">
+            <a:spAutoFit/>
+          </a:bodyPr>
+          <a:lstStyle/>
+          <a:p>
+            <a:pPr algn="l">
+              <a:lnSpc>
+                <a:spcPct val="120000"/>
+              </a:lnSpc>
+              <a:spcBef>
+                <a:spcPts val="0"/>
+              </a:spcBef>
+              <a:spcAft>
+                <a:spcPts val="0"/>
+              </a:spcAft>
+              <a:defRPr sz="1300" b="1">
+                <a:solidFill>
+                  <a:srgbClr val="2C2A26"/>
+                </a:solidFill>
+                <a:latin typeface="Calibri"/>
+              </a:defRPr>
+            </a:pPr>
+            <a:r>
+              <a:t>Jon Bo</a:t>
+            </a:r>
+          </a:p>
+        </p:txBody>
+      </p:sp>
+      <p:sp>
+        <p:nvSpPr>
+          <p:cNvPr id="19" name="TextBox 18"/>
+          <p:cNvSpPr txBox="1"/>
+          <p:nvPr/>
+        </p:nvSpPr>
+        <p:spPr>
+          <a:xfrm>
+            <a:off x="7223760" y="4343400"/>
+            <a:ext cx="4114800" cy="256032"/>
+          </a:xfrm>
+          <a:prstGeom prst="rect">
+            <a:avLst/>
+          </a:prstGeom>
+          <a:noFill/>
+        </p:spPr>
+        <p:txBody>
+          <a:bodyPr wrap="square">
+            <a:spAutoFit/>
+          </a:bodyPr>
+          <a:lstStyle/>
+          <a:p>
+            <a:pPr algn="l">
+              <a:lnSpc>
+                <a:spcPct val="120000"/>
+              </a:lnSpc>
+              <a:spcBef>
+                <a:spcPts val="0"/>
+              </a:spcBef>
+              <a:spcAft>
+                <a:spcPts val="0"/>
+              </a:spcAft>
+              <a:defRPr sz="1100" b="0">
+                <a:solidFill>
+                  <a:srgbClr val="6B6860"/>
+                </a:solidFill>
+                <a:latin typeface="Calibri"/>
+              </a:defRPr>
+            </a:pPr>
+            <a:r>
+              <a:t>Daily co-lead · Founding engineer</a:t>
+            </a:r>
+          </a:p>
+        </p:txBody>
+      </p:sp>
+      <p:sp>
+        <p:nvSpPr>
+          <p:cNvPr id="20" name="TextBox 19"/>
+          <p:cNvSpPr txBox="1"/>
+          <p:nvPr/>
+        </p:nvSpPr>
+        <p:spPr>
+          <a:xfrm>
+            <a:off x="7223760" y="4572000"/>
+            <a:ext cx="4114800" cy="256032"/>
+          </a:xfrm>
+          <a:prstGeom prst="rect">
+            <a:avLst/>
+          </a:prstGeom>
+          <a:noFill/>
+        </p:spPr>
+        <p:txBody>
+          <a:bodyPr wrap="square">
+            <a:spAutoFit/>
+          </a:bodyPr>
+          <a:lstStyle/>
+          <a:p>
+            <a:pPr algn="l">
+              <a:lnSpc>
+                <a:spcPct val="120000"/>
+              </a:lnSpc>
+              <a:spcBef>
+                <a:spcPts val="0"/>
+              </a:spcBef>
+              <a:spcAft>
+                <a:spcPts val="0"/>
+              </a:spcAft>
+              <a:defRPr sz="1300" b="1">
+                <a:solidFill>
+                  <a:srgbClr val="2C2A26"/>
+                </a:solidFill>
+                <a:latin typeface="Calibri"/>
+              </a:defRPr>
+            </a:pPr>
+            <a:r>
+              <a:t>Lucian Hymer</a:t>
+            </a:r>
+          </a:p>
+        </p:txBody>
+      </p:sp>
+      <p:sp>
+        <p:nvSpPr>
+          <p:cNvPr id="21" name="TextBox 20"/>
+          <p:cNvSpPr txBox="1"/>
+          <p:nvPr/>
+        </p:nvSpPr>
+        <p:spPr>
+          <a:xfrm>
+            <a:off x="7223760" y="4800600"/>
+            <a:ext cx="4114800" cy="256032"/>
+          </a:xfrm>
+          <a:prstGeom prst="rect">
+            <a:avLst/>
+          </a:prstGeom>
+          <a:noFill/>
+        </p:spPr>
+        <p:txBody>
+          <a:bodyPr wrap="square">
+            <a:spAutoFit/>
+          </a:bodyPr>
+          <a:lstStyle/>
+          <a:p>
+            <a:pPr algn="l">
+              <a:lnSpc>
+                <a:spcPct val="120000"/>
+              </a:lnSpc>
+              <a:spcBef>
+                <a:spcPts val="0"/>
+              </a:spcBef>
+              <a:spcAft>
+                <a:spcPts val="0"/>
+              </a:spcAft>
+              <a:defRPr sz="1100" b="0">
+                <a:solidFill>
+                  <a:srgbClr val="6B6860"/>
+                </a:solidFill>
+                <a:latin typeface="Calibri"/>
+              </a:defRPr>
+            </a:pPr>
+            <a:r>
+              <a:t>Server co-lead · Founding engineer</a:t>
+            </a:r>
+          </a:p>
+        </p:txBody>
+      </p:sp>
+      <p:sp>
+        <p:nvSpPr>
+          <p:cNvPr id="22" name="TextBox 21"/>
+          <p:cNvSpPr txBox="1"/>
+          <p:nvPr/>
+        </p:nvSpPr>
+        <p:spPr>
+          <a:xfrm>
+            <a:off x="7223760" y="5029200"/>
+            <a:ext cx="4114800" cy="256032"/>
+          </a:xfrm>
+          <a:prstGeom prst="rect">
+            <a:avLst/>
+          </a:prstGeom>
+          <a:noFill/>
+        </p:spPr>
+        <p:txBody>
+          <a:bodyPr wrap="square">
+            <a:spAutoFit/>
+          </a:bodyPr>
+          <a:lstStyle/>
+          <a:p>
+            <a:pPr algn="l">
+              <a:lnSpc>
+                <a:spcPct val="120000"/>
+              </a:lnSpc>
+              <a:spcBef>
+                <a:spcPts val="0"/>
+              </a:spcBef>
+              <a:spcAft>
+                <a:spcPts val="0"/>
+              </a:spcAft>
+              <a:defRPr sz="1300" b="1">
+                <a:solidFill>
+                  <a:srgbClr val="2C2A26"/>
+                </a:solidFill>
+                <a:latin typeface="Calibri"/>
+              </a:defRPr>
+            </a:pPr>
+            <a:r>
+              <a:t>Marvin Melzer</a:t>
+            </a:r>
+          </a:p>
+        </p:txBody>
+      </p:sp>
+      <p:sp>
+        <p:nvSpPr>
+          <p:cNvPr id="23" name="TextBox 22"/>
+          <p:cNvSpPr txBox="1"/>
+          <p:nvPr/>
+        </p:nvSpPr>
+        <p:spPr>
+          <a:xfrm>
+            <a:off x="7223760" y="5257800"/>
+            <a:ext cx="4114800" cy="256032"/>
+          </a:xfrm>
+          <a:prstGeom prst="rect">
+            <a:avLst/>
+          </a:prstGeom>
+          <a:noFill/>
+        </p:spPr>
+        <p:txBody>
+          <a:bodyPr wrap="square">
+            <a:spAutoFit/>
+          </a:bodyPr>
+          <a:lstStyle/>
+          <a:p>
+            <a:pPr algn="l">
+              <a:lnSpc>
+                <a:spcPct val="120000"/>
+              </a:lnSpc>
+              <a:spcBef>
+                <a:spcPts val="0"/>
+              </a:spcBef>
+              <a:spcAft>
+                <a:spcPts val="0"/>
+              </a:spcAft>
+              <a:defRPr sz="1100" b="0">
+                <a:solidFill>
+                  <a:srgbClr val="6B6860"/>
+                </a:solidFill>
+                <a:latin typeface="Calibri"/>
+              </a:defRPr>
+            </a:pPr>
+            <a:r>
+              <a:t>Hardware · Pendant prototype</a:t>
+            </a:r>
+          </a:p>
+        </p:txBody>
+      </p:sp>
+      <p:sp>
+        <p:nvSpPr>
+          <p:cNvPr id="24" name="TextBox 23"/>
+          <p:cNvSpPr txBox="1"/>
+          <p:nvPr/>
+        </p:nvSpPr>
+        <p:spPr>
+          <a:xfrm>
+            <a:off x="7223760" y="5486400"/>
+            <a:ext cx="4114800" cy="256032"/>
+          </a:xfrm>
+          <a:prstGeom prst="rect">
+            <a:avLst/>
+          </a:prstGeom>
+          <a:noFill/>
+        </p:spPr>
+        <p:txBody>
+          <a:bodyPr wrap="square">
+            <a:spAutoFit/>
+          </a:bodyPr>
+          <a:lstStyle/>
+          <a:p>
+            <a:pPr algn="l">
+              <a:lnSpc>
+                <a:spcPct val="120000"/>
+              </a:lnSpc>
+              <a:spcBef>
+                <a:spcPts val="0"/>
+              </a:spcBef>
+              <a:spcAft>
+                <a:spcPts val="0"/>
+              </a:spcAft>
+              <a:defRPr sz="1300" b="1">
+                <a:solidFill>
+                  <a:srgbClr val="2C2A26"/>
+                </a:solidFill>
+                <a:latin typeface="Calibri"/>
+              </a:defRPr>
+            </a:pPr>
+            <a:r>
+              <a:t>Neil Yarnal</a:t>
+            </a:r>
+          </a:p>
+        </p:txBody>
+      </p:sp>
+      <p:sp>
+        <p:nvSpPr>
+          <p:cNvPr id="25" name="TextBox 24"/>
+          <p:cNvSpPr txBox="1"/>
+          <p:nvPr/>
+        </p:nvSpPr>
+        <p:spPr>
+          <a:xfrm>
+            <a:off x="7223760" y="5715000"/>
+            <a:ext cx="4114800" cy="256032"/>
+          </a:xfrm>
+          <a:prstGeom prst="rect">
+            <a:avLst/>
+          </a:prstGeom>
+          <a:noFill/>
+        </p:spPr>
+        <p:txBody>
+          <a:bodyPr wrap="square">
+            <a:spAutoFit/>
+          </a:bodyPr>
+          <a:lstStyle/>
+          <a:p>
+            <a:pPr algn="l">
+              <a:lnSpc>
+                <a:spcPct val="120000"/>
+              </a:lnSpc>
+              <a:spcBef>
+                <a:spcPts val="0"/>
+              </a:spcBef>
+              <a:spcAft>
+                <a:spcPts val="0"/>
+              </a:spcAft>
+              <a:defRPr sz="1100" b="0">
+                <a:solidFill>
+                  <a:srgbClr val="6B6860"/>
+                </a:solidFill>
+                <a:latin typeface="Calibri"/>
+              </a:defRPr>
+            </a:pPr>
+            <a:r>
+              <a:t>Brand &amp; design</a:t>
+            </a:r>
+          </a:p>
+        </p:txBody>
+      </p:sp>
+      <p:sp>
+        <p:nvSpPr>
+          <p:cNvPr id="26" name="TextBox 25"/>
+          <p:cNvSpPr txBox="1"/>
+          <p:nvPr/>
+        </p:nvSpPr>
+        <p:spPr>
+          <a:xfrm>
+            <a:off x="1097280" y="5943600"/>
+            <a:ext cx="9144000" cy="457200"/>
+          </a:xfrm>
+          <a:prstGeom prst="rect">
+            <a:avLst/>
+          </a:prstGeom>
+          <a:noFill/>
+        </p:spPr>
+        <p:txBody>
+          <a:bodyPr wrap="square">
+            <a:spAutoFit/>
+          </a:bodyPr>
+          <a:lstStyle/>
+          <a:p>
+            <a:pPr algn="l">
+              <a:lnSpc>
+                <a:spcPct val="120000"/>
+              </a:lnSpc>
+              <a:spcBef>
+                <a:spcPts val="0"/>
+              </a:spcBef>
+              <a:spcAft>
+                <a:spcPts val="0"/>
+              </a:spcAft>
+              <a:defRPr sz="1200" b="0">
+                <a:solidFill>
+                  <a:srgbClr val="9A9690"/>
+                </a:solidFill>
+                <a:latin typeface="Calibri"/>
+              </a:defRPr>
+            </a:pPr>
+            <a:r>
+              <a:t>MA Ecopsychology · MS Creative Technology &amp; Design (CU ATLAS, graduating May 2026) · Founding engineer ×2 · Ex-Google · 10+ years full stack</a:t>
+            </a:r>
+          </a:p>
+        </p:txBody>
+      </p:sp>
     </p:spTree>
   </p:cSld>
   <p:clrMapOvr>
@@ -3425,6 +9285,14 @@
 <file path=ppt/slides/slide9.xml><?xml version="1.0" encoding="utf-8"?>
 <p:sld xmlns:a="http://schemas.openxmlformats.org/drawingml/2006/main" xmlns:p="http://schemas.openxmlformats.org/presentationml/2006/main" xmlns:r="http://schemas.openxmlformats.org/officeDocument/2006/relationships">
   <p:cSld>
+    <p:bg>
+      <p:bgPr>
+        <a:solidFill>
+          <a:srgbClr val="FAF8F4"/>
+        </a:solidFill>
+        <a:effectLst/>
+      </p:bgPr>
+    </p:bg>
     <p:spTree>
       <p:nvGrpSpPr>
         <p:cNvPr id="1" name=""/>
@@ -3432,30 +9300,588 @@
         <p:nvPr/>
       </p:nvGrpSpPr>
       <p:grpSpPr/>
-      <p:pic>
-        <p:nvPicPr>
-          <p:cNvPr id="2" name="Picture 1" descr="slide_09.png"/>
-          <p:cNvPicPr>
-            <a:picLocks noChangeAspect="1"/>
-          </p:cNvPicPr>
-          <p:nvPr/>
-        </p:nvPicPr>
-        <p:blipFill>
-          <a:blip r:embed="rId2"/>
-          <a:stretch>
-            <a:fillRect/>
-          </a:stretch>
-        </p:blipFill>
+      <p:sp>
+        <p:nvSpPr>
+          <p:cNvPr id="2" name="Rectangle 1"/>
+          <p:cNvSpPr/>
+          <p:nvPr/>
+        </p:nvSpPr>
         <p:spPr>
           <a:xfrm>
             <a:off x="0" y="0"/>
-            <a:ext cx="12191695" cy="6858000"/>
-          </a:xfrm>
-          <a:prstGeom prst="rect">
-            <a:avLst/>
-          </a:prstGeom>
-        </p:spPr>
-      </p:pic>
+            <a:ext cx="12191695" cy="54864"/>
+          </a:xfrm>
+          <a:prstGeom prst="rect">
+            <a:avLst/>
+          </a:prstGeom>
+          <a:solidFill>
+            <a:srgbClr val="4A7C59"/>
+          </a:solidFill>
+          <a:ln>
+            <a:noFill/>
+          </a:ln>
+        </p:spPr>
+        <p:style>
+          <a:lnRef idx="1">
+            <a:schemeClr val="accent1"/>
+          </a:lnRef>
+          <a:fillRef idx="3">
+            <a:schemeClr val="accent1"/>
+          </a:fillRef>
+          <a:effectRef idx="2">
+            <a:schemeClr val="accent1"/>
+          </a:effectRef>
+          <a:fontRef idx="minor">
+            <a:schemeClr val="lt1"/>
+          </a:fontRef>
+        </p:style>
+        <p:txBody>
+          <a:bodyPr rtlCol="0" anchor="ctr"/>
+          <a:lstStyle/>
+          <a:p>
+            <a:pPr algn="ctr"/>
+          </a:p>
+        </p:txBody>
+      </p:sp>
+      <p:sp>
+        <p:nvSpPr>
+          <p:cNvPr id="3" name="TextBox 2"/>
+          <p:cNvSpPr txBox="1"/>
+          <p:nvPr/>
+        </p:nvSpPr>
+        <p:spPr>
+          <a:xfrm>
+            <a:off x="1097280" y="6400800"/>
+            <a:ext cx="3657600" cy="274320"/>
+          </a:xfrm>
+          <a:prstGeom prst="rect">
+            <a:avLst/>
+          </a:prstGeom>
+          <a:noFill/>
+        </p:spPr>
+        <p:txBody>
+          <a:bodyPr wrap="none">
+            <a:spAutoFit/>
+          </a:bodyPr>
+          <a:lstStyle/>
+          <a:p>
+            <a:pPr>
+              <a:defRPr sz="900">
+                <a:solidFill>
+                  <a:srgbClr val="9A9690"/>
+                </a:solidFill>
+                <a:latin typeface="Calibri"/>
+              </a:defRPr>
+            </a:pPr>
+            <a:r>
+              <a:t>parachute.computer</a:t>
+            </a:r>
+          </a:p>
+        </p:txBody>
+      </p:sp>
+      <p:sp>
+        <p:nvSpPr>
+          <p:cNvPr id="4" name="TextBox 3"/>
+          <p:cNvSpPr txBox="1"/>
+          <p:nvPr/>
+        </p:nvSpPr>
+        <p:spPr>
+          <a:xfrm>
+            <a:off x="1097280" y="1097280"/>
+            <a:ext cx="3657600" cy="365760"/>
+          </a:xfrm>
+          <a:prstGeom prst="rect">
+            <a:avLst/>
+          </a:prstGeom>
+          <a:noFill/>
+        </p:spPr>
+        <p:txBody>
+          <a:bodyPr wrap="square">
+            <a:spAutoFit/>
+          </a:bodyPr>
+          <a:lstStyle/>
+          <a:p>
+            <a:pPr algn="l">
+              <a:lnSpc>
+                <a:spcPct val="120000"/>
+              </a:lnSpc>
+              <a:spcBef>
+                <a:spcPts val="0"/>
+              </a:spcBef>
+              <a:spcAft>
+                <a:spcPts val="0"/>
+              </a:spcAft>
+              <a:defRPr sz="1100" b="1">
+                <a:solidFill>
+                  <a:srgbClr val="4A7C59"/>
+                </a:solidFill>
+                <a:latin typeface="Calibri"/>
+              </a:defRPr>
+            </a:pPr>
+            <a:r>
+              <a:t>THE ASK</a:t>
+            </a:r>
+          </a:p>
+        </p:txBody>
+      </p:sp>
+      <p:sp>
+        <p:nvSpPr>
+          <p:cNvPr id="5" name="TextBox 4"/>
+          <p:cNvSpPr txBox="1"/>
+          <p:nvPr/>
+        </p:nvSpPr>
+        <p:spPr>
+          <a:xfrm>
+            <a:off x="1097280" y="1554480"/>
+            <a:ext cx="9144000" cy="1371600"/>
+          </a:xfrm>
+          <a:prstGeom prst="rect">
+            <a:avLst/>
+          </a:prstGeom>
+          <a:noFill/>
+        </p:spPr>
+        <p:txBody>
+          <a:bodyPr wrap="square">
+            <a:spAutoFit/>
+          </a:bodyPr>
+          <a:lstStyle/>
+          <a:p>
+            <a:pPr algn="l">
+              <a:lnSpc>
+                <a:spcPct val="105000"/>
+              </a:lnSpc>
+              <a:spcBef>
+                <a:spcPts val="0"/>
+              </a:spcBef>
+              <a:spcAft>
+                <a:spcPts val="0"/>
+              </a:spcAft>
+              <a:defRPr sz="4000" b="0">
+                <a:solidFill>
+                  <a:srgbClr val="2C2A26"/>
+                </a:solidFill>
+                <a:latin typeface="Georgia"/>
+              </a:defRPr>
+            </a:pPr>
+            <a:r>
+              <a:t>Raising $300K to launch</a:t>
+            </a:r>
+            <a:br/>
+            <a:r>
+              <a:t>the memory layer.</a:t>
+            </a:r>
+          </a:p>
+        </p:txBody>
+      </p:sp>
+      <p:sp>
+        <p:nvSpPr>
+          <p:cNvPr id="6" name="Rounded Rectangle 5"/>
+          <p:cNvSpPr/>
+          <p:nvPr/>
+        </p:nvSpPr>
+        <p:spPr>
+          <a:xfrm>
+            <a:off x="914400" y="3017520"/>
+            <a:ext cx="5486400" cy="2011680"/>
+          </a:xfrm>
+          <a:prstGeom prst="roundRect">
+            <a:avLst/>
+          </a:prstGeom>
+          <a:solidFill>
+            <a:srgbClr val="FFFFFF"/>
+          </a:solidFill>
+          <a:ln w="12700">
+            <a:solidFill>
+              <a:srgbClr val="E4E0D8"/>
+            </a:solidFill>
+          </a:ln>
+        </p:spPr>
+        <p:style>
+          <a:lnRef idx="1">
+            <a:schemeClr val="accent1"/>
+          </a:lnRef>
+          <a:fillRef idx="3">
+            <a:schemeClr val="accent1"/>
+          </a:fillRef>
+          <a:effectRef idx="2">
+            <a:schemeClr val="accent1"/>
+          </a:effectRef>
+          <a:fontRef idx="minor">
+            <a:schemeClr val="lt1"/>
+          </a:fontRef>
+        </p:style>
+        <p:txBody>
+          <a:bodyPr rtlCol="0" anchor="ctr"/>
+          <a:lstStyle/>
+          <a:p>
+            <a:pPr algn="ctr"/>
+          </a:p>
+        </p:txBody>
+      </p:sp>
+      <p:sp>
+        <p:nvSpPr>
+          <p:cNvPr id="7" name="TextBox 6"/>
+          <p:cNvSpPr txBox="1"/>
+          <p:nvPr/>
+        </p:nvSpPr>
+        <p:spPr>
+          <a:xfrm>
+            <a:off x="1280160" y="3246120"/>
+            <a:ext cx="2011680" cy="365760"/>
+          </a:xfrm>
+          <a:prstGeom prst="rect">
+            <a:avLst/>
+          </a:prstGeom>
+          <a:noFill/>
+        </p:spPr>
+        <p:txBody>
+          <a:bodyPr wrap="square">
+            <a:spAutoFit/>
+          </a:bodyPr>
+          <a:lstStyle/>
+          <a:p>
+            <a:pPr algn="l">
+              <a:lnSpc>
+                <a:spcPct val="120000"/>
+              </a:lnSpc>
+              <a:spcBef>
+                <a:spcPts val="0"/>
+              </a:spcBef>
+              <a:spcAft>
+                <a:spcPts val="0"/>
+              </a:spcAft>
+              <a:defRPr sz="1300" b="0">
+                <a:solidFill>
+                  <a:srgbClr val="9A9690"/>
+                </a:solidFill>
+                <a:latin typeface="Calibri"/>
+              </a:defRPr>
+            </a:pPr>
+            <a:r>
+              <a:t>Instrument</a:t>
+            </a:r>
+          </a:p>
+        </p:txBody>
+      </p:sp>
+      <p:sp>
+        <p:nvSpPr>
+          <p:cNvPr id="8" name="TextBox 7"/>
+          <p:cNvSpPr txBox="1"/>
+          <p:nvPr/>
+        </p:nvSpPr>
+        <p:spPr>
+          <a:xfrm>
+            <a:off x="3291840" y="3246120"/>
+            <a:ext cx="2926080" cy="365760"/>
+          </a:xfrm>
+          <a:prstGeom prst="rect">
+            <a:avLst/>
+          </a:prstGeom>
+          <a:noFill/>
+        </p:spPr>
+        <p:txBody>
+          <a:bodyPr wrap="square">
+            <a:spAutoFit/>
+          </a:bodyPr>
+          <a:lstStyle/>
+          <a:p>
+            <a:pPr algn="l">
+              <a:lnSpc>
+                <a:spcPct val="120000"/>
+              </a:lnSpc>
+              <a:spcBef>
+                <a:spcPts val="0"/>
+              </a:spcBef>
+              <a:spcAft>
+                <a:spcPts val="0"/>
+              </a:spcAft>
+              <a:defRPr sz="1600" b="0">
+                <a:solidFill>
+                  <a:srgbClr val="2C2A26"/>
+                </a:solidFill>
+                <a:latin typeface="Georgia"/>
+              </a:defRPr>
+            </a:pPr>
+            <a:r>
+              <a:t>SAFE (YC standard)</a:t>
+            </a:r>
+          </a:p>
+        </p:txBody>
+      </p:sp>
+      <p:sp>
+        <p:nvSpPr>
+          <p:cNvPr id="9" name="TextBox 8"/>
+          <p:cNvSpPr txBox="1"/>
+          <p:nvPr/>
+        </p:nvSpPr>
+        <p:spPr>
+          <a:xfrm>
+            <a:off x="1280160" y="3749040"/>
+            <a:ext cx="2011680" cy="365760"/>
+          </a:xfrm>
+          <a:prstGeom prst="rect">
+            <a:avLst/>
+          </a:prstGeom>
+          <a:noFill/>
+        </p:spPr>
+        <p:txBody>
+          <a:bodyPr wrap="square">
+            <a:spAutoFit/>
+          </a:bodyPr>
+          <a:lstStyle/>
+          <a:p>
+            <a:pPr algn="l">
+              <a:lnSpc>
+                <a:spcPct val="120000"/>
+              </a:lnSpc>
+              <a:spcBef>
+                <a:spcPts val="0"/>
+              </a:spcBef>
+              <a:spcAft>
+                <a:spcPts val="0"/>
+              </a:spcAft>
+              <a:defRPr sz="1300" b="0">
+                <a:solidFill>
+                  <a:srgbClr val="9A9690"/>
+                </a:solidFill>
+                <a:latin typeface="Calibri"/>
+              </a:defRPr>
+            </a:pPr>
+            <a:r>
+              <a:t>Use of funds</a:t>
+            </a:r>
+          </a:p>
+        </p:txBody>
+      </p:sp>
+      <p:sp>
+        <p:nvSpPr>
+          <p:cNvPr id="10" name="TextBox 9"/>
+          <p:cNvSpPr txBox="1"/>
+          <p:nvPr/>
+        </p:nvSpPr>
+        <p:spPr>
+          <a:xfrm>
+            <a:off x="3291840" y="3749040"/>
+            <a:ext cx="2926080" cy="365760"/>
+          </a:xfrm>
+          <a:prstGeom prst="rect">
+            <a:avLst/>
+          </a:prstGeom>
+          <a:noFill/>
+        </p:spPr>
+        <p:txBody>
+          <a:bodyPr wrap="square">
+            <a:spAutoFit/>
+          </a:bodyPr>
+          <a:lstStyle/>
+          <a:p>
+            <a:pPr algn="l">
+              <a:lnSpc>
+                <a:spcPct val="120000"/>
+              </a:lnSpc>
+              <a:spcBef>
+                <a:spcPts val="0"/>
+              </a:spcBef>
+              <a:spcAft>
+                <a:spcPts val="0"/>
+              </a:spcAft>
+              <a:defRPr sz="1600" b="0">
+                <a:solidFill>
+                  <a:srgbClr val="2C2A26"/>
+                </a:solidFill>
+                <a:latin typeface="Georgia"/>
+              </a:defRPr>
+            </a:pPr>
+            <a:r>
+              <a:t>Core team full-time through 2026</a:t>
+            </a:r>
+          </a:p>
+        </p:txBody>
+      </p:sp>
+      <p:sp>
+        <p:nvSpPr>
+          <p:cNvPr id="11" name="TextBox 10"/>
+          <p:cNvSpPr txBox="1"/>
+          <p:nvPr/>
+        </p:nvSpPr>
+        <p:spPr>
+          <a:xfrm>
+            <a:off x="1280160" y="4251960"/>
+            <a:ext cx="2011680" cy="365760"/>
+          </a:xfrm>
+          <a:prstGeom prst="rect">
+            <a:avLst/>
+          </a:prstGeom>
+          <a:noFill/>
+        </p:spPr>
+        <p:txBody>
+          <a:bodyPr wrap="square">
+            <a:spAutoFit/>
+          </a:bodyPr>
+          <a:lstStyle/>
+          <a:p>
+            <a:pPr algn="l">
+              <a:lnSpc>
+                <a:spcPct val="120000"/>
+              </a:lnSpc>
+              <a:spcBef>
+                <a:spcPts val="0"/>
+              </a:spcBef>
+              <a:spcAft>
+                <a:spcPts val="0"/>
+              </a:spcAft>
+              <a:defRPr sz="1300" b="0">
+                <a:solidFill>
+                  <a:srgbClr val="9A9690"/>
+                </a:solidFill>
+                <a:latin typeface="Calibri"/>
+              </a:defRPr>
+            </a:pPr>
+            <a:r>
+              <a:t>Goal</a:t>
+            </a:r>
+          </a:p>
+        </p:txBody>
+      </p:sp>
+      <p:sp>
+        <p:nvSpPr>
+          <p:cNvPr id="12" name="TextBox 11"/>
+          <p:cNvSpPr txBox="1"/>
+          <p:nvPr/>
+        </p:nvSpPr>
+        <p:spPr>
+          <a:xfrm>
+            <a:off x="3291840" y="4251960"/>
+            <a:ext cx="2926080" cy="365760"/>
+          </a:xfrm>
+          <a:prstGeom prst="rect">
+            <a:avLst/>
+          </a:prstGeom>
+          <a:noFill/>
+        </p:spPr>
+        <p:txBody>
+          <a:bodyPr wrap="square">
+            <a:spAutoFit/>
+          </a:bodyPr>
+          <a:lstStyle/>
+          <a:p>
+            <a:pPr algn="l">
+              <a:lnSpc>
+                <a:spcPct val="120000"/>
+              </a:lnSpc>
+              <a:spcBef>
+                <a:spcPts val="0"/>
+              </a:spcBef>
+              <a:spcAft>
+                <a:spcPts val="0"/>
+              </a:spcAft>
+              <a:defRPr sz="1600" b="0">
+                <a:solidFill>
+                  <a:srgbClr val="2C2A26"/>
+                </a:solidFill>
+                <a:latin typeface="Georgia"/>
+              </a:defRPr>
+            </a:pPr>
+            <a:r>
+              <a:t>Production launch by June · revenue immediately</a:t>
+            </a:r>
+          </a:p>
+        </p:txBody>
+      </p:sp>
+      <p:sp>
+        <p:nvSpPr>
+          <p:cNvPr id="13" name="TextBox 12"/>
+          <p:cNvSpPr txBox="1"/>
+          <p:nvPr/>
+        </p:nvSpPr>
+        <p:spPr>
+          <a:xfrm>
+            <a:off x="1097280" y="5303520"/>
+            <a:ext cx="9144000" cy="914400"/>
+          </a:xfrm>
+          <a:prstGeom prst="rect">
+            <a:avLst/>
+          </a:prstGeom>
+          <a:noFill/>
+        </p:spPr>
+        <p:txBody>
+          <a:bodyPr wrap="square">
+            <a:spAutoFit/>
+          </a:bodyPr>
+          <a:lstStyle/>
+          <a:p>
+            <a:pPr algn="l">
+              <a:lnSpc>
+                <a:spcPct val="130000"/>
+              </a:lnSpc>
+              <a:spcBef>
+                <a:spcPts val="0"/>
+              </a:spcBef>
+              <a:spcAft>
+                <a:spcPts val="0"/>
+              </a:spcAft>
+              <a:defRPr sz="2800" b="0">
+                <a:solidFill>
+                  <a:srgbClr val="2C2A26"/>
+                </a:solidFill>
+                <a:latin typeface="Georgia"/>
+              </a:defRPr>
+            </a:pPr>
+            <a:r>
+              <a:t>A memory layer for humans and AI</a:t>
+            </a:r>
+            <a:br/>
+            <a:r>
+              <a:t>to think and remember together.</a:t>
+            </a:r>
+          </a:p>
+        </p:txBody>
+      </p:sp>
+      <p:sp>
+        <p:nvSpPr>
+          <p:cNvPr id="14" name="TextBox 13"/>
+          <p:cNvSpPr txBox="1"/>
+          <p:nvPr/>
+        </p:nvSpPr>
+        <p:spPr>
+          <a:xfrm>
+            <a:off x="1097280" y="6126480"/>
+            <a:ext cx="9144000" cy="365760"/>
+          </a:xfrm>
+          <a:prstGeom prst="rect">
+            <a:avLst/>
+          </a:prstGeom>
+          <a:noFill/>
+        </p:spPr>
+        <p:txBody>
+          <a:bodyPr wrap="square">
+            <a:spAutoFit/>
+          </a:bodyPr>
+          <a:lstStyle/>
+          <a:p>
+            <a:pPr algn="l">
+              <a:lnSpc>
+                <a:spcPct val="120000"/>
+              </a:lnSpc>
+              <a:spcBef>
+                <a:spcPts val="0"/>
+              </a:spcBef>
+              <a:spcAft>
+                <a:spcPts val="0"/>
+              </a:spcAft>
+              <a:defRPr sz="1200" b="0">
+                <a:solidFill>
+                  <a:srgbClr val="9A9690"/>
+                </a:solidFill>
+                <a:latin typeface="Calibri"/>
+              </a:defRPr>
+            </a:pPr>
+            <a:r>
+              <a:t>Aaron Gabriel Neyer  ·  aaron@parachute.computer  ·  (513) 593-1721  ·  Boulder, CO</a:t>
+            </a:r>
+          </a:p>
+        </p:txBody>
+      </p:sp>
     </p:spTree>
   </p:cSld>
   <p:clrMapOvr>

--- a/nvc-pitch-deck.pptx
+++ b/nvc-pitch-deck.pptx
@@ -4481,7 +4481,7 @@
             </a:r>
             <a:br/>
             <a:r>
-              <a:t>Things, Tags, and Tools.</a:t>
+              <a:t>Notes, Tags, and Links.</a:t>
             </a:r>
           </a:p>
         </p:txBody>
@@ -4849,7 +4849,7 @@
               </a:defRPr>
             </a:pPr>
             <a:r>
-              <a:t>Parachute Server — Things · Tags · Tools</a:t>
+              <a:t>Parachute Server — Notes · Tags · Links</a:t>
             </a:r>
           </a:p>
         </p:txBody>
@@ -8504,7 +8504,7 @@
               </a:defRPr>
             </a:pPr>
             <a:r>
-              <a:t>MCP server with Things, Tags, Tools architecture</a:t>
+              <a:t>MCP server with Notes, Tags, Links architecture</a:t>
             </a:r>
           </a:p>
         </p:txBody>

--- a/nvc-pitch-deck.pptx
+++ b/nvc-pitch-deck.pptx
@@ -4849,7 +4849,7 @@
               </a:defRPr>
             </a:pPr>
             <a:r>
-              <a:t>Parachute Server — Notes · Tags · Links</a:t>
+              <a:t>Parachute Vault — Notes · Tags · Links</a:t>
             </a:r>
           </a:p>
         </p:txBody>
